--- a/files/GrovX_Presentation.pptx
+++ b/files/GrovX_Presentation.pptx
@@ -820,7 +820,7 @@
                 <a:pPr>
                   <a:defRPr sz="1100" b="0" i="0" u="none" strike="noStrike">
                     <a:solidFill>
-                      <a:srgbClr val="5B6472"/>
+                      <a:srgbClr val="000000"/>
                     </a:solidFill>
                     <a:latin typeface="Arial"/>
                   </a:defRPr>
@@ -828,7 +828,7 @@
                 <a:r>
                   <a:rPr sz="1100" b="0" i="0" u="none" strike="noStrike">
                     <a:solidFill>
-                      <a:srgbClr val="5B6472"/>
+                      <a:srgbClr val="000000"/>
                     </a:solidFill>
                     <a:latin typeface="Arial"/>
                   </a:rPr>
@@ -860,7 +860,7 @@
             <a:pPr>
               <a:defRPr sz="1000" b="0" i="0" u="none" strike="noStrike">
                 <a:solidFill>
-                  <a:srgbClr val="5B6472"/>
+                  <a:srgbClr val="000000"/>
                 </a:solidFill>
                 <a:latin typeface="Arial"/>
               </a:defRPr>
@@ -887,7 +887,7 @@
           <c:spPr>
             <a:ln w="9525" cap="flat">
               <a:solidFill>
-                <a:srgbClr val="E3E6EA"/>
+                <a:srgbClr val="E5E7EB"/>
               </a:solidFill>
               <a:prstDash val="solid"/>
               <a:round/>
@@ -903,7 +903,7 @@
                 <a:pPr>
                   <a:defRPr sz="1100" b="0" i="0" u="none" strike="noStrike">
                     <a:solidFill>
-                      <a:srgbClr val="5B6472"/>
+                      <a:srgbClr val="000000"/>
                     </a:solidFill>
                     <a:latin typeface="Arial"/>
                   </a:defRPr>
@@ -911,7 +911,7 @@
                 <a:r>
                   <a:rPr sz="1100" b="0" i="0" u="none" strike="noStrike">
                     <a:solidFill>
-                      <a:srgbClr val="5B6472"/>
+                      <a:srgbClr val="000000"/>
                     </a:solidFill>
                     <a:latin typeface="Arial"/>
                   </a:rPr>
@@ -943,7 +943,7 @@
             <a:pPr>
               <a:defRPr sz="1000" b="0" i="0" u="none" strike="noStrike">
                 <a:solidFill>
-                  <a:srgbClr val="5B6472"/>
+                  <a:srgbClr val="000000"/>
                 </a:solidFill>
                 <a:latin typeface="Arial"/>
               </a:defRPr>
@@ -973,7 +973,7 @@
           <a:pPr>
             <a:defRPr sz="1100">
               <a:solidFill>
-                <a:srgbClr val="14181F"/>
+                <a:srgbClr val="000000"/>
               </a:solidFill>
               <a:latin typeface="Calibri"/>
               <a:cs typeface="Calibri"/>
@@ -1394,7 +1394,7 @@
           <a:p>
             <a:r>
               <a:rPr lang="en-US" dirty="0"/>
-              <a:t>Introduce the project in one sentence: I implemented Grover’s search algorithm as a real quantum circuit on a simulator, compared it with ordinary classical search, and measured what it would cost on real hardware. The website is live at the address on the slide and everything I show today comes from it. The bars on the right are the idea of the whole talk: many equal items, and one marked item whose amplitude gets pushed up.</a:t>
+              <a:t>Introduce the project in one sentence: I implemented Grover’s search algorithm as a real quantum circuit on a simulator, compared it with ordinary classical search, and measured what it would cost on real hardware. The website is live at the address on the slide and everything I show today comes from it.</a:t>
             </a:r>
             <a:endParaRPr lang="en-US" dirty="0"/>
           </a:p>
@@ -1834,7 +1834,7 @@
           <a:p>
             <a:r>
               <a:rPr lang="en-US" dirty="0"/>
-              <a:t>This is the actual circuit for three qubits with the secret 101. The red box is the oracle: an X gate on the qubit where the secret has a zero, then a multi-controlled Z, then the X again. That flips the sign of exactly one state. The blue box is the diffusion step: H, X, multi-controlled Z, X, H on all qubits. Repeat those two boxes. In my code these are literally lists of gates that the simulator executes one by one, so it is a real circuit simulation and not a shortcut formula.</a:t>
+              <a:t>This is the actual circuit for three qubits with the secret 101. The left dashed block is the oracle: an X gate on the qubit where the secret has a zero, then a multi-controlled Z, then the X again. That flips the sign of exactly one state. The right dashed block is the diffusion step: H, X, multi-controlled Z, X, H on all qubits. Repeat those two blocks. In my code these are literally lists of gates that the simulator executes one by one, so it is a real circuit simulation and not a shortcut formula.</a:t>
             </a:r>
             <a:endParaRPr lang="en-US" dirty="0"/>
           </a:p>
@@ -2338,6 +2338,54 @@
           <a:chExt cx="0" cy="0"/>
         </a:xfrm>
       </p:grpSpPr>
+      <p:sp>
+        <p:nvSpPr>
+          <p:cNvPr id="25" name="Slide Number Placeholder 0"/>
+          <p:cNvSpPr>
+            <a:spLocks noGrp="1"/>
+          </p:cNvSpPr>
+          <p:nvPr>
+            <p:ph type="sldNum" sz="quarter" idx="4294967295"/>
+          </p:nvPr>
+        </p:nvSpPr>
+        <p:spPr>
+          <a:xfrm>
+            <a:off x="8229600" y="4709160"/>
+            <a:ext cx="457200" cy="274320"/>
+          </a:xfrm>
+          <a:prstGeom prst="rect">
+            <a:avLst/>
+          </a:prstGeom>
+          <a:extLst>
+            <a:ext uri="{C572A759-6A51-4108-AA02-DFA0A04FC94B}">
+              <ma14:wrappingTextBoxFlag xmlns:ma14="http://schemas.microsoft.com/office/mac/drawingml/2011/main" val="0"/>
+            </a:ext>
+          </a:extLst>
+        </p:spPr>
+        <p:txBody>
+          <a:bodyPr/>
+          <a:lstStyle>
+            <a:lvl1pPr>
+              <a:defRPr sz="1000">
+                <a:solidFill>
+                  <a:srgbClr val="000000"/>
+                </a:solidFill>
+                <a:latin typeface="Calibri"/>
+                <a:ea typeface="Calibri"/>
+                <a:cs typeface="Calibri"/>
+              </a:defRPr>
+            </a:lvl1pPr>
+          </a:lstStyle>
+          <a:p>
+            <a:pPr algn="r"/>
+            <a:fld id="{F7021451-1387-4CA6-816F-3879F97B5CBC}" type="slidenum">
+              <a:rPr b="0" lang="en-US"/>
+              <a:t>1000</a:t>
+            </a:fld>
+            <a:endParaRPr lang="en-US"/>
+          </a:p>
+        </p:txBody>
+      </p:sp>
     </p:spTree>
   </p:cSld>
   <p:clrMapOvr>
@@ -2363,6 +2411,54 @@
           <a:chExt cx="0" cy="0"/>
         </a:xfrm>
       </p:grpSpPr>
+      <p:sp>
+        <p:nvSpPr>
+          <p:cNvPr id="25" name="Slide Number Placeholder 0"/>
+          <p:cNvSpPr>
+            <a:spLocks noGrp="1"/>
+          </p:cNvSpPr>
+          <p:nvPr>
+            <p:ph type="sldNum" sz="quarter" idx="4294967295"/>
+          </p:nvPr>
+        </p:nvSpPr>
+        <p:spPr>
+          <a:xfrm>
+            <a:off x="8229600" y="4709160"/>
+            <a:ext cx="457200" cy="274320"/>
+          </a:xfrm>
+          <a:prstGeom prst="rect">
+            <a:avLst/>
+          </a:prstGeom>
+          <a:extLst>
+            <a:ext uri="{C572A759-6A51-4108-AA02-DFA0A04FC94B}">
+              <ma14:wrappingTextBoxFlag xmlns:ma14="http://schemas.microsoft.com/office/mac/drawingml/2011/main" val="0"/>
+            </a:ext>
+          </a:extLst>
+        </p:spPr>
+        <p:txBody>
+          <a:bodyPr/>
+          <a:lstStyle>
+            <a:lvl1pPr>
+              <a:defRPr sz="1000">
+                <a:solidFill>
+                  <a:srgbClr val="000000"/>
+                </a:solidFill>
+                <a:latin typeface="Calibri"/>
+                <a:ea typeface="Calibri"/>
+                <a:cs typeface="Calibri"/>
+              </a:defRPr>
+            </a:lvl1pPr>
+          </a:lstStyle>
+          <a:p>
+            <a:pPr algn="r"/>
+            <a:fld id="{F7021451-1387-4CA6-816F-3879F97B5CBC}" type="slidenum">
+              <a:rPr b="0" lang="en-US"/>
+              <a:t>null</a:t>
+            </a:fld>
+            <a:endParaRPr lang="en-US"/>
+          </a:p>
+        </p:txBody>
+      </p:sp>
     </p:spTree>
   </p:cSld>
   <p:clrMap bg1="lt1" tx1="dk1" bg2="lt2" tx2="dk2" accent1="accent1" accent2="accent2" accent3="accent3" accent4="accent4" accent5="accent5" accent6="accent6" hlink="hlink" folHlink="folHlink"/>
@@ -2629,7 +2725,7 @@
     <p:bg>
       <p:bgPr>
         <a:solidFill>
-          <a:srgbClr val="0E2340"/>
+          <a:srgbClr val="FFFFFF"/>
         </a:solidFill>
       </p:bgPr>
     </p:bg>
@@ -2649,14 +2745,14 @@
       </p:grpSpPr>
       <p:sp>
         <p:nvSpPr>
-          <p:cNvPr id="2" name="Text 0"/>
-          <p:cNvSpPr txBox="1"/>
+          <p:cNvPr id="2" name="Title"/>
+          <p:cNvSpPr/>
           <p:nvPr/>
         </p:nvSpPr>
         <p:spPr>
           <a:xfrm>
-            <a:off x="548640" y="914400"/>
-            <a:ext cx="5120640" cy="1463040"/>
+            <a:off x="731520" y="1417320"/>
+            <a:ext cx="7680960" cy="822960"/>
           </a:xfrm>
           <a:prstGeom prst="rect">
             <a:avLst/>
@@ -2672,47 +2768,30 @@
               <a:buNone/>
             </a:pPr>
             <a:r>
-              <a:rPr lang="en-US" sz="4600" b="1" dirty="0">
+              <a:rPr lang="en-US" sz="4800" b="1" dirty="0">
                 <a:solidFill>
-                  <a:srgbClr val="FFFFFF"/>
+                  <a:srgbClr val="000000"/>
                 </a:solidFill>
-                <a:latin typeface="Cambria" pitchFamily="34" charset="0"/>
-                <a:ea typeface="Cambria" pitchFamily="34" charset="-122"/>
-                <a:cs typeface="Cambria" pitchFamily="34" charset="-120"/>
+                <a:latin typeface="Calibri" pitchFamily="34" charset="0"/>
+                <a:ea typeface="Calibri" pitchFamily="34" charset="-122"/>
+                <a:cs typeface="Calibri" pitchFamily="34" charset="-120"/>
               </a:rPr>
-              <a:t>Quantum</a:t>
+              <a:t>Quantum Search Lab</a:t>
             </a:r>
-            <a:endParaRPr lang="en-US" sz="4600" dirty="0"/>
-          </a:p>
-          <a:p>
-            <a:pPr indent="0" marL="0">
-              <a:buNone/>
-            </a:pPr>
-            <a:r>
-              <a:rPr lang="en-US" sz="4600" b="1" dirty="0">
-                <a:solidFill>
-                  <a:srgbClr val="FFFFFF"/>
-                </a:solidFill>
-                <a:latin typeface="Cambria" pitchFamily="34" charset="0"/>
-                <a:ea typeface="Cambria" pitchFamily="34" charset="-122"/>
-                <a:cs typeface="Cambria" pitchFamily="34" charset="-120"/>
-              </a:rPr>
-              <a:t>Search Lab</a:t>
-            </a:r>
-            <a:endParaRPr lang="en-US" sz="4600" dirty="0"/>
+            <a:endParaRPr lang="en-US" sz="4800" dirty="0"/>
           </a:p>
         </p:txBody>
       </p:sp>
       <p:sp>
         <p:nvSpPr>
-          <p:cNvPr id="3" name="Text 1"/>
-          <p:cNvSpPr txBox="1"/>
+          <p:cNvPr id="3" name="anim1"/>
+          <p:cNvSpPr/>
           <p:nvPr/>
         </p:nvSpPr>
         <p:spPr>
           <a:xfrm>
-            <a:off x="548640" y="2606040"/>
-            <a:ext cx="5029200" cy="914400"/>
+            <a:off x="731520" y="2331720"/>
+            <a:ext cx="6949440" cy="822960"/>
           </a:xfrm>
           <a:prstGeom prst="rect">
             <a:avLst/>
@@ -2728,9 +2807,9 @@
               <a:buNone/>
             </a:pPr>
             <a:r>
-              <a:rPr lang="en-US" sz="2000" dirty="0">
+              <a:rPr lang="en-US" sz="2200" dirty="0">
                 <a:solidFill>
-                  <a:srgbClr val="CADCFC"/>
+                  <a:srgbClr val="000000"/>
                 </a:solidFill>
                 <a:latin typeface="Calibri" pitchFamily="34" charset="0"/>
                 <a:ea typeface="Calibri" pitchFamily="34" charset="-122"/>
@@ -2738,20 +2817,20 @@
               </a:rPr>
               <a:t>An application-driven implementation and evaluation of Grover’s search algorithm</a:t>
             </a:r>
-            <a:endParaRPr lang="en-US" sz="2000" dirty="0"/>
+            <a:endParaRPr lang="en-US" sz="2200" dirty="0"/>
           </a:p>
         </p:txBody>
       </p:sp>
       <p:sp>
         <p:nvSpPr>
-          <p:cNvPr id="4" name="Text 2"/>
-          <p:cNvSpPr txBox="1"/>
+          <p:cNvPr id="4" name="anim2"/>
+          <p:cNvSpPr/>
           <p:nvPr/>
         </p:nvSpPr>
         <p:spPr>
           <a:xfrm>
-            <a:off x="548640" y="4114800"/>
-            <a:ext cx="5029200" cy="274320"/>
+            <a:off x="731520" y="3931920"/>
+            <a:ext cx="7315200" cy="274320"/>
           </a:xfrm>
           <a:prstGeom prst="rect">
             <a:avLst/>
@@ -2760,16 +2839,16 @@
           <a:ln/>
         </p:spPr>
         <p:txBody>
-          <a:bodyPr wrap="square" lIns="0" tIns="0" rIns="0" bIns="0" rtlCol="0" anchor="ctr"/>
+          <a:bodyPr wrap="square" lIns="0" tIns="0" rIns="0" bIns="0" rtlCol="0" anchor="t"/>
           <a:lstStyle/>
           <a:p>
             <a:pPr indent="0" marL="0">
               <a:buNone/>
             </a:pPr>
             <a:r>
-              <a:rPr lang="en-US" sz="1300" dirty="0">
+              <a:rPr lang="en-US" sz="1400" dirty="0">
                 <a:solidFill>
-                  <a:srgbClr val="9FB3CC"/>
+                  <a:srgbClr val="000000"/>
                 </a:solidFill>
                 <a:latin typeface="Calibri" pitchFamily="34" charset="0"/>
                 <a:ea typeface="Calibri" pitchFamily="34" charset="-122"/>
@@ -2777,20 +2856,20 @@
               </a:rPr>
               <a:t>Quantum Computing  ·  Course project</a:t>
             </a:r>
-            <a:endParaRPr lang="en-US" sz="1300" dirty="0"/>
+            <a:endParaRPr lang="en-US" sz="1400" dirty="0"/>
           </a:p>
         </p:txBody>
       </p:sp>
       <p:sp>
         <p:nvSpPr>
-          <p:cNvPr id="5" name="Text 3"/>
-          <p:cNvSpPr txBox="1"/>
+          <p:cNvPr id="5" name="anim2"/>
+          <p:cNvSpPr/>
           <p:nvPr/>
         </p:nvSpPr>
         <p:spPr>
           <a:xfrm>
-            <a:off x="548640" y="4434840"/>
-            <a:ext cx="5029200" cy="274320"/>
+            <a:off x="731520" y="4251960"/>
+            <a:ext cx="7315200" cy="274320"/>
           </a:xfrm>
           <a:prstGeom prst="rect">
             <a:avLst/>
@@ -2799,16 +2878,16 @@
           <a:ln/>
         </p:spPr>
         <p:txBody>
-          <a:bodyPr wrap="square" lIns="0" tIns="0" rIns="0" bIns="0" rtlCol="0" anchor="ctr"/>
+          <a:bodyPr wrap="square" lIns="0" tIns="0" rIns="0" bIns="0" rtlCol="0" anchor="t"/>
           <a:lstStyle/>
           <a:p>
             <a:pPr indent="0" marL="0">
               <a:buNone/>
             </a:pPr>
             <a:r>
-              <a:rPr lang="en-US" sz="1300" dirty="0">
+              <a:rPr lang="en-US" sz="1400" dirty="0">
                 <a:solidFill>
-                  <a:srgbClr val="9FB3CC"/>
+                  <a:srgbClr val="000000"/>
                 </a:solidFill>
                 <a:latin typeface="Calibri" pitchFamily="34" charset="0"/>
                 <a:ea typeface="Calibri" pitchFamily="34" charset="-122"/>
@@ -2816,515 +2895,188 @@
               </a:rPr>
               <a:t>Kavin-JS.github.io/GrovX</a:t>
             </a:r>
-            <a:endParaRPr lang="en-US" sz="1300" dirty="0"/>
+            <a:endParaRPr lang="en-US" sz="1400" dirty="0"/>
           </a:p>
         </p:txBody>
-      </p:sp>
-      <p:sp>
-        <p:nvSpPr>
-          <p:cNvPr id="6" name="Shape 4"/>
-          <p:cNvSpPr/>
-          <p:nvPr/>
-        </p:nvSpPr>
-        <p:spPr>
-          <a:xfrm>
-            <a:off x="5989320" y="3337560"/>
-            <a:ext cx="100584" cy="411480"/>
-          </a:xfrm>
-          <a:prstGeom prst="rect">
-            <a:avLst/>
-          </a:prstGeom>
-          <a:solidFill>
-            <a:srgbClr val="4B6B93"/>
-          </a:solidFill>
-          <a:ln w="12700">
-            <a:solidFill>
-              <a:srgbClr val="4B6B93"/>
-            </a:solidFill>
-            <a:prstDash val="solid"/>
-          </a:ln>
-        </p:spPr>
-      </p:sp>
-      <p:sp>
-        <p:nvSpPr>
-          <p:cNvPr id="7" name="Shape 5"/>
-          <p:cNvSpPr/>
-          <p:nvPr/>
-        </p:nvSpPr>
-        <p:spPr>
-          <a:xfrm>
-            <a:off x="6135624" y="3337560"/>
-            <a:ext cx="100584" cy="411480"/>
-          </a:xfrm>
-          <a:prstGeom prst="rect">
-            <a:avLst/>
-          </a:prstGeom>
-          <a:solidFill>
-            <a:srgbClr val="4B6B93"/>
-          </a:solidFill>
-          <a:ln w="12700">
-            <a:solidFill>
-              <a:srgbClr val="4B6B93"/>
-            </a:solidFill>
-            <a:prstDash val="solid"/>
-          </a:ln>
-        </p:spPr>
-      </p:sp>
-      <p:sp>
-        <p:nvSpPr>
-          <p:cNvPr id="8" name="Shape 6"/>
-          <p:cNvSpPr/>
-          <p:nvPr/>
-        </p:nvSpPr>
-        <p:spPr>
-          <a:xfrm>
-            <a:off x="6281928" y="3337560"/>
-            <a:ext cx="100584" cy="411480"/>
-          </a:xfrm>
-          <a:prstGeom prst="rect">
-            <a:avLst/>
-          </a:prstGeom>
-          <a:solidFill>
-            <a:srgbClr val="4B6B93"/>
-          </a:solidFill>
-          <a:ln w="12700">
-            <a:solidFill>
-              <a:srgbClr val="4B6B93"/>
-            </a:solidFill>
-            <a:prstDash val="solid"/>
-          </a:ln>
-        </p:spPr>
-      </p:sp>
-      <p:sp>
-        <p:nvSpPr>
-          <p:cNvPr id="9" name="Shape 7"/>
-          <p:cNvSpPr/>
-          <p:nvPr/>
-        </p:nvSpPr>
-        <p:spPr>
-          <a:xfrm>
-            <a:off x="6428232" y="3337560"/>
-            <a:ext cx="100584" cy="411480"/>
-          </a:xfrm>
-          <a:prstGeom prst="rect">
-            <a:avLst/>
-          </a:prstGeom>
-          <a:solidFill>
-            <a:srgbClr val="4B6B93"/>
-          </a:solidFill>
-          <a:ln w="12700">
-            <a:solidFill>
-              <a:srgbClr val="4B6B93"/>
-            </a:solidFill>
-            <a:prstDash val="solid"/>
-          </a:ln>
-        </p:spPr>
-      </p:sp>
-      <p:sp>
-        <p:nvSpPr>
-          <p:cNvPr id="10" name="Shape 8"/>
-          <p:cNvSpPr/>
-          <p:nvPr/>
-        </p:nvSpPr>
-        <p:spPr>
-          <a:xfrm>
-            <a:off x="6574536" y="3337560"/>
-            <a:ext cx="100584" cy="411480"/>
-          </a:xfrm>
-          <a:prstGeom prst="rect">
-            <a:avLst/>
-          </a:prstGeom>
-          <a:solidFill>
-            <a:srgbClr val="4B6B93"/>
-          </a:solidFill>
-          <a:ln w="12700">
-            <a:solidFill>
-              <a:srgbClr val="4B6B93"/>
-            </a:solidFill>
-            <a:prstDash val="solid"/>
-          </a:ln>
-        </p:spPr>
-      </p:sp>
-      <p:sp>
-        <p:nvSpPr>
-          <p:cNvPr id="11" name="Shape 9"/>
-          <p:cNvSpPr/>
-          <p:nvPr/>
-        </p:nvSpPr>
-        <p:spPr>
-          <a:xfrm>
-            <a:off x="6720840" y="3337560"/>
-            <a:ext cx="100584" cy="411480"/>
-          </a:xfrm>
-          <a:prstGeom prst="rect">
-            <a:avLst/>
-          </a:prstGeom>
-          <a:solidFill>
-            <a:srgbClr val="4B6B93"/>
-          </a:solidFill>
-          <a:ln w="12700">
-            <a:solidFill>
-              <a:srgbClr val="4B6B93"/>
-            </a:solidFill>
-            <a:prstDash val="solid"/>
-          </a:ln>
-        </p:spPr>
-      </p:sp>
-      <p:sp>
-        <p:nvSpPr>
-          <p:cNvPr id="12" name="Shape 10"/>
-          <p:cNvSpPr/>
-          <p:nvPr/>
-        </p:nvSpPr>
-        <p:spPr>
-          <a:xfrm>
-            <a:off x="6867144" y="3337560"/>
-            <a:ext cx="100584" cy="411480"/>
-          </a:xfrm>
-          <a:prstGeom prst="rect">
-            <a:avLst/>
-          </a:prstGeom>
-          <a:solidFill>
-            <a:srgbClr val="4B6B93"/>
-          </a:solidFill>
-          <a:ln w="12700">
-            <a:solidFill>
-              <a:srgbClr val="4B6B93"/>
-            </a:solidFill>
-            <a:prstDash val="solid"/>
-          </a:ln>
-        </p:spPr>
-      </p:sp>
-      <p:sp>
-        <p:nvSpPr>
-          <p:cNvPr id="13" name="Shape 11"/>
-          <p:cNvSpPr/>
-          <p:nvPr/>
-        </p:nvSpPr>
-        <p:spPr>
-          <a:xfrm>
-            <a:off x="7013448" y="3337560"/>
-            <a:ext cx="100584" cy="411480"/>
-          </a:xfrm>
-          <a:prstGeom prst="rect">
-            <a:avLst/>
-          </a:prstGeom>
-          <a:solidFill>
-            <a:srgbClr val="4B6B93"/>
-          </a:solidFill>
-          <a:ln w="12700">
-            <a:solidFill>
-              <a:srgbClr val="4B6B93"/>
-            </a:solidFill>
-            <a:prstDash val="solid"/>
-          </a:ln>
-        </p:spPr>
-      </p:sp>
-      <p:sp>
-        <p:nvSpPr>
-          <p:cNvPr id="14" name="Shape 12"/>
-          <p:cNvSpPr/>
-          <p:nvPr/>
-        </p:nvSpPr>
-        <p:spPr>
-          <a:xfrm>
-            <a:off x="7159752" y="3337560"/>
-            <a:ext cx="100584" cy="411480"/>
-          </a:xfrm>
-          <a:prstGeom prst="rect">
-            <a:avLst/>
-          </a:prstGeom>
-          <a:solidFill>
-            <a:srgbClr val="4B6B93"/>
-          </a:solidFill>
-          <a:ln w="12700">
-            <a:solidFill>
-              <a:srgbClr val="4B6B93"/>
-            </a:solidFill>
-            <a:prstDash val="solid"/>
-          </a:ln>
-        </p:spPr>
-      </p:sp>
-      <p:sp>
-        <p:nvSpPr>
-          <p:cNvPr id="15" name="Shape 13"/>
-          <p:cNvSpPr/>
-          <p:nvPr/>
-        </p:nvSpPr>
-        <p:spPr>
-          <a:xfrm>
-            <a:off x="7306056" y="3337560"/>
-            <a:ext cx="100584" cy="411480"/>
-          </a:xfrm>
-          <a:prstGeom prst="rect">
-            <a:avLst/>
-          </a:prstGeom>
-          <a:solidFill>
-            <a:srgbClr val="4B6B93"/>
-          </a:solidFill>
-          <a:ln w="12700">
-            <a:solidFill>
-              <a:srgbClr val="4B6B93"/>
-            </a:solidFill>
-            <a:prstDash val="solid"/>
-          </a:ln>
-        </p:spPr>
-      </p:sp>
-      <p:sp>
-        <p:nvSpPr>
-          <p:cNvPr id="16" name="Shape 14"/>
-          <p:cNvSpPr/>
-          <p:nvPr/>
-        </p:nvSpPr>
-        <p:spPr>
-          <a:xfrm>
-            <a:off x="7452360" y="3337560"/>
-            <a:ext cx="100584" cy="411480"/>
-          </a:xfrm>
-          <a:prstGeom prst="rect">
-            <a:avLst/>
-          </a:prstGeom>
-          <a:solidFill>
-            <a:srgbClr val="4B6B93"/>
-          </a:solidFill>
-          <a:ln w="12700">
-            <a:solidFill>
-              <a:srgbClr val="4B6B93"/>
-            </a:solidFill>
-            <a:prstDash val="solid"/>
-          </a:ln>
-        </p:spPr>
-      </p:sp>
-      <p:sp>
-        <p:nvSpPr>
-          <p:cNvPr id="17" name="Shape 15"/>
-          <p:cNvSpPr/>
-          <p:nvPr/>
-        </p:nvSpPr>
-        <p:spPr>
-          <a:xfrm>
-            <a:off x="7598664" y="3337560"/>
-            <a:ext cx="100584" cy="411480"/>
-          </a:xfrm>
-          <a:prstGeom prst="rect">
-            <a:avLst/>
-          </a:prstGeom>
-          <a:solidFill>
-            <a:srgbClr val="4B6B93"/>
-          </a:solidFill>
-          <a:ln w="12700">
-            <a:solidFill>
-              <a:srgbClr val="4B6B93"/>
-            </a:solidFill>
-            <a:prstDash val="solid"/>
-          </a:ln>
-        </p:spPr>
-      </p:sp>
-      <p:sp>
-        <p:nvSpPr>
-          <p:cNvPr id="18" name="Shape 16"/>
-          <p:cNvSpPr/>
-          <p:nvPr/>
-        </p:nvSpPr>
-        <p:spPr>
-          <a:xfrm>
-            <a:off x="7744968" y="3337560"/>
-            <a:ext cx="100584" cy="411480"/>
-          </a:xfrm>
-          <a:prstGeom prst="rect">
-            <a:avLst/>
-          </a:prstGeom>
-          <a:solidFill>
-            <a:srgbClr val="4B6B93"/>
-          </a:solidFill>
-          <a:ln w="12700">
-            <a:solidFill>
-              <a:srgbClr val="4B6B93"/>
-            </a:solidFill>
-            <a:prstDash val="solid"/>
-          </a:ln>
-        </p:spPr>
-      </p:sp>
-      <p:sp>
-        <p:nvSpPr>
-          <p:cNvPr id="19" name="Shape 17"/>
-          <p:cNvSpPr/>
-          <p:nvPr/>
-        </p:nvSpPr>
-        <p:spPr>
-          <a:xfrm>
-            <a:off x="7891272" y="1463040"/>
-            <a:ext cx="100584" cy="2286000"/>
-          </a:xfrm>
-          <a:prstGeom prst="rect">
-            <a:avLst/>
-          </a:prstGeom>
-          <a:solidFill>
-            <a:srgbClr val="E5484D"/>
-          </a:solidFill>
-          <a:ln w="12700">
-            <a:solidFill>
-              <a:srgbClr val="E5484D"/>
-            </a:solidFill>
-            <a:prstDash val="solid"/>
-          </a:ln>
-        </p:spPr>
-      </p:sp>
-      <p:sp>
-        <p:nvSpPr>
-          <p:cNvPr id="20" name="Shape 18"/>
-          <p:cNvSpPr/>
-          <p:nvPr/>
-        </p:nvSpPr>
-        <p:spPr>
-          <a:xfrm>
-            <a:off x="8037576" y="3337560"/>
-            <a:ext cx="100584" cy="411480"/>
-          </a:xfrm>
-          <a:prstGeom prst="rect">
-            <a:avLst/>
-          </a:prstGeom>
-          <a:solidFill>
-            <a:srgbClr val="4B6B93"/>
-          </a:solidFill>
-          <a:ln w="12700">
-            <a:solidFill>
-              <a:srgbClr val="4B6B93"/>
-            </a:solidFill>
-            <a:prstDash val="solid"/>
-          </a:ln>
-        </p:spPr>
-      </p:sp>
-      <p:sp>
-        <p:nvSpPr>
-          <p:cNvPr id="21" name="Shape 19"/>
-          <p:cNvSpPr/>
-          <p:nvPr/>
-        </p:nvSpPr>
-        <p:spPr>
-          <a:xfrm>
-            <a:off x="8183880" y="3337560"/>
-            <a:ext cx="100584" cy="411480"/>
-          </a:xfrm>
-          <a:prstGeom prst="rect">
-            <a:avLst/>
-          </a:prstGeom>
-          <a:solidFill>
-            <a:srgbClr val="4B6B93"/>
-          </a:solidFill>
-          <a:ln w="12700">
-            <a:solidFill>
-              <a:srgbClr val="4B6B93"/>
-            </a:solidFill>
-            <a:prstDash val="solid"/>
-          </a:ln>
-        </p:spPr>
-      </p:sp>
-      <p:sp>
-        <p:nvSpPr>
-          <p:cNvPr id="22" name="Shape 20"/>
-          <p:cNvSpPr/>
-          <p:nvPr/>
-        </p:nvSpPr>
-        <p:spPr>
-          <a:xfrm>
-            <a:off x="8330184" y="3337560"/>
-            <a:ext cx="100584" cy="411480"/>
-          </a:xfrm>
-          <a:prstGeom prst="rect">
-            <a:avLst/>
-          </a:prstGeom>
-          <a:solidFill>
-            <a:srgbClr val="4B6B93"/>
-          </a:solidFill>
-          <a:ln w="12700">
-            <a:solidFill>
-              <a:srgbClr val="4B6B93"/>
-            </a:solidFill>
-            <a:prstDash val="solid"/>
-          </a:ln>
-        </p:spPr>
-      </p:sp>
-      <p:sp>
-        <p:nvSpPr>
-          <p:cNvPr id="23" name="Shape 21"/>
-          <p:cNvSpPr/>
-          <p:nvPr/>
-        </p:nvSpPr>
-        <p:spPr>
-          <a:xfrm>
-            <a:off x="8476488" y="3337560"/>
-            <a:ext cx="100584" cy="411480"/>
-          </a:xfrm>
-          <a:prstGeom prst="rect">
-            <a:avLst/>
-          </a:prstGeom>
-          <a:solidFill>
-            <a:srgbClr val="4B6B93"/>
-          </a:solidFill>
-          <a:ln w="12700">
-            <a:solidFill>
-              <a:srgbClr val="4B6B93"/>
-            </a:solidFill>
-            <a:prstDash val="solid"/>
-          </a:ln>
-        </p:spPr>
-      </p:sp>
-      <p:sp>
-        <p:nvSpPr>
-          <p:cNvPr id="24" name="Shape 22"/>
-          <p:cNvSpPr/>
-          <p:nvPr/>
-        </p:nvSpPr>
-        <p:spPr>
-          <a:xfrm>
-            <a:off x="8622792" y="3337560"/>
-            <a:ext cx="100584" cy="411480"/>
-          </a:xfrm>
-          <a:prstGeom prst="rect">
-            <a:avLst/>
-          </a:prstGeom>
-          <a:solidFill>
-            <a:srgbClr val="4B6B93"/>
-          </a:solidFill>
-          <a:ln w="12700">
-            <a:solidFill>
-              <a:srgbClr val="4B6B93"/>
-            </a:solidFill>
-            <a:prstDash val="solid"/>
-          </a:ln>
-        </p:spPr>
-      </p:sp>
-      <p:sp>
-        <p:nvSpPr>
-          <p:cNvPr id="25" name="Shape 23"/>
-          <p:cNvSpPr/>
-          <p:nvPr/>
-        </p:nvSpPr>
-        <p:spPr>
-          <a:xfrm>
-            <a:off x="8769096" y="3337560"/>
-            <a:ext cx="100584" cy="411480"/>
-          </a:xfrm>
-          <a:prstGeom prst="rect">
-            <a:avLst/>
-          </a:prstGeom>
-          <a:solidFill>
-            <a:srgbClr val="4B6B93"/>
-          </a:solidFill>
-          <a:ln w="12700">
-            <a:solidFill>
-              <a:srgbClr val="4B6B93"/>
-            </a:solidFill>
-            <a:prstDash val="solid"/>
-          </a:ln>
-        </p:spPr>
       </p:sp>
     </p:spTree>
   </p:cSld>
   <p:clrMapOvr>
     <a:masterClrMapping/>
   </p:clrMapOvr>
+  <p:transition spd="med">
+    <p:fade/>
+  </p:transition>
+  <p:timing>
+    <p:tnLst>
+      <p:par>
+        <p:cTn id="1" dur="indefinite" restart="never" nodeType="tmRoot">
+          <p:childTnLst>
+            <p:seq concurrent="1" nextAc="seek">
+              <p:cTn id="2" dur="indefinite" nodeType="mainSeq">
+                <p:childTnLst>
+                  <p:par>
+                    <p:cTn id="3" fill="hold">
+                      <p:stCondLst>
+                        <p:cond delay="indefinite"/>
+                        <p:cond evt="onBegin" delay="0">
+                          <p:tn val="2"/>
+                        </p:cond>
+                      </p:stCondLst>
+                      <p:childTnLst>
+                        <p:par>
+                          <p:cTn id="4" fill="hold">
+                            <p:stCondLst>
+                              <p:cond delay="0"/>
+                            </p:stCondLst>
+                            <p:childTnLst>
+                              <p:par>
+                                <p:cTn id="5" presetID="10" presetClass="entr" presetSubtype="0" fill="hold" grpId="0" nodeType="afterEffect">
+                                  <p:stCondLst>
+                                    <p:cond delay="0"/>
+                                  </p:stCondLst>
+                                  <p:childTnLst>
+                                    <p:set>
+                                      <p:cBhvr>
+                                        <p:cTn id="6" dur="1" fill="hold">
+                                          <p:stCondLst>
+                                            <p:cond delay="0"/>
+                                          </p:stCondLst>
+                                        </p:cTn>
+                                        <p:tgtEl>
+                                          <p:spTgt spid="3"/>
+                                        </p:tgtEl>
+                                        <p:attrNameLst>
+                                          <p:attrName>style.visibility</p:attrName>
+                                        </p:attrNameLst>
+                                      </p:cBhvr>
+                                      <p:to>
+                                        <p:strVal val="visible"/>
+                                      </p:to>
+                                    </p:set>
+                                    <p:animEffect transition="in" filter="fade">
+                                      <p:cBhvr>
+                                        <p:cTn id="7" dur="500"/>
+                                        <p:tgtEl>
+                                          <p:spTgt spid="3"/>
+                                        </p:tgtEl>
+                                      </p:cBhvr>
+                                    </p:animEffect>
+                                  </p:childTnLst>
+                                </p:cTn>
+                              </p:par>
+                            </p:childTnLst>
+                          </p:cTn>
+                        </p:par>
+                        <p:par>
+                          <p:cTn id="8" fill="hold">
+                            <p:stCondLst>
+                              <p:cond delay="500"/>
+                            </p:stCondLst>
+                            <p:childTnLst>
+                              <p:par>
+                                <p:cTn id="9" presetID="10" presetClass="entr" presetSubtype="0" fill="hold" grpId="0" nodeType="afterEffect">
+                                  <p:stCondLst>
+                                    <p:cond delay="0"/>
+                                  </p:stCondLst>
+                                  <p:childTnLst>
+                                    <p:set>
+                                      <p:cBhvr>
+                                        <p:cTn id="10" dur="1" fill="hold">
+                                          <p:stCondLst>
+                                            <p:cond delay="0"/>
+                                          </p:stCondLst>
+                                        </p:cTn>
+                                        <p:tgtEl>
+                                          <p:spTgt spid="4"/>
+                                        </p:tgtEl>
+                                        <p:attrNameLst>
+                                          <p:attrName>style.visibility</p:attrName>
+                                        </p:attrNameLst>
+                                      </p:cBhvr>
+                                      <p:to>
+                                        <p:strVal val="visible"/>
+                                      </p:to>
+                                    </p:set>
+                                    <p:animEffect transition="in" filter="fade">
+                                      <p:cBhvr>
+                                        <p:cTn id="11" dur="500"/>
+                                        <p:tgtEl>
+                                          <p:spTgt spid="4"/>
+                                        </p:tgtEl>
+                                      </p:cBhvr>
+                                    </p:animEffect>
+                                  </p:childTnLst>
+                                </p:cTn>
+                              </p:par>
+                              <p:par>
+                                <p:cTn id="12" presetID="10" presetClass="entr" presetSubtype="0" fill="hold" grpId="0" nodeType="withEffect">
+                                  <p:stCondLst>
+                                    <p:cond delay="0"/>
+                                  </p:stCondLst>
+                                  <p:childTnLst>
+                                    <p:set>
+                                      <p:cBhvr>
+                                        <p:cTn id="13" dur="1" fill="hold">
+                                          <p:stCondLst>
+                                            <p:cond delay="0"/>
+                                          </p:stCondLst>
+                                        </p:cTn>
+                                        <p:tgtEl>
+                                          <p:spTgt spid="5"/>
+                                        </p:tgtEl>
+                                        <p:attrNameLst>
+                                          <p:attrName>style.visibility</p:attrName>
+                                        </p:attrNameLst>
+                                      </p:cBhvr>
+                                      <p:to>
+                                        <p:strVal val="visible"/>
+                                      </p:to>
+                                    </p:set>
+                                    <p:animEffect transition="in" filter="fade">
+                                      <p:cBhvr>
+                                        <p:cTn id="14" dur="500"/>
+                                        <p:tgtEl>
+                                          <p:spTgt spid="5"/>
+                                        </p:tgtEl>
+                                      </p:cBhvr>
+                                    </p:animEffect>
+                                  </p:childTnLst>
+                                </p:cTn>
+                              </p:par>
+                            </p:childTnLst>
+                          </p:cTn>
+                        </p:par>
+                      </p:childTnLst>
+                    </p:cTn>
+                  </p:par>
+                </p:childTnLst>
+              </p:cTn>
+              <p:prevCondLst>
+                <p:cond evt="onPrev" delay="0">
+                  <p:tgtEl>
+                    <p:sldTgt/>
+                  </p:tgtEl>
+                </p:cond>
+              </p:prevCondLst>
+              <p:nextCondLst>
+                <p:cond evt="onNext" delay="0">
+                  <p:tgtEl>
+                    <p:sldTgt/>
+                  </p:tgtEl>
+                </p:cond>
+              </p:nextCondLst>
+            </p:seq>
+          </p:childTnLst>
+        </p:cTn>
+      </p:par>
+    </p:tnLst>
+    <p:bldLst>
+      <p:bldP spid="3" grpId="0"/>
+      <p:bldP spid="4" grpId="0"/>
+      <p:bldP spid="5" grpId="0"/>
+    </p:bldLst>
+  </p:timing>
 </p:sld>
 </file>
 
@@ -3354,14 +3106,14 @@
       </p:grpSpPr>
       <p:sp>
         <p:nvSpPr>
-          <p:cNvPr id="2" name="Text 0"/>
-          <p:cNvSpPr txBox="1"/>
+          <p:cNvPr id="2" name="Title"/>
+          <p:cNvSpPr/>
           <p:nvPr/>
         </p:nvSpPr>
         <p:spPr>
           <a:xfrm>
-            <a:off x="457200" y="274320"/>
-            <a:ext cx="8229600" cy="685800"/>
+            <a:off x="548640" y="320040"/>
+            <a:ext cx="8046720" cy="640080"/>
           </a:xfrm>
           <a:prstGeom prst="rect">
             <a:avLst/>
@@ -3379,11 +3131,11 @@
             <a:r>
               <a:rPr lang="en-US" sz="3000" b="1" dirty="0">
                 <a:solidFill>
-                  <a:srgbClr val="0E2340"/>
+                  <a:srgbClr val="000000"/>
                 </a:solidFill>
-                <a:latin typeface="Cambria" pitchFamily="34" charset="0"/>
-                <a:ea typeface="Cambria" pitchFamily="34" charset="-122"/>
-                <a:cs typeface="Cambria" pitchFamily="34" charset="-120"/>
+                <a:latin typeface="Calibri" pitchFamily="34" charset="0"/>
+                <a:ea typeface="Calibri" pitchFamily="34" charset="-122"/>
+                <a:cs typeface="Calibri" pitchFamily="34" charset="-120"/>
               </a:rPr>
               <a:t>Classical search vs Grover’s algorithm</a:t>
             </a:r>
@@ -3393,7 +3145,7 @@
       </p:sp>
       <p:graphicFrame>
         <p:nvGraphicFramePr>
-          <p:cNvPr id="11" name="Table 0"/>
+          <p:cNvPr id="11" name="anim1"/>
           <p:cNvGraphicFramePr>
             <a:graphicFrameLocks noGrp="1"/>
           </p:cNvGraphicFramePr>
@@ -3406,8 +3158,8 @@
           </p:nvPr>
         </p:nvGraphicFramePr>
         <p:xfrm>
-          <a:off x="457200" y="1188720"/>
-          <a:ext cx="8229600" cy="914400"/>
+          <a:off x="548640" y="1234440"/>
+          <a:ext cx="8046720" cy="914400"/>
         </p:xfrm>
         <a:graphic>
           <a:graphicData uri="http://schemas.openxmlformats.org/drawingml/2006/table">
@@ -3415,10 +3167,10 @@
               <a:tblPr/>
               <a:tblGrid>
                 <a:gridCol w="1828800"/>
-                <a:gridCol w="3108960"/>
-                <a:gridCol w="3291840"/>
+                <a:gridCol w="3017520"/>
+                <a:gridCol w="3200400"/>
               </a:tblGrid>
-              <a:tr h="420624">
+              <a:tr h="402336">
                 <a:tc>
                   <a:txBody>
                     <a:bodyPr/>
@@ -3427,261 +3179,26 @@
                       <a:pPr indent="0" marL="0">
                         <a:buNone/>
                       </a:pPr>
-                      <a:r>
-                        <a:rPr lang="en-US" sz="1300" b="1" dirty="0">
-                          <a:solidFill>
-                            <a:srgbClr val="FFFFFF"/>
-                          </a:solidFill>
-                          <a:latin typeface="Calibri" pitchFamily="34" charset="0"/>
-                          <a:ea typeface="Calibri" pitchFamily="34" charset="-122"/>
-                          <a:cs typeface="Calibri" pitchFamily="34" charset="-120"/>
-                        </a:rPr>
-                        <a:t>Factor</a:t>
-                      </a:r>
-                      <a:endParaRPr lang="en-US" sz="1300" dirty="0">
+                      <a:endParaRPr lang="en-US" sz="1500" dirty="0">
                         <a:latin typeface="Calibri" charset="0"/>
                         <a:ea typeface="Calibri" charset="0"/>
                         <a:cs typeface="Calibri" charset="0"/>
                       </a:endParaRPr>
                     </a:p>
                   </a:txBody>
-                  <a:tcPr marL="109728" marR="109728" marT="45720" marB="45720" anchor="ctr">
-                    <a:lnL w="9525" cap="flat" cmpd="sng" algn="ctr">
+                  <a:tcPr marL="0" marR="91440" marT="36576" marB="36576" anchor="ctr">
+                    <a:lnL w="0" cap="flat" cmpd="sng" algn="ctr">
+                      <a:noFill/>
+                    </a:lnL>
+                    <a:lnR w="0" cap="flat" cmpd="sng" algn="ctr">
+                      <a:noFill/>
+                    </a:lnR>
+                    <a:lnT w="0" cap="flat" cmpd="sng" algn="ctr">
+                      <a:noFill/>
+                    </a:lnT>
+                    <a:lnB w="19050" cap="flat" cmpd="sng" algn="ctr">
                       <a:solidFill>
-                        <a:srgbClr val="D5D9DF"/>
-                      </a:solidFill>
-                      <a:prstDash val="solid"/>
-                      <a:round/>
-                      <a:headEnd type="none" w="med" len="med"/>
-                      <a:tailEnd type="none" w="med" len="med"/>
-                    </a:lnL>
-                    <a:lnR w="9525" cap="flat" cmpd="sng" algn="ctr">
-                      <a:solidFill>
-                        <a:srgbClr val="D5D9DF"/>
-                      </a:solidFill>
-                      <a:prstDash val="solid"/>
-                      <a:round/>
-                      <a:headEnd type="none" w="med" len="med"/>
-                      <a:tailEnd type="none" w="med" len="med"/>
-                    </a:lnR>
-                    <a:lnT w="9525" cap="flat" cmpd="sng" algn="ctr">
-                      <a:solidFill>
-                        <a:srgbClr val="D5D9DF"/>
-                      </a:solidFill>
-                      <a:prstDash val="solid"/>
-                      <a:round/>
-                      <a:headEnd type="none" w="med" len="med"/>
-                      <a:tailEnd type="none" w="med" len="med"/>
-                    </a:lnT>
-                    <a:lnB w="9525" cap="flat" cmpd="sng" algn="ctr">
-                      <a:solidFill>
-                        <a:srgbClr val="D5D9DF"/>
-                      </a:solidFill>
-                      <a:prstDash val="solid"/>
-                      <a:round/>
-                      <a:headEnd type="none" w="med" len="med"/>
-                      <a:tailEnd type="none" w="med" len="med"/>
-                    </a:lnB>
-                    <a:solidFill>
-                      <a:srgbClr val="1D3F6E"/>
-                    </a:solidFill>
-                  </a:tcPr>
-                </a:tc>
-                <a:tc>
-                  <a:txBody>
-                    <a:bodyPr/>
-                    <a:lstStyle/>
-                    <a:p>
-                      <a:pPr indent="0" marL="0">
-                        <a:buNone/>
-                      </a:pPr>
-                      <a:r>
-                        <a:rPr lang="en-US" sz="1300" b="1" dirty="0">
-                          <a:solidFill>
-                            <a:srgbClr val="FFFFFF"/>
-                          </a:solidFill>
-                          <a:latin typeface="Calibri" pitchFamily="34" charset="0"/>
-                          <a:ea typeface="Calibri" pitchFamily="34" charset="-122"/>
-                          <a:cs typeface="Calibri" pitchFamily="34" charset="-120"/>
-                        </a:rPr>
-                        <a:t>Classical</a:t>
-                      </a:r>
-                      <a:endParaRPr lang="en-US" sz="1300" dirty="0">
-                        <a:latin typeface="Calibri" charset="0"/>
-                        <a:ea typeface="Calibri" charset="0"/>
-                        <a:cs typeface="Calibri" charset="0"/>
-                      </a:endParaRPr>
-                    </a:p>
-                  </a:txBody>
-                  <a:tcPr marL="109728" marR="109728" marT="45720" marB="45720" anchor="ctr">
-                    <a:lnL w="9525" cap="flat" cmpd="sng" algn="ctr">
-                      <a:solidFill>
-                        <a:srgbClr val="D5D9DF"/>
-                      </a:solidFill>
-                      <a:prstDash val="solid"/>
-                      <a:round/>
-                      <a:headEnd type="none" w="med" len="med"/>
-                      <a:tailEnd type="none" w="med" len="med"/>
-                    </a:lnL>
-                    <a:lnR w="9525" cap="flat" cmpd="sng" algn="ctr">
-                      <a:solidFill>
-                        <a:srgbClr val="D5D9DF"/>
-                      </a:solidFill>
-                      <a:prstDash val="solid"/>
-                      <a:round/>
-                      <a:headEnd type="none" w="med" len="med"/>
-                      <a:tailEnd type="none" w="med" len="med"/>
-                    </a:lnR>
-                    <a:lnT w="9525" cap="flat" cmpd="sng" algn="ctr">
-                      <a:solidFill>
-                        <a:srgbClr val="D5D9DF"/>
-                      </a:solidFill>
-                      <a:prstDash val="solid"/>
-                      <a:round/>
-                      <a:headEnd type="none" w="med" len="med"/>
-                      <a:tailEnd type="none" w="med" len="med"/>
-                    </a:lnT>
-                    <a:lnB w="9525" cap="flat" cmpd="sng" algn="ctr">
-                      <a:solidFill>
-                        <a:srgbClr val="D5D9DF"/>
-                      </a:solidFill>
-                      <a:prstDash val="solid"/>
-                      <a:round/>
-                      <a:headEnd type="none" w="med" len="med"/>
-                      <a:tailEnd type="none" w="med" len="med"/>
-                    </a:lnB>
-                    <a:solidFill>
-                      <a:srgbClr val="1D3F6E"/>
-                    </a:solidFill>
-                  </a:tcPr>
-                </a:tc>
-                <a:tc>
-                  <a:txBody>
-                    <a:bodyPr/>
-                    <a:lstStyle/>
-                    <a:p>
-                      <a:pPr indent="0" marL="0">
-                        <a:buNone/>
-                      </a:pPr>
-                      <a:r>
-                        <a:rPr lang="en-US" sz="1300" b="1" dirty="0">
-                          <a:solidFill>
-                            <a:srgbClr val="FFFFFF"/>
-                          </a:solidFill>
-                          <a:latin typeface="Calibri" pitchFamily="34" charset="0"/>
-                          <a:ea typeface="Calibri" pitchFamily="34" charset="-122"/>
-                          <a:cs typeface="Calibri" pitchFamily="34" charset="-120"/>
-                        </a:rPr>
-                        <a:t>Grover</a:t>
-                      </a:r>
-                      <a:endParaRPr lang="en-US" sz="1300" dirty="0">
-                        <a:latin typeface="Calibri" charset="0"/>
-                        <a:ea typeface="Calibri" charset="0"/>
-                        <a:cs typeface="Calibri" charset="0"/>
-                      </a:endParaRPr>
-                    </a:p>
-                  </a:txBody>
-                  <a:tcPr marL="109728" marR="109728" marT="45720" marB="45720" anchor="ctr">
-                    <a:lnL w="9525" cap="flat" cmpd="sng" algn="ctr">
-                      <a:solidFill>
-                        <a:srgbClr val="D5D9DF"/>
-                      </a:solidFill>
-                      <a:prstDash val="solid"/>
-                      <a:round/>
-                      <a:headEnd type="none" w="med" len="med"/>
-                      <a:tailEnd type="none" w="med" len="med"/>
-                    </a:lnL>
-                    <a:lnR w="9525" cap="flat" cmpd="sng" algn="ctr">
-                      <a:solidFill>
-                        <a:srgbClr val="D5D9DF"/>
-                      </a:solidFill>
-                      <a:prstDash val="solid"/>
-                      <a:round/>
-                      <a:headEnd type="none" w="med" len="med"/>
-                      <a:tailEnd type="none" w="med" len="med"/>
-                    </a:lnR>
-                    <a:lnT w="9525" cap="flat" cmpd="sng" algn="ctr">
-                      <a:solidFill>
-                        <a:srgbClr val="D5D9DF"/>
-                      </a:solidFill>
-                      <a:prstDash val="solid"/>
-                      <a:round/>
-                      <a:headEnd type="none" w="med" len="med"/>
-                      <a:tailEnd type="none" w="med" len="med"/>
-                    </a:lnT>
-                    <a:lnB w="9525" cap="flat" cmpd="sng" algn="ctr">
-                      <a:solidFill>
-                        <a:srgbClr val="D5D9DF"/>
-                      </a:solidFill>
-                      <a:prstDash val="solid"/>
-                      <a:round/>
-                      <a:headEnd type="none" w="med" len="med"/>
-                      <a:tailEnd type="none" w="med" len="med"/>
-                    </a:lnB>
-                    <a:solidFill>
-                      <a:srgbClr val="1D3F6E"/>
-                    </a:solidFill>
-                  </a:tcPr>
-                </a:tc>
-              </a:tr>
-              <a:tr h="420624">
-                <a:tc>
-                  <a:txBody>
-                    <a:bodyPr/>
-                    <a:lstStyle/>
-                    <a:p>
-                      <a:pPr indent="0" marL="0">
-                        <a:buNone/>
-                      </a:pPr>
-                      <a:r>
-                        <a:rPr lang="en-US" sz="1250" b="1" dirty="0">
-                          <a:solidFill>
-                            <a:srgbClr val="14181F"/>
-                          </a:solidFill>
-                          <a:latin typeface="Calibri" pitchFamily="34" charset="0"/>
-                          <a:ea typeface="Calibri" pitchFamily="34" charset="-122"/>
-                          <a:cs typeface="Calibri" pitchFamily="34" charset="-120"/>
-                        </a:rPr>
-                        <a:t>Queries</a:t>
-                      </a:r>
-                      <a:endParaRPr lang="en-US" sz="1250" dirty="0">
-                        <a:latin typeface="Calibri" charset="0"/>
-                        <a:ea typeface="Calibri" charset="0"/>
-                        <a:cs typeface="Calibri" charset="0"/>
-                      </a:endParaRPr>
-                    </a:p>
-                  </a:txBody>
-                  <a:tcPr marL="109728" marR="109728" marT="45720" marB="45720" anchor="ctr">
-                    <a:lnL w="9525" cap="flat" cmpd="sng" algn="ctr">
-                      <a:solidFill>
-                        <a:srgbClr val="D5D9DF"/>
-                      </a:solidFill>
-                      <a:prstDash val="solid"/>
-                      <a:round/>
-                      <a:headEnd type="none" w="med" len="med"/>
-                      <a:tailEnd type="none" w="med" len="med"/>
-                    </a:lnL>
-                    <a:lnR w="9525" cap="flat" cmpd="sng" algn="ctr">
-                      <a:solidFill>
-                        <a:srgbClr val="D5D9DF"/>
-                      </a:solidFill>
-                      <a:prstDash val="solid"/>
-                      <a:round/>
-                      <a:headEnd type="none" w="med" len="med"/>
-                      <a:tailEnd type="none" w="med" len="med"/>
-                    </a:lnR>
-                    <a:lnT w="9525" cap="flat" cmpd="sng" algn="ctr">
-                      <a:solidFill>
-                        <a:srgbClr val="D5D9DF"/>
-                      </a:solidFill>
-                      <a:prstDash val="solid"/>
-                      <a:round/>
-                      <a:headEnd type="none" w="med" len="med"/>
-                      <a:tailEnd type="none" w="med" len="med"/>
-                    </a:lnT>
-                    <a:lnB w="9525" cap="flat" cmpd="sng" algn="ctr">
-                      <a:solidFill>
-                        <a:srgbClr val="D5D9DF"/>
+                        <a:srgbClr val="000000"/>
                       </a:solidFill>
                       <a:prstDash val="solid"/>
                       <a:round/>
@@ -3699,54 +3216,36 @@
                         <a:buNone/>
                       </a:pPr>
                       <a:r>
-                        <a:rPr lang="en-US" sz="1250" dirty="0">
+                        <a:rPr lang="en-US" sz="1500" b="1" dirty="0">
                           <a:solidFill>
-                            <a:srgbClr val="14181F"/>
+                            <a:srgbClr val="000000"/>
                           </a:solidFill>
                           <a:latin typeface="Calibri" pitchFamily="34" charset="0"/>
                           <a:ea typeface="Calibri" pitchFamily="34" charset="-122"/>
                           <a:cs typeface="Calibri" pitchFamily="34" charset="-120"/>
                         </a:rPr>
-                        <a:t>O(N), about N/2 on average</a:t>
+                        <a:t>Classical</a:t>
                       </a:r>
-                      <a:endParaRPr lang="en-US" sz="1250" dirty="0">
+                      <a:endParaRPr lang="en-US" sz="1500" dirty="0">
                         <a:latin typeface="Calibri" charset="0"/>
                         <a:ea typeface="Calibri" charset="0"/>
                         <a:cs typeface="Calibri" charset="0"/>
                       </a:endParaRPr>
                     </a:p>
                   </a:txBody>
-                  <a:tcPr marL="109728" marR="109728" marT="45720" marB="45720" anchor="ctr">
-                    <a:lnL w="9525" cap="flat" cmpd="sng" algn="ctr">
+                  <a:tcPr marL="0" marR="91440" marT="36576" marB="36576" anchor="ctr">
+                    <a:lnL w="0" cap="flat" cmpd="sng" algn="ctr">
+                      <a:noFill/>
+                    </a:lnL>
+                    <a:lnR w="0" cap="flat" cmpd="sng" algn="ctr">
+                      <a:noFill/>
+                    </a:lnR>
+                    <a:lnT w="0" cap="flat" cmpd="sng" algn="ctr">
+                      <a:noFill/>
+                    </a:lnT>
+                    <a:lnB w="19050" cap="flat" cmpd="sng" algn="ctr">
                       <a:solidFill>
-                        <a:srgbClr val="D5D9DF"/>
-                      </a:solidFill>
-                      <a:prstDash val="solid"/>
-                      <a:round/>
-                      <a:headEnd type="none" w="med" len="med"/>
-                      <a:tailEnd type="none" w="med" len="med"/>
-                    </a:lnL>
-                    <a:lnR w="9525" cap="flat" cmpd="sng" algn="ctr">
-                      <a:solidFill>
-                        <a:srgbClr val="D5D9DF"/>
-                      </a:solidFill>
-                      <a:prstDash val="solid"/>
-                      <a:round/>
-                      <a:headEnd type="none" w="med" len="med"/>
-                      <a:tailEnd type="none" w="med" len="med"/>
-                    </a:lnR>
-                    <a:lnT w="9525" cap="flat" cmpd="sng" algn="ctr">
-                      <a:solidFill>
-                        <a:srgbClr val="D5D9DF"/>
-                      </a:solidFill>
-                      <a:prstDash val="solid"/>
-                      <a:round/>
-                      <a:headEnd type="none" w="med" len="med"/>
-                      <a:tailEnd type="none" w="med" len="med"/>
-                    </a:lnT>
-                    <a:lnB w="9525" cap="flat" cmpd="sng" algn="ctr">
-                      <a:solidFill>
-                        <a:srgbClr val="D5D9DF"/>
+                        <a:srgbClr val="000000"/>
                       </a:solidFill>
                       <a:prstDash val="solid"/>
                       <a:round/>
@@ -3764,54 +3263,36 @@
                         <a:buNone/>
                       </a:pPr>
                       <a:r>
-                        <a:rPr lang="en-US" sz="1250" dirty="0">
+                        <a:rPr lang="en-US" sz="1500" b="1" dirty="0">
                           <a:solidFill>
-                            <a:srgbClr val="14181F"/>
+                            <a:srgbClr val="000000"/>
                           </a:solidFill>
                           <a:latin typeface="Calibri" pitchFamily="34" charset="0"/>
                           <a:ea typeface="Calibri" pitchFamily="34" charset="-122"/>
                           <a:cs typeface="Calibri" pitchFamily="34" charset="-120"/>
                         </a:rPr>
-                        <a:t>O(√N), about 0.785·√N</a:t>
+                        <a:t>Grover</a:t>
                       </a:r>
-                      <a:endParaRPr lang="en-US" sz="1250" dirty="0">
+                      <a:endParaRPr lang="en-US" sz="1500" dirty="0">
                         <a:latin typeface="Calibri" charset="0"/>
                         <a:ea typeface="Calibri" charset="0"/>
                         <a:cs typeface="Calibri" charset="0"/>
                       </a:endParaRPr>
                     </a:p>
                   </a:txBody>
-                  <a:tcPr marL="109728" marR="109728" marT="45720" marB="45720" anchor="ctr">
-                    <a:lnL w="9525" cap="flat" cmpd="sng" algn="ctr">
+                  <a:tcPr marL="0" marR="91440" marT="36576" marB="36576" anchor="ctr">
+                    <a:lnL w="0" cap="flat" cmpd="sng" algn="ctr">
+                      <a:noFill/>
+                    </a:lnL>
+                    <a:lnR w="0" cap="flat" cmpd="sng" algn="ctr">
+                      <a:noFill/>
+                    </a:lnR>
+                    <a:lnT w="0" cap="flat" cmpd="sng" algn="ctr">
+                      <a:noFill/>
+                    </a:lnT>
+                    <a:lnB w="19050" cap="flat" cmpd="sng" algn="ctr">
                       <a:solidFill>
-                        <a:srgbClr val="D5D9DF"/>
-                      </a:solidFill>
-                      <a:prstDash val="solid"/>
-                      <a:round/>
-                      <a:headEnd type="none" w="med" len="med"/>
-                      <a:tailEnd type="none" w="med" len="med"/>
-                    </a:lnL>
-                    <a:lnR w="9525" cap="flat" cmpd="sng" algn="ctr">
-                      <a:solidFill>
-                        <a:srgbClr val="D5D9DF"/>
-                      </a:solidFill>
-                      <a:prstDash val="solid"/>
-                      <a:round/>
-                      <a:headEnd type="none" w="med" len="med"/>
-                      <a:tailEnd type="none" w="med" len="med"/>
-                    </a:lnR>
-                    <a:lnT w="9525" cap="flat" cmpd="sng" algn="ctr">
-                      <a:solidFill>
-                        <a:srgbClr val="D5D9DF"/>
-                      </a:solidFill>
-                      <a:prstDash val="solid"/>
-                      <a:round/>
-                      <a:headEnd type="none" w="med" len="med"/>
-                      <a:tailEnd type="none" w="med" len="med"/>
-                    </a:lnT>
-                    <a:lnB w="9525" cap="flat" cmpd="sng" algn="ctr">
-                      <a:solidFill>
-                        <a:srgbClr val="D5D9DF"/>
+                        <a:srgbClr val="000000"/>
                       </a:solidFill>
                       <a:prstDash val="solid"/>
                       <a:round/>
@@ -3821,7 +3302,7 @@
                   </a:tcPr>
                 </a:tc>
               </a:tr>
-              <a:tr h="420624">
+              <a:tr h="402336">
                 <a:tc>
                   <a:txBody>
                     <a:bodyPr/>
@@ -3831,54 +3312,36 @@
                         <a:buNone/>
                       </a:pPr>
                       <a:r>
-                        <a:rPr lang="en-US" sz="1250" b="1" dirty="0">
+                        <a:rPr lang="en-US" sz="1500" b="1" dirty="0">
                           <a:solidFill>
-                            <a:srgbClr val="14181F"/>
+                            <a:srgbClr val="000000"/>
                           </a:solidFill>
                           <a:latin typeface="Calibri" pitchFamily="34" charset="0"/>
                           <a:ea typeface="Calibri" pitchFamily="34" charset="-122"/>
                           <a:cs typeface="Calibri" pitchFamily="34" charset="-120"/>
                         </a:rPr>
-                        <a:t>Result</a:t>
+                        <a:t>Queries</a:t>
                       </a:r>
-                      <a:endParaRPr lang="en-US" sz="1250" dirty="0">
+                      <a:endParaRPr lang="en-US" sz="1500" dirty="0">
                         <a:latin typeface="Calibri" charset="0"/>
                         <a:ea typeface="Calibri" charset="0"/>
                         <a:cs typeface="Calibri" charset="0"/>
                       </a:endParaRPr>
                     </a:p>
                   </a:txBody>
-                  <a:tcPr marL="109728" marR="109728" marT="45720" marB="45720" anchor="ctr">
-                    <a:lnL w="9525" cap="flat" cmpd="sng" algn="ctr">
-                      <a:solidFill>
-                        <a:srgbClr val="D5D9DF"/>
-                      </a:solidFill>
-                      <a:prstDash val="solid"/>
-                      <a:round/>
-                      <a:headEnd type="none" w="med" len="med"/>
-                      <a:tailEnd type="none" w="med" len="med"/>
+                  <a:tcPr marL="0" marR="91440" marT="36576" marB="36576" anchor="ctr">
+                    <a:lnL w="0" cap="flat" cmpd="sng" algn="ctr">
+                      <a:noFill/>
                     </a:lnL>
-                    <a:lnR w="9525" cap="flat" cmpd="sng" algn="ctr">
-                      <a:solidFill>
-                        <a:srgbClr val="D5D9DF"/>
-                      </a:solidFill>
-                      <a:prstDash val="solid"/>
-                      <a:round/>
-                      <a:headEnd type="none" w="med" len="med"/>
-                      <a:tailEnd type="none" w="med" len="med"/>
+                    <a:lnR w="0" cap="flat" cmpd="sng" algn="ctr">
+                      <a:noFill/>
                     </a:lnR>
-                    <a:lnT w="9525" cap="flat" cmpd="sng" algn="ctr">
-                      <a:solidFill>
-                        <a:srgbClr val="D5D9DF"/>
-                      </a:solidFill>
-                      <a:prstDash val="solid"/>
-                      <a:round/>
-                      <a:headEnd type="none" w="med" len="med"/>
-                      <a:tailEnd type="none" w="med" len="med"/>
+                    <a:lnT w="0" cap="flat" cmpd="sng" algn="ctr">
+                      <a:noFill/>
                     </a:lnT>
                     <a:lnB w="9525" cap="flat" cmpd="sng" algn="ctr">
                       <a:solidFill>
-                        <a:srgbClr val="D5D9DF"/>
+                        <a:srgbClr val="C8CCD2"/>
                       </a:solidFill>
                       <a:prstDash val="solid"/>
                       <a:round/>
@@ -3896,54 +3359,36 @@
                         <a:buNone/>
                       </a:pPr>
                       <a:r>
-                        <a:rPr lang="en-US" sz="1250" dirty="0">
+                        <a:rPr lang="en-US" sz="1500" dirty="0">
                           <a:solidFill>
-                            <a:srgbClr val="14181F"/>
+                            <a:srgbClr val="000000"/>
                           </a:solidFill>
                           <a:latin typeface="Calibri" pitchFamily="34" charset="0"/>
                           <a:ea typeface="Calibri" pitchFamily="34" charset="-122"/>
                           <a:cs typeface="Calibri" pitchFamily="34" charset="-120"/>
                         </a:rPr>
-                        <a:t>Exact</a:t>
+                        <a:t>O(N), about N/2 on average</a:t>
                       </a:r>
-                      <a:endParaRPr lang="en-US" sz="1250" dirty="0">
+                      <a:endParaRPr lang="en-US" sz="1500" dirty="0">
                         <a:latin typeface="Calibri" charset="0"/>
                         <a:ea typeface="Calibri" charset="0"/>
                         <a:cs typeface="Calibri" charset="0"/>
                       </a:endParaRPr>
                     </a:p>
                   </a:txBody>
-                  <a:tcPr marL="109728" marR="109728" marT="45720" marB="45720" anchor="ctr">
-                    <a:lnL w="9525" cap="flat" cmpd="sng" algn="ctr">
-                      <a:solidFill>
-                        <a:srgbClr val="D5D9DF"/>
-                      </a:solidFill>
-                      <a:prstDash val="solid"/>
-                      <a:round/>
-                      <a:headEnd type="none" w="med" len="med"/>
-                      <a:tailEnd type="none" w="med" len="med"/>
+                  <a:tcPr marL="0" marR="91440" marT="36576" marB="36576" anchor="ctr">
+                    <a:lnL w="0" cap="flat" cmpd="sng" algn="ctr">
+                      <a:noFill/>
                     </a:lnL>
-                    <a:lnR w="9525" cap="flat" cmpd="sng" algn="ctr">
-                      <a:solidFill>
-                        <a:srgbClr val="D5D9DF"/>
-                      </a:solidFill>
-                      <a:prstDash val="solid"/>
-                      <a:round/>
-                      <a:headEnd type="none" w="med" len="med"/>
-                      <a:tailEnd type="none" w="med" len="med"/>
+                    <a:lnR w="0" cap="flat" cmpd="sng" algn="ctr">
+                      <a:noFill/>
                     </a:lnR>
-                    <a:lnT w="9525" cap="flat" cmpd="sng" algn="ctr">
-                      <a:solidFill>
-                        <a:srgbClr val="D5D9DF"/>
-                      </a:solidFill>
-                      <a:prstDash val="solid"/>
-                      <a:round/>
-                      <a:headEnd type="none" w="med" len="med"/>
-                      <a:tailEnd type="none" w="med" len="med"/>
+                    <a:lnT w="0" cap="flat" cmpd="sng" algn="ctr">
+                      <a:noFill/>
                     </a:lnT>
                     <a:lnB w="9525" cap="flat" cmpd="sng" algn="ctr">
                       <a:solidFill>
-                        <a:srgbClr val="D5D9DF"/>
+                        <a:srgbClr val="C8CCD2"/>
                       </a:solidFill>
                       <a:prstDash val="solid"/>
                       <a:round/>
@@ -3961,54 +3406,36 @@
                         <a:buNone/>
                       </a:pPr>
                       <a:r>
-                        <a:rPr lang="en-US" sz="1250" dirty="0">
+                        <a:rPr lang="en-US" sz="1500" dirty="0">
                           <a:solidFill>
-                            <a:srgbClr val="14181F"/>
+                            <a:srgbClr val="000000"/>
                           </a:solidFill>
                           <a:latin typeface="Calibri" pitchFamily="34" charset="0"/>
                           <a:ea typeface="Calibri" pitchFamily="34" charset="-122"/>
                           <a:cs typeface="Calibri" pitchFamily="34" charset="-120"/>
                         </a:rPr>
-                        <a:t>Probabilistic, ≥ 99.5% for n ≥ 5</a:t>
+                        <a:t>O(√N), about 0.785·√N</a:t>
                       </a:r>
-                      <a:endParaRPr lang="en-US" sz="1250" dirty="0">
+                      <a:endParaRPr lang="en-US" sz="1500" dirty="0">
                         <a:latin typeface="Calibri" charset="0"/>
                         <a:ea typeface="Calibri" charset="0"/>
                         <a:cs typeface="Calibri" charset="0"/>
                       </a:endParaRPr>
                     </a:p>
                   </a:txBody>
-                  <a:tcPr marL="109728" marR="109728" marT="45720" marB="45720" anchor="ctr">
-                    <a:lnL w="9525" cap="flat" cmpd="sng" algn="ctr">
-                      <a:solidFill>
-                        <a:srgbClr val="D5D9DF"/>
-                      </a:solidFill>
-                      <a:prstDash val="solid"/>
-                      <a:round/>
-                      <a:headEnd type="none" w="med" len="med"/>
-                      <a:tailEnd type="none" w="med" len="med"/>
+                  <a:tcPr marL="0" marR="91440" marT="36576" marB="36576" anchor="ctr">
+                    <a:lnL w="0" cap="flat" cmpd="sng" algn="ctr">
+                      <a:noFill/>
                     </a:lnL>
-                    <a:lnR w="9525" cap="flat" cmpd="sng" algn="ctr">
-                      <a:solidFill>
-                        <a:srgbClr val="D5D9DF"/>
-                      </a:solidFill>
-                      <a:prstDash val="solid"/>
-                      <a:round/>
-                      <a:headEnd type="none" w="med" len="med"/>
-                      <a:tailEnd type="none" w="med" len="med"/>
+                    <a:lnR w="0" cap="flat" cmpd="sng" algn="ctr">
+                      <a:noFill/>
                     </a:lnR>
-                    <a:lnT w="9525" cap="flat" cmpd="sng" algn="ctr">
-                      <a:solidFill>
-                        <a:srgbClr val="D5D9DF"/>
-                      </a:solidFill>
-                      <a:prstDash val="solid"/>
-                      <a:round/>
-                      <a:headEnd type="none" w="med" len="med"/>
-                      <a:tailEnd type="none" w="med" len="med"/>
+                    <a:lnT w="0" cap="flat" cmpd="sng" algn="ctr">
+                      <a:noFill/>
                     </a:lnT>
                     <a:lnB w="9525" cap="flat" cmpd="sng" algn="ctr">
                       <a:solidFill>
-                        <a:srgbClr val="D5D9DF"/>
+                        <a:srgbClr val="C8CCD2"/>
                       </a:solidFill>
                       <a:prstDash val="solid"/>
                       <a:round/>
@@ -4018,7 +3445,7 @@
                   </a:tcPr>
                 </a:tc>
               </a:tr>
-              <a:tr h="420624">
+              <a:tr h="402336">
                 <a:tc>
                   <a:txBody>
                     <a:bodyPr/>
@@ -4028,54 +3455,36 @@
                         <a:buNone/>
                       </a:pPr>
                       <a:r>
-                        <a:rPr lang="en-US" sz="1250" b="1" dirty="0">
+                        <a:rPr lang="en-US" sz="1500" b="1" dirty="0">
                           <a:solidFill>
-                            <a:srgbClr val="14181F"/>
+                            <a:srgbClr val="000000"/>
                           </a:solidFill>
                           <a:latin typeface="Calibri" pitchFamily="34" charset="0"/>
                           <a:ea typeface="Calibri" pitchFamily="34" charset="-122"/>
                           <a:cs typeface="Calibri" pitchFamily="34" charset="-120"/>
                         </a:rPr>
-                        <a:t>Needs to know</a:t>
+                        <a:t>Result</a:t>
                       </a:r>
-                      <a:endParaRPr lang="en-US" sz="1250" dirty="0">
+                      <a:endParaRPr lang="en-US" sz="1500" dirty="0">
                         <a:latin typeface="Calibri" charset="0"/>
                         <a:ea typeface="Calibri" charset="0"/>
                         <a:cs typeface="Calibri" charset="0"/>
                       </a:endParaRPr>
                     </a:p>
                   </a:txBody>
-                  <a:tcPr marL="109728" marR="109728" marT="45720" marB="45720" anchor="ctr">
-                    <a:lnL w="9525" cap="flat" cmpd="sng" algn="ctr">
-                      <a:solidFill>
-                        <a:srgbClr val="D5D9DF"/>
-                      </a:solidFill>
-                      <a:prstDash val="solid"/>
-                      <a:round/>
-                      <a:headEnd type="none" w="med" len="med"/>
-                      <a:tailEnd type="none" w="med" len="med"/>
+                  <a:tcPr marL="0" marR="91440" marT="36576" marB="36576" anchor="ctr">
+                    <a:lnL w="0" cap="flat" cmpd="sng" algn="ctr">
+                      <a:noFill/>
                     </a:lnL>
-                    <a:lnR w="9525" cap="flat" cmpd="sng" algn="ctr">
-                      <a:solidFill>
-                        <a:srgbClr val="D5D9DF"/>
-                      </a:solidFill>
-                      <a:prstDash val="solid"/>
-                      <a:round/>
-                      <a:headEnd type="none" w="med" len="med"/>
-                      <a:tailEnd type="none" w="med" len="med"/>
+                    <a:lnR w="0" cap="flat" cmpd="sng" algn="ctr">
+                      <a:noFill/>
                     </a:lnR>
-                    <a:lnT w="9525" cap="flat" cmpd="sng" algn="ctr">
-                      <a:solidFill>
-                        <a:srgbClr val="D5D9DF"/>
-                      </a:solidFill>
-                      <a:prstDash val="solid"/>
-                      <a:round/>
-                      <a:headEnd type="none" w="med" len="med"/>
-                      <a:tailEnd type="none" w="med" len="med"/>
+                    <a:lnT w="0" cap="flat" cmpd="sng" algn="ctr">
+                      <a:noFill/>
                     </a:lnT>
                     <a:lnB w="9525" cap="flat" cmpd="sng" algn="ctr">
                       <a:solidFill>
-                        <a:srgbClr val="D5D9DF"/>
+                        <a:srgbClr val="C8CCD2"/>
                       </a:solidFill>
                       <a:prstDash val="solid"/>
                       <a:round/>
@@ -4093,54 +3502,36 @@
                         <a:buNone/>
                       </a:pPr>
                       <a:r>
-                        <a:rPr lang="en-US" sz="1250" dirty="0">
+                        <a:rPr lang="en-US" sz="1500" dirty="0">
                           <a:solidFill>
-                            <a:srgbClr val="14181F"/>
+                            <a:srgbClr val="000000"/>
                           </a:solidFill>
                           <a:latin typeface="Calibri" pitchFamily="34" charset="0"/>
                           <a:ea typeface="Calibri" pitchFamily="34" charset="-122"/>
                           <a:cs typeface="Calibri" pitchFamily="34" charset="-120"/>
                         </a:rPr>
-                        <a:t>Nothing</a:t>
+                        <a:t>Exact</a:t>
                       </a:r>
-                      <a:endParaRPr lang="en-US" sz="1250" dirty="0">
+                      <a:endParaRPr lang="en-US" sz="1500" dirty="0">
                         <a:latin typeface="Calibri" charset="0"/>
                         <a:ea typeface="Calibri" charset="0"/>
                         <a:cs typeface="Calibri" charset="0"/>
                       </a:endParaRPr>
                     </a:p>
                   </a:txBody>
-                  <a:tcPr marL="109728" marR="109728" marT="45720" marB="45720" anchor="ctr">
-                    <a:lnL w="9525" cap="flat" cmpd="sng" algn="ctr">
-                      <a:solidFill>
-                        <a:srgbClr val="D5D9DF"/>
-                      </a:solidFill>
-                      <a:prstDash val="solid"/>
-                      <a:round/>
-                      <a:headEnd type="none" w="med" len="med"/>
-                      <a:tailEnd type="none" w="med" len="med"/>
+                  <a:tcPr marL="0" marR="91440" marT="36576" marB="36576" anchor="ctr">
+                    <a:lnL w="0" cap="flat" cmpd="sng" algn="ctr">
+                      <a:noFill/>
                     </a:lnL>
-                    <a:lnR w="9525" cap="flat" cmpd="sng" algn="ctr">
-                      <a:solidFill>
-                        <a:srgbClr val="D5D9DF"/>
-                      </a:solidFill>
-                      <a:prstDash val="solid"/>
-                      <a:round/>
-                      <a:headEnd type="none" w="med" len="med"/>
-                      <a:tailEnd type="none" w="med" len="med"/>
+                    <a:lnR w="0" cap="flat" cmpd="sng" algn="ctr">
+                      <a:noFill/>
                     </a:lnR>
-                    <a:lnT w="9525" cap="flat" cmpd="sng" algn="ctr">
-                      <a:solidFill>
-                        <a:srgbClr val="D5D9DF"/>
-                      </a:solidFill>
-                      <a:prstDash val="solid"/>
-                      <a:round/>
-                      <a:headEnd type="none" w="med" len="med"/>
-                      <a:tailEnd type="none" w="med" len="med"/>
+                    <a:lnT w="0" cap="flat" cmpd="sng" algn="ctr">
+                      <a:noFill/>
                     </a:lnT>
                     <a:lnB w="9525" cap="flat" cmpd="sng" algn="ctr">
                       <a:solidFill>
-                        <a:srgbClr val="D5D9DF"/>
+                        <a:srgbClr val="C8CCD2"/>
                       </a:solidFill>
                       <a:prstDash val="solid"/>
                       <a:round/>
@@ -4158,54 +3549,36 @@
                         <a:buNone/>
                       </a:pPr>
                       <a:r>
-                        <a:rPr lang="en-US" sz="1250" dirty="0">
+                        <a:rPr lang="en-US" sz="1500" dirty="0">
                           <a:solidFill>
-                            <a:srgbClr val="14181F"/>
+                            <a:srgbClr val="000000"/>
                           </a:solidFill>
                           <a:latin typeface="Calibri" pitchFamily="34" charset="0"/>
                           <a:ea typeface="Calibri" pitchFamily="34" charset="-122"/>
                           <a:cs typeface="Calibri" pitchFamily="34" charset="-120"/>
                         </a:rPr>
-                        <a:t>Number of secrets M, to choose k</a:t>
+                        <a:t>Probabilistic, ≥ 99.5% for n ≥ 5</a:t>
                       </a:r>
-                      <a:endParaRPr lang="en-US" sz="1250" dirty="0">
+                      <a:endParaRPr lang="en-US" sz="1500" dirty="0">
                         <a:latin typeface="Calibri" charset="0"/>
                         <a:ea typeface="Calibri" charset="0"/>
                         <a:cs typeface="Calibri" charset="0"/>
                       </a:endParaRPr>
                     </a:p>
                   </a:txBody>
-                  <a:tcPr marL="109728" marR="109728" marT="45720" marB="45720" anchor="ctr">
-                    <a:lnL w="9525" cap="flat" cmpd="sng" algn="ctr">
-                      <a:solidFill>
-                        <a:srgbClr val="D5D9DF"/>
-                      </a:solidFill>
-                      <a:prstDash val="solid"/>
-                      <a:round/>
-                      <a:headEnd type="none" w="med" len="med"/>
-                      <a:tailEnd type="none" w="med" len="med"/>
+                  <a:tcPr marL="0" marR="91440" marT="36576" marB="36576" anchor="ctr">
+                    <a:lnL w="0" cap="flat" cmpd="sng" algn="ctr">
+                      <a:noFill/>
                     </a:lnL>
-                    <a:lnR w="9525" cap="flat" cmpd="sng" algn="ctr">
-                      <a:solidFill>
-                        <a:srgbClr val="D5D9DF"/>
-                      </a:solidFill>
-                      <a:prstDash val="solid"/>
-                      <a:round/>
-                      <a:headEnd type="none" w="med" len="med"/>
-                      <a:tailEnd type="none" w="med" len="med"/>
+                    <a:lnR w="0" cap="flat" cmpd="sng" algn="ctr">
+                      <a:noFill/>
                     </a:lnR>
-                    <a:lnT w="9525" cap="flat" cmpd="sng" algn="ctr">
-                      <a:solidFill>
-                        <a:srgbClr val="D5D9DF"/>
-                      </a:solidFill>
-                      <a:prstDash val="solid"/>
-                      <a:round/>
-                      <a:headEnd type="none" w="med" len="med"/>
-                      <a:tailEnd type="none" w="med" len="med"/>
+                    <a:lnT w="0" cap="flat" cmpd="sng" algn="ctr">
+                      <a:noFill/>
                     </a:lnT>
                     <a:lnB w="9525" cap="flat" cmpd="sng" algn="ctr">
                       <a:solidFill>
-                        <a:srgbClr val="D5D9DF"/>
+                        <a:srgbClr val="C8CCD2"/>
                       </a:solidFill>
                       <a:prstDash val="solid"/>
                       <a:round/>
@@ -4215,7 +3588,7 @@
                   </a:tcPr>
                 </a:tc>
               </a:tr>
-              <a:tr h="420624">
+              <a:tr h="402336">
                 <a:tc>
                   <a:txBody>
                     <a:bodyPr/>
@@ -4225,54 +3598,36 @@
                         <a:buNone/>
                       </a:pPr>
                       <a:r>
-                        <a:rPr lang="en-US" sz="1250" b="1" dirty="0">
+                        <a:rPr lang="en-US" sz="1500" b="1" dirty="0">
                           <a:solidFill>
-                            <a:srgbClr val="14181F"/>
+                            <a:srgbClr val="000000"/>
                           </a:solidFill>
                           <a:latin typeface="Calibri" pitchFamily="34" charset="0"/>
                           <a:ea typeface="Calibri" pitchFamily="34" charset="-122"/>
                           <a:cs typeface="Calibri" pitchFamily="34" charset="-120"/>
                         </a:rPr>
-                        <a:t>Oracle</a:t>
+                        <a:t>Needs to know</a:t>
                       </a:r>
-                      <a:endParaRPr lang="en-US" sz="1250" dirty="0">
+                      <a:endParaRPr lang="en-US" sz="1500" dirty="0">
                         <a:latin typeface="Calibri" charset="0"/>
                         <a:ea typeface="Calibri" charset="0"/>
                         <a:cs typeface="Calibri" charset="0"/>
                       </a:endParaRPr>
                     </a:p>
                   </a:txBody>
-                  <a:tcPr marL="109728" marR="109728" marT="45720" marB="45720" anchor="ctr">
-                    <a:lnL w="9525" cap="flat" cmpd="sng" algn="ctr">
-                      <a:solidFill>
-                        <a:srgbClr val="D5D9DF"/>
-                      </a:solidFill>
-                      <a:prstDash val="solid"/>
-                      <a:round/>
-                      <a:headEnd type="none" w="med" len="med"/>
-                      <a:tailEnd type="none" w="med" len="med"/>
+                  <a:tcPr marL="0" marR="91440" marT="36576" marB="36576" anchor="ctr">
+                    <a:lnL w="0" cap="flat" cmpd="sng" algn="ctr">
+                      <a:noFill/>
                     </a:lnL>
-                    <a:lnR w="9525" cap="flat" cmpd="sng" algn="ctr">
-                      <a:solidFill>
-                        <a:srgbClr val="D5D9DF"/>
-                      </a:solidFill>
-                      <a:prstDash val="solid"/>
-                      <a:round/>
-                      <a:headEnd type="none" w="med" len="med"/>
-                      <a:tailEnd type="none" w="med" len="med"/>
+                    <a:lnR w="0" cap="flat" cmpd="sng" algn="ctr">
+                      <a:noFill/>
                     </a:lnR>
-                    <a:lnT w="9525" cap="flat" cmpd="sng" algn="ctr">
-                      <a:solidFill>
-                        <a:srgbClr val="D5D9DF"/>
-                      </a:solidFill>
-                      <a:prstDash val="solid"/>
-                      <a:round/>
-                      <a:headEnd type="none" w="med" len="med"/>
-                      <a:tailEnd type="none" w="med" len="med"/>
+                    <a:lnT w="0" cap="flat" cmpd="sng" algn="ctr">
+                      <a:noFill/>
                     </a:lnT>
                     <a:lnB w="9525" cap="flat" cmpd="sng" algn="ctr">
                       <a:solidFill>
-                        <a:srgbClr val="D5D9DF"/>
+                        <a:srgbClr val="C8CCD2"/>
                       </a:solidFill>
                       <a:prstDash val="solid"/>
                       <a:round/>
@@ -4290,54 +3645,36 @@
                         <a:buNone/>
                       </a:pPr>
                       <a:r>
-                        <a:rPr lang="en-US" sz="1250" dirty="0">
+                        <a:rPr lang="en-US" sz="1500" dirty="0">
                           <a:solidFill>
-                            <a:srgbClr val="14181F"/>
+                            <a:srgbClr val="000000"/>
                           </a:solidFill>
                           <a:latin typeface="Calibri" pitchFamily="34" charset="0"/>
                           <a:ea typeface="Calibri" pitchFamily="34" charset="-122"/>
                           <a:cs typeface="Calibri" pitchFamily="34" charset="-120"/>
                         </a:rPr>
-                        <a:t>Any function call</a:t>
+                        <a:t>Nothing</a:t>
                       </a:r>
-                      <a:endParaRPr lang="en-US" sz="1250" dirty="0">
+                      <a:endParaRPr lang="en-US" sz="1500" dirty="0">
                         <a:latin typeface="Calibri" charset="0"/>
                         <a:ea typeface="Calibri" charset="0"/>
                         <a:cs typeface="Calibri" charset="0"/>
                       </a:endParaRPr>
                     </a:p>
                   </a:txBody>
-                  <a:tcPr marL="109728" marR="109728" marT="45720" marB="45720" anchor="ctr">
-                    <a:lnL w="9525" cap="flat" cmpd="sng" algn="ctr">
-                      <a:solidFill>
-                        <a:srgbClr val="D5D9DF"/>
-                      </a:solidFill>
-                      <a:prstDash val="solid"/>
-                      <a:round/>
-                      <a:headEnd type="none" w="med" len="med"/>
-                      <a:tailEnd type="none" w="med" len="med"/>
+                  <a:tcPr marL="0" marR="91440" marT="36576" marB="36576" anchor="ctr">
+                    <a:lnL w="0" cap="flat" cmpd="sng" algn="ctr">
+                      <a:noFill/>
                     </a:lnL>
-                    <a:lnR w="9525" cap="flat" cmpd="sng" algn="ctr">
-                      <a:solidFill>
-                        <a:srgbClr val="D5D9DF"/>
-                      </a:solidFill>
-                      <a:prstDash val="solid"/>
-                      <a:round/>
-                      <a:headEnd type="none" w="med" len="med"/>
-                      <a:tailEnd type="none" w="med" len="med"/>
+                    <a:lnR w="0" cap="flat" cmpd="sng" algn="ctr">
+                      <a:noFill/>
                     </a:lnR>
-                    <a:lnT w="9525" cap="flat" cmpd="sng" algn="ctr">
-                      <a:solidFill>
-                        <a:srgbClr val="D5D9DF"/>
-                      </a:solidFill>
-                      <a:prstDash val="solid"/>
-                      <a:round/>
-                      <a:headEnd type="none" w="med" len="med"/>
-                      <a:tailEnd type="none" w="med" len="med"/>
+                    <a:lnT w="0" cap="flat" cmpd="sng" algn="ctr">
+                      <a:noFill/>
                     </a:lnT>
                     <a:lnB w="9525" cap="flat" cmpd="sng" algn="ctr">
                       <a:solidFill>
-                        <a:srgbClr val="D5D9DF"/>
+                        <a:srgbClr val="C8CCD2"/>
                       </a:solidFill>
                       <a:prstDash val="solid"/>
                       <a:round/>
@@ -4355,54 +3692,36 @@
                         <a:buNone/>
                       </a:pPr>
                       <a:r>
-                        <a:rPr lang="en-US" sz="1250" dirty="0">
+                        <a:rPr lang="en-US" sz="1500" dirty="0">
                           <a:solidFill>
-                            <a:srgbClr val="14181F"/>
+                            <a:srgbClr val="000000"/>
                           </a:solidFill>
                           <a:latin typeface="Calibri" pitchFamily="34" charset="0"/>
                           <a:ea typeface="Calibri" pitchFamily="34" charset="-122"/>
                           <a:cs typeface="Calibri" pitchFamily="34" charset="-120"/>
                         </a:rPr>
-                        <a:t>Reversible quantum circuit</a:t>
+                        <a:t>Number of secrets M</a:t>
                       </a:r>
-                      <a:endParaRPr lang="en-US" sz="1250" dirty="0">
+                      <a:endParaRPr lang="en-US" sz="1500" dirty="0">
                         <a:latin typeface="Calibri" charset="0"/>
                         <a:ea typeface="Calibri" charset="0"/>
                         <a:cs typeface="Calibri" charset="0"/>
                       </a:endParaRPr>
                     </a:p>
                   </a:txBody>
-                  <a:tcPr marL="109728" marR="109728" marT="45720" marB="45720" anchor="ctr">
-                    <a:lnL w="9525" cap="flat" cmpd="sng" algn="ctr">
-                      <a:solidFill>
-                        <a:srgbClr val="D5D9DF"/>
-                      </a:solidFill>
-                      <a:prstDash val="solid"/>
-                      <a:round/>
-                      <a:headEnd type="none" w="med" len="med"/>
-                      <a:tailEnd type="none" w="med" len="med"/>
+                  <a:tcPr marL="0" marR="91440" marT="36576" marB="36576" anchor="ctr">
+                    <a:lnL w="0" cap="flat" cmpd="sng" algn="ctr">
+                      <a:noFill/>
                     </a:lnL>
-                    <a:lnR w="9525" cap="flat" cmpd="sng" algn="ctr">
-                      <a:solidFill>
-                        <a:srgbClr val="D5D9DF"/>
-                      </a:solidFill>
-                      <a:prstDash val="solid"/>
-                      <a:round/>
-                      <a:headEnd type="none" w="med" len="med"/>
-                      <a:tailEnd type="none" w="med" len="med"/>
+                    <a:lnR w="0" cap="flat" cmpd="sng" algn="ctr">
+                      <a:noFill/>
                     </a:lnR>
-                    <a:lnT w="9525" cap="flat" cmpd="sng" algn="ctr">
-                      <a:solidFill>
-                        <a:srgbClr val="D5D9DF"/>
-                      </a:solidFill>
-                      <a:prstDash val="solid"/>
-                      <a:round/>
-                      <a:headEnd type="none" w="med" len="med"/>
-                      <a:tailEnd type="none" w="med" len="med"/>
+                    <a:lnT w="0" cap="flat" cmpd="sng" algn="ctr">
+                      <a:noFill/>
                     </a:lnT>
                     <a:lnB w="9525" cap="flat" cmpd="sng" algn="ctr">
                       <a:solidFill>
-                        <a:srgbClr val="D5D9DF"/>
+                        <a:srgbClr val="C8CCD2"/>
                       </a:solidFill>
                       <a:prstDash val="solid"/>
                       <a:round/>
@@ -4412,7 +3731,7 @@
                   </a:tcPr>
                 </a:tc>
               </a:tr>
-              <a:tr h="420624">
+              <a:tr h="402336">
                 <a:tc>
                   <a:txBody>
                     <a:bodyPr/>
@@ -4422,54 +3741,36 @@
                         <a:buNone/>
                       </a:pPr>
                       <a:r>
-                        <a:rPr lang="en-US" sz="1250" b="1" dirty="0">
+                        <a:rPr lang="en-US" sz="1500" b="1" dirty="0">
                           <a:solidFill>
-                            <a:srgbClr val="14181F"/>
+                            <a:srgbClr val="000000"/>
                           </a:solidFill>
                           <a:latin typeface="Calibri" pitchFamily="34" charset="0"/>
                           <a:ea typeface="Calibri" pitchFamily="34" charset="-122"/>
                           <a:cs typeface="Calibri" pitchFamily="34" charset="-120"/>
                         </a:rPr>
-                        <a:t>Parallelism</a:t>
+                        <a:t>Oracle</a:t>
                       </a:r>
-                      <a:endParaRPr lang="en-US" sz="1250" dirty="0">
+                      <a:endParaRPr lang="en-US" sz="1500" dirty="0">
                         <a:latin typeface="Calibri" charset="0"/>
                         <a:ea typeface="Calibri" charset="0"/>
                         <a:cs typeface="Calibri" charset="0"/>
                       </a:endParaRPr>
                     </a:p>
                   </a:txBody>
-                  <a:tcPr marL="109728" marR="109728" marT="45720" marB="45720" anchor="ctr">
-                    <a:lnL w="9525" cap="flat" cmpd="sng" algn="ctr">
-                      <a:solidFill>
-                        <a:srgbClr val="D5D9DF"/>
-                      </a:solidFill>
-                      <a:prstDash val="solid"/>
-                      <a:round/>
-                      <a:headEnd type="none" w="med" len="med"/>
-                      <a:tailEnd type="none" w="med" len="med"/>
+                  <a:tcPr marL="0" marR="91440" marT="36576" marB="36576" anchor="ctr">
+                    <a:lnL w="0" cap="flat" cmpd="sng" algn="ctr">
+                      <a:noFill/>
                     </a:lnL>
-                    <a:lnR w="9525" cap="flat" cmpd="sng" algn="ctr">
-                      <a:solidFill>
-                        <a:srgbClr val="D5D9DF"/>
-                      </a:solidFill>
-                      <a:prstDash val="solid"/>
-                      <a:round/>
-                      <a:headEnd type="none" w="med" len="med"/>
-                      <a:tailEnd type="none" w="med" len="med"/>
+                    <a:lnR w="0" cap="flat" cmpd="sng" algn="ctr">
+                      <a:noFill/>
                     </a:lnR>
-                    <a:lnT w="9525" cap="flat" cmpd="sng" algn="ctr">
-                      <a:solidFill>
-                        <a:srgbClr val="D5D9DF"/>
-                      </a:solidFill>
-                      <a:prstDash val="solid"/>
-                      <a:round/>
-                      <a:headEnd type="none" w="med" len="med"/>
-                      <a:tailEnd type="none" w="med" len="med"/>
+                    <a:lnT w="0" cap="flat" cmpd="sng" algn="ctr">
+                      <a:noFill/>
                     </a:lnT>
                     <a:lnB w="9525" cap="flat" cmpd="sng" algn="ctr">
                       <a:solidFill>
-                        <a:srgbClr val="D5D9DF"/>
+                        <a:srgbClr val="C8CCD2"/>
                       </a:solidFill>
                       <a:prstDash val="solid"/>
                       <a:round/>
@@ -4487,54 +3788,36 @@
                         <a:buNone/>
                       </a:pPr>
                       <a:r>
-                        <a:rPr lang="en-US" sz="1250" dirty="0">
+                        <a:rPr lang="en-US" sz="1500" dirty="0">
                           <a:solidFill>
-                            <a:srgbClr val="14181F"/>
+                            <a:srgbClr val="000000"/>
                           </a:solidFill>
                           <a:latin typeface="Calibri" pitchFamily="34" charset="0"/>
                           <a:ea typeface="Calibri" pitchFamily="34" charset="-122"/>
                           <a:cs typeface="Calibri" pitchFamily="34" charset="-120"/>
                         </a:rPr>
-                        <a:t>p machines: p× faster</a:t>
+                        <a:t>Any function call</a:t>
                       </a:r>
-                      <a:endParaRPr lang="en-US" sz="1250" dirty="0">
+                      <a:endParaRPr lang="en-US" sz="1500" dirty="0">
                         <a:latin typeface="Calibri" charset="0"/>
                         <a:ea typeface="Calibri" charset="0"/>
                         <a:cs typeface="Calibri" charset="0"/>
                       </a:endParaRPr>
                     </a:p>
                   </a:txBody>
-                  <a:tcPr marL="109728" marR="109728" marT="45720" marB="45720" anchor="ctr">
-                    <a:lnL w="9525" cap="flat" cmpd="sng" algn="ctr">
-                      <a:solidFill>
-                        <a:srgbClr val="D5D9DF"/>
-                      </a:solidFill>
-                      <a:prstDash val="solid"/>
-                      <a:round/>
-                      <a:headEnd type="none" w="med" len="med"/>
-                      <a:tailEnd type="none" w="med" len="med"/>
+                  <a:tcPr marL="0" marR="91440" marT="36576" marB="36576" anchor="ctr">
+                    <a:lnL w="0" cap="flat" cmpd="sng" algn="ctr">
+                      <a:noFill/>
                     </a:lnL>
-                    <a:lnR w="9525" cap="flat" cmpd="sng" algn="ctr">
-                      <a:solidFill>
-                        <a:srgbClr val="D5D9DF"/>
-                      </a:solidFill>
-                      <a:prstDash val="solid"/>
-                      <a:round/>
-                      <a:headEnd type="none" w="med" len="med"/>
-                      <a:tailEnd type="none" w="med" len="med"/>
+                    <a:lnR w="0" cap="flat" cmpd="sng" algn="ctr">
+                      <a:noFill/>
                     </a:lnR>
-                    <a:lnT w="9525" cap="flat" cmpd="sng" algn="ctr">
-                      <a:solidFill>
-                        <a:srgbClr val="D5D9DF"/>
-                      </a:solidFill>
-                      <a:prstDash val="solid"/>
-                      <a:round/>
-                      <a:headEnd type="none" w="med" len="med"/>
-                      <a:tailEnd type="none" w="med" len="med"/>
+                    <a:lnT w="0" cap="flat" cmpd="sng" algn="ctr">
+                      <a:noFill/>
                     </a:lnT>
                     <a:lnB w="9525" cap="flat" cmpd="sng" algn="ctr">
                       <a:solidFill>
-                        <a:srgbClr val="D5D9DF"/>
+                        <a:srgbClr val="C8CCD2"/>
                       </a:solidFill>
                       <a:prstDash val="solid"/>
                       <a:round/>
@@ -4552,54 +3835,36 @@
                         <a:buNone/>
                       </a:pPr>
                       <a:r>
-                        <a:rPr lang="en-US" sz="1250" dirty="0">
+                        <a:rPr lang="en-US" sz="1500" dirty="0">
                           <a:solidFill>
-                            <a:srgbClr val="14181F"/>
+                            <a:srgbClr val="000000"/>
                           </a:solidFill>
                           <a:latin typeface="Calibri" pitchFamily="34" charset="0"/>
                           <a:ea typeface="Calibri" pitchFamily="34" charset="-122"/>
                           <a:cs typeface="Calibri" pitchFamily="34" charset="-120"/>
                         </a:rPr>
-                        <a:t>p machines: only √p×</a:t>
+                        <a:t>Reversible quantum circuit</a:t>
                       </a:r>
-                      <a:endParaRPr lang="en-US" sz="1250" dirty="0">
+                      <a:endParaRPr lang="en-US" sz="1500" dirty="0">
                         <a:latin typeface="Calibri" charset="0"/>
                         <a:ea typeface="Calibri" charset="0"/>
                         <a:cs typeface="Calibri" charset="0"/>
                       </a:endParaRPr>
                     </a:p>
                   </a:txBody>
-                  <a:tcPr marL="109728" marR="109728" marT="45720" marB="45720" anchor="ctr">
-                    <a:lnL w="9525" cap="flat" cmpd="sng" algn="ctr">
-                      <a:solidFill>
-                        <a:srgbClr val="D5D9DF"/>
-                      </a:solidFill>
-                      <a:prstDash val="solid"/>
-                      <a:round/>
-                      <a:headEnd type="none" w="med" len="med"/>
-                      <a:tailEnd type="none" w="med" len="med"/>
+                  <a:tcPr marL="0" marR="91440" marT="36576" marB="36576" anchor="ctr">
+                    <a:lnL w="0" cap="flat" cmpd="sng" algn="ctr">
+                      <a:noFill/>
                     </a:lnL>
-                    <a:lnR w="9525" cap="flat" cmpd="sng" algn="ctr">
-                      <a:solidFill>
-                        <a:srgbClr val="D5D9DF"/>
-                      </a:solidFill>
-                      <a:prstDash val="solid"/>
-                      <a:round/>
-                      <a:headEnd type="none" w="med" len="med"/>
-                      <a:tailEnd type="none" w="med" len="med"/>
+                    <a:lnR w="0" cap="flat" cmpd="sng" algn="ctr">
+                      <a:noFill/>
                     </a:lnR>
-                    <a:lnT w="9525" cap="flat" cmpd="sng" algn="ctr">
-                      <a:solidFill>
-                        <a:srgbClr val="D5D9DF"/>
-                      </a:solidFill>
-                      <a:prstDash val="solid"/>
-                      <a:round/>
-                      <a:headEnd type="none" w="med" len="med"/>
-                      <a:tailEnd type="none" w="med" len="med"/>
+                    <a:lnT w="0" cap="flat" cmpd="sng" algn="ctr">
+                      <a:noFill/>
                     </a:lnT>
                     <a:lnB w="9525" cap="flat" cmpd="sng" algn="ctr">
                       <a:solidFill>
-                        <a:srgbClr val="D5D9DF"/>
+                        <a:srgbClr val="C8CCD2"/>
                       </a:solidFill>
                       <a:prstDash val="solid"/>
                       <a:round/>
@@ -4609,7 +3874,7 @@
                   </a:tcPr>
                 </a:tc>
               </a:tr>
-              <a:tr h="420624">
+              <a:tr h="402336">
                 <a:tc>
                   <a:txBody>
                     <a:bodyPr/>
@@ -4619,54 +3884,36 @@
                         <a:buNone/>
                       </a:pPr>
                       <a:r>
-                        <a:rPr lang="en-US" sz="1250" b="1" dirty="0">
+                        <a:rPr lang="en-US" sz="1500" b="1" dirty="0">
                           <a:solidFill>
-                            <a:srgbClr val="14181F"/>
+                            <a:srgbClr val="000000"/>
                           </a:solidFill>
                           <a:latin typeface="Calibri" pitchFamily="34" charset="0"/>
                           <a:ea typeface="Calibri" pitchFamily="34" charset="-122"/>
                           <a:cs typeface="Calibri" pitchFamily="34" charset="-120"/>
                         </a:rPr>
-                        <a:t>Errors</a:t>
+                        <a:t>Parallelism</a:t>
                       </a:r>
-                      <a:endParaRPr lang="en-US" sz="1250" dirty="0">
+                      <a:endParaRPr lang="en-US" sz="1500" dirty="0">
                         <a:latin typeface="Calibri" charset="0"/>
                         <a:ea typeface="Calibri" charset="0"/>
                         <a:cs typeface="Calibri" charset="0"/>
                       </a:endParaRPr>
                     </a:p>
                   </a:txBody>
-                  <a:tcPr marL="109728" marR="109728" marT="45720" marB="45720" anchor="ctr">
-                    <a:lnL w="9525" cap="flat" cmpd="sng" algn="ctr">
-                      <a:solidFill>
-                        <a:srgbClr val="D5D9DF"/>
-                      </a:solidFill>
-                      <a:prstDash val="solid"/>
-                      <a:round/>
-                      <a:headEnd type="none" w="med" len="med"/>
-                      <a:tailEnd type="none" w="med" len="med"/>
+                  <a:tcPr marL="0" marR="91440" marT="36576" marB="36576" anchor="ctr">
+                    <a:lnL w="0" cap="flat" cmpd="sng" algn="ctr">
+                      <a:noFill/>
                     </a:lnL>
-                    <a:lnR w="9525" cap="flat" cmpd="sng" algn="ctr">
-                      <a:solidFill>
-                        <a:srgbClr val="D5D9DF"/>
-                      </a:solidFill>
-                      <a:prstDash val="solid"/>
-                      <a:round/>
-                      <a:headEnd type="none" w="med" len="med"/>
-                      <a:tailEnd type="none" w="med" len="med"/>
+                    <a:lnR w="0" cap="flat" cmpd="sng" algn="ctr">
+                      <a:noFill/>
                     </a:lnR>
-                    <a:lnT w="9525" cap="flat" cmpd="sng" algn="ctr">
-                      <a:solidFill>
-                        <a:srgbClr val="D5D9DF"/>
-                      </a:solidFill>
-                      <a:prstDash val="solid"/>
-                      <a:round/>
-                      <a:headEnd type="none" w="med" len="med"/>
-                      <a:tailEnd type="none" w="med" len="med"/>
+                    <a:lnT w="0" cap="flat" cmpd="sng" algn="ctr">
+                      <a:noFill/>
                     </a:lnT>
                     <a:lnB w="9525" cap="flat" cmpd="sng" algn="ctr">
                       <a:solidFill>
-                        <a:srgbClr val="D5D9DF"/>
+                        <a:srgbClr val="C8CCD2"/>
                       </a:solidFill>
                       <a:prstDash val="solid"/>
                       <a:round/>
@@ -4684,54 +3931,36 @@
                         <a:buNone/>
                       </a:pPr>
                       <a:r>
-                        <a:rPr lang="en-US" sz="1250" dirty="0">
+                        <a:rPr lang="en-US" sz="1500" dirty="0">
                           <a:solidFill>
-                            <a:srgbClr val="14181F"/>
+                            <a:srgbClr val="000000"/>
                           </a:solidFill>
                           <a:latin typeface="Calibri" pitchFamily="34" charset="0"/>
                           <a:ea typeface="Calibri" pitchFamily="34" charset="-122"/>
                           <a:cs typeface="Calibri" pitchFamily="34" charset="-120"/>
                         </a:rPr>
-                        <a:t>Negligible</a:t>
+                        <a:t>p machines: p× faster</a:t>
                       </a:r>
-                      <a:endParaRPr lang="en-US" sz="1250" dirty="0">
+                      <a:endParaRPr lang="en-US" sz="1500" dirty="0">
                         <a:latin typeface="Calibri" charset="0"/>
                         <a:ea typeface="Calibri" charset="0"/>
                         <a:cs typeface="Calibri" charset="0"/>
                       </a:endParaRPr>
                     </a:p>
                   </a:txBody>
-                  <a:tcPr marL="109728" marR="109728" marT="45720" marB="45720" anchor="ctr">
-                    <a:lnL w="9525" cap="flat" cmpd="sng" algn="ctr">
-                      <a:solidFill>
-                        <a:srgbClr val="D5D9DF"/>
-                      </a:solidFill>
-                      <a:prstDash val="solid"/>
-                      <a:round/>
-                      <a:headEnd type="none" w="med" len="med"/>
-                      <a:tailEnd type="none" w="med" len="med"/>
+                  <a:tcPr marL="0" marR="91440" marT="36576" marB="36576" anchor="ctr">
+                    <a:lnL w="0" cap="flat" cmpd="sng" algn="ctr">
+                      <a:noFill/>
                     </a:lnL>
-                    <a:lnR w="9525" cap="flat" cmpd="sng" algn="ctr">
-                      <a:solidFill>
-                        <a:srgbClr val="D5D9DF"/>
-                      </a:solidFill>
-                      <a:prstDash val="solid"/>
-                      <a:round/>
-                      <a:headEnd type="none" w="med" len="med"/>
-                      <a:tailEnd type="none" w="med" len="med"/>
+                    <a:lnR w="0" cap="flat" cmpd="sng" algn="ctr">
+                      <a:noFill/>
                     </a:lnR>
-                    <a:lnT w="9525" cap="flat" cmpd="sng" algn="ctr">
-                      <a:solidFill>
-                        <a:srgbClr val="D5D9DF"/>
-                      </a:solidFill>
-                      <a:prstDash val="solid"/>
-                      <a:round/>
-                      <a:headEnd type="none" w="med" len="med"/>
-                      <a:tailEnd type="none" w="med" len="med"/>
+                    <a:lnT w="0" cap="flat" cmpd="sng" algn="ctr">
+                      <a:noFill/>
                     </a:lnT>
                     <a:lnB w="9525" cap="flat" cmpd="sng" algn="ctr">
                       <a:solidFill>
-                        <a:srgbClr val="D5D9DF"/>
+                        <a:srgbClr val="C8CCD2"/>
                       </a:solidFill>
                       <a:prstDash val="solid"/>
                       <a:round/>
@@ -4749,54 +3978,36 @@
                         <a:buNone/>
                       </a:pPr>
                       <a:r>
-                        <a:rPr lang="en-US" sz="1250" dirty="0">
+                        <a:rPr lang="en-US" sz="1500" dirty="0">
                           <a:solidFill>
-                            <a:srgbClr val="14181F"/>
+                            <a:srgbClr val="000000"/>
                           </a:solidFill>
                           <a:latin typeface="Calibri" pitchFamily="34" charset="0"/>
                           <a:ea typeface="Calibri" pitchFamily="34" charset="-122"/>
                           <a:cs typeface="Calibri" pitchFamily="34" charset="-120"/>
                         </a:rPr>
-                        <a:t>Depth grows as n√N: very sensitive</a:t>
+                        <a:t>p machines: only √p×</a:t>
                       </a:r>
-                      <a:endParaRPr lang="en-US" sz="1250" dirty="0">
+                      <a:endParaRPr lang="en-US" sz="1500" dirty="0">
                         <a:latin typeface="Calibri" charset="0"/>
                         <a:ea typeface="Calibri" charset="0"/>
                         <a:cs typeface="Calibri" charset="0"/>
                       </a:endParaRPr>
                     </a:p>
                   </a:txBody>
-                  <a:tcPr marL="109728" marR="109728" marT="45720" marB="45720" anchor="ctr">
-                    <a:lnL w="9525" cap="flat" cmpd="sng" algn="ctr">
-                      <a:solidFill>
-                        <a:srgbClr val="D5D9DF"/>
-                      </a:solidFill>
-                      <a:prstDash val="solid"/>
-                      <a:round/>
-                      <a:headEnd type="none" w="med" len="med"/>
-                      <a:tailEnd type="none" w="med" len="med"/>
+                  <a:tcPr marL="0" marR="91440" marT="36576" marB="36576" anchor="ctr">
+                    <a:lnL w="0" cap="flat" cmpd="sng" algn="ctr">
+                      <a:noFill/>
                     </a:lnL>
-                    <a:lnR w="9525" cap="flat" cmpd="sng" algn="ctr">
-                      <a:solidFill>
-                        <a:srgbClr val="D5D9DF"/>
-                      </a:solidFill>
-                      <a:prstDash val="solid"/>
-                      <a:round/>
-                      <a:headEnd type="none" w="med" len="med"/>
-                      <a:tailEnd type="none" w="med" len="med"/>
+                    <a:lnR w="0" cap="flat" cmpd="sng" algn="ctr">
+                      <a:noFill/>
                     </a:lnR>
-                    <a:lnT w="9525" cap="flat" cmpd="sng" algn="ctr">
-                      <a:solidFill>
-                        <a:srgbClr val="D5D9DF"/>
-                      </a:solidFill>
-                      <a:prstDash val="solid"/>
-                      <a:round/>
-                      <a:headEnd type="none" w="med" len="med"/>
-                      <a:tailEnd type="none" w="med" len="med"/>
+                    <a:lnT w="0" cap="flat" cmpd="sng" algn="ctr">
+                      <a:noFill/>
                     </a:lnT>
                     <a:lnB w="9525" cap="flat" cmpd="sng" algn="ctr">
                       <a:solidFill>
-                        <a:srgbClr val="D5D9DF"/>
+                        <a:srgbClr val="C8CCD2"/>
                       </a:solidFill>
                       <a:prstDash val="solid"/>
                       <a:round/>
@@ -4806,7 +4017,7 @@
                   </a:tcPr>
                 </a:tc>
               </a:tr>
-              <a:tr h="420624">
+              <a:tr h="402336">
                 <a:tc>
                   <a:txBody>
                     <a:bodyPr/>
@@ -4816,54 +4027,36 @@
                         <a:buNone/>
                       </a:pPr>
                       <a:r>
-                        <a:rPr lang="en-US" sz="1250" b="1" dirty="0">
+                        <a:rPr lang="en-US" sz="1500" b="1" dirty="0">
                           <a:solidFill>
-                            <a:srgbClr val="14181F"/>
+                            <a:srgbClr val="000000"/>
                           </a:solidFill>
                           <a:latin typeface="Calibri" pitchFamily="34" charset="0"/>
                           <a:ea typeface="Calibri" pitchFamily="34" charset="-122"/>
                           <a:cs typeface="Calibri" pitchFamily="34" charset="-120"/>
                         </a:rPr>
-                        <a:t>Hardware</a:t>
+                        <a:t>Errors</a:t>
                       </a:r>
-                      <a:endParaRPr lang="en-US" sz="1250" dirty="0">
+                      <a:endParaRPr lang="en-US" sz="1500" dirty="0">
                         <a:latin typeface="Calibri" charset="0"/>
                         <a:ea typeface="Calibri" charset="0"/>
                         <a:cs typeface="Calibri" charset="0"/>
                       </a:endParaRPr>
                     </a:p>
                   </a:txBody>
-                  <a:tcPr marL="109728" marR="109728" marT="45720" marB="45720" anchor="ctr">
-                    <a:lnL w="9525" cap="flat" cmpd="sng" algn="ctr">
-                      <a:solidFill>
-                        <a:srgbClr val="D5D9DF"/>
-                      </a:solidFill>
-                      <a:prstDash val="solid"/>
-                      <a:round/>
-                      <a:headEnd type="none" w="med" len="med"/>
-                      <a:tailEnd type="none" w="med" len="med"/>
+                  <a:tcPr marL="0" marR="91440" marT="36576" marB="36576" anchor="ctr">
+                    <a:lnL w="0" cap="flat" cmpd="sng" algn="ctr">
+                      <a:noFill/>
                     </a:lnL>
-                    <a:lnR w="9525" cap="flat" cmpd="sng" algn="ctr">
-                      <a:solidFill>
-                        <a:srgbClr val="D5D9DF"/>
-                      </a:solidFill>
-                      <a:prstDash val="solid"/>
-                      <a:round/>
-                      <a:headEnd type="none" w="med" len="med"/>
-                      <a:tailEnd type="none" w="med" len="med"/>
+                    <a:lnR w="0" cap="flat" cmpd="sng" algn="ctr">
+                      <a:noFill/>
                     </a:lnR>
-                    <a:lnT w="9525" cap="flat" cmpd="sng" algn="ctr">
-                      <a:solidFill>
-                        <a:srgbClr val="D5D9DF"/>
-                      </a:solidFill>
-                      <a:prstDash val="solid"/>
-                      <a:round/>
-                      <a:headEnd type="none" w="med" len="med"/>
-                      <a:tailEnd type="none" w="med" len="med"/>
+                    <a:lnT w="0" cap="flat" cmpd="sng" algn="ctr">
+                      <a:noFill/>
                     </a:lnT>
                     <a:lnB w="9525" cap="flat" cmpd="sng" algn="ctr">
                       <a:solidFill>
-                        <a:srgbClr val="D5D9DF"/>
+                        <a:srgbClr val="C8CCD2"/>
                       </a:solidFill>
                       <a:prstDash val="solid"/>
                       <a:round/>
@@ -4881,54 +4074,36 @@
                         <a:buNone/>
                       </a:pPr>
                       <a:r>
-                        <a:rPr lang="en-US" sz="1250" dirty="0">
+                        <a:rPr lang="en-US" sz="1500" dirty="0">
                           <a:solidFill>
-                            <a:srgbClr val="14181F"/>
+                            <a:srgbClr val="000000"/>
                           </a:solidFill>
                           <a:latin typeface="Calibri" pitchFamily="34" charset="0"/>
                           <a:ea typeface="Calibri" pitchFamily="34" charset="-122"/>
                           <a:cs typeface="Calibri" pitchFamily="34" charset="-120"/>
                         </a:rPr>
-                        <a:t>Any CPU</a:t>
+                        <a:t>Negligible</a:t>
                       </a:r>
-                      <a:endParaRPr lang="en-US" sz="1250" dirty="0">
+                      <a:endParaRPr lang="en-US" sz="1500" dirty="0">
                         <a:latin typeface="Calibri" charset="0"/>
                         <a:ea typeface="Calibri" charset="0"/>
                         <a:cs typeface="Calibri" charset="0"/>
                       </a:endParaRPr>
                     </a:p>
                   </a:txBody>
-                  <a:tcPr marL="109728" marR="109728" marT="45720" marB="45720" anchor="ctr">
-                    <a:lnL w="9525" cap="flat" cmpd="sng" algn="ctr">
-                      <a:solidFill>
-                        <a:srgbClr val="D5D9DF"/>
-                      </a:solidFill>
-                      <a:prstDash val="solid"/>
-                      <a:round/>
-                      <a:headEnd type="none" w="med" len="med"/>
-                      <a:tailEnd type="none" w="med" len="med"/>
+                  <a:tcPr marL="0" marR="91440" marT="36576" marB="36576" anchor="ctr">
+                    <a:lnL w="0" cap="flat" cmpd="sng" algn="ctr">
+                      <a:noFill/>
                     </a:lnL>
-                    <a:lnR w="9525" cap="flat" cmpd="sng" algn="ctr">
-                      <a:solidFill>
-                        <a:srgbClr val="D5D9DF"/>
-                      </a:solidFill>
-                      <a:prstDash val="solid"/>
-                      <a:round/>
-                      <a:headEnd type="none" w="med" len="med"/>
-                      <a:tailEnd type="none" w="med" len="med"/>
+                    <a:lnR w="0" cap="flat" cmpd="sng" algn="ctr">
+                      <a:noFill/>
                     </a:lnR>
-                    <a:lnT w="9525" cap="flat" cmpd="sng" algn="ctr">
-                      <a:solidFill>
-                        <a:srgbClr val="D5D9DF"/>
-                      </a:solidFill>
-                      <a:prstDash val="solid"/>
-                      <a:round/>
-                      <a:headEnd type="none" w="med" len="med"/>
-                      <a:tailEnd type="none" w="med" len="med"/>
+                    <a:lnT w="0" cap="flat" cmpd="sng" algn="ctr">
+                      <a:noFill/>
                     </a:lnT>
                     <a:lnB w="9525" cap="flat" cmpd="sng" algn="ctr">
                       <a:solidFill>
-                        <a:srgbClr val="D5D9DF"/>
+                        <a:srgbClr val="C8CCD2"/>
                       </a:solidFill>
                       <a:prstDash val="solid"/>
                       <a:round/>
@@ -4946,9 +4121,152 @@
                         <a:buNone/>
                       </a:pPr>
                       <a:r>
-                        <a:rPr lang="en-US" sz="1250" dirty="0">
+                        <a:rPr lang="en-US" sz="1500" dirty="0">
                           <a:solidFill>
-                            <a:srgbClr val="14181F"/>
+                            <a:srgbClr val="000000"/>
+                          </a:solidFill>
+                          <a:latin typeface="Calibri" pitchFamily="34" charset="0"/>
+                          <a:ea typeface="Calibri" pitchFamily="34" charset="-122"/>
+                          <a:cs typeface="Calibri" pitchFamily="34" charset="-120"/>
+                        </a:rPr>
+                        <a:t>Very sensitive (deep circuits)</a:t>
+                      </a:r>
+                      <a:endParaRPr lang="en-US" sz="1500" dirty="0">
+                        <a:latin typeface="Calibri" charset="0"/>
+                        <a:ea typeface="Calibri" charset="0"/>
+                        <a:cs typeface="Calibri" charset="0"/>
+                      </a:endParaRPr>
+                    </a:p>
+                  </a:txBody>
+                  <a:tcPr marL="0" marR="91440" marT="36576" marB="36576" anchor="ctr">
+                    <a:lnL w="0" cap="flat" cmpd="sng" algn="ctr">
+                      <a:noFill/>
+                    </a:lnL>
+                    <a:lnR w="0" cap="flat" cmpd="sng" algn="ctr">
+                      <a:noFill/>
+                    </a:lnR>
+                    <a:lnT w="0" cap="flat" cmpd="sng" algn="ctr">
+                      <a:noFill/>
+                    </a:lnT>
+                    <a:lnB w="9525" cap="flat" cmpd="sng" algn="ctr">
+                      <a:solidFill>
+                        <a:srgbClr val="C8CCD2"/>
+                      </a:solidFill>
+                      <a:prstDash val="solid"/>
+                      <a:round/>
+                      <a:headEnd type="none" w="med" len="med"/>
+                      <a:tailEnd type="none" w="med" len="med"/>
+                    </a:lnB>
+                  </a:tcPr>
+                </a:tc>
+              </a:tr>
+              <a:tr h="402336">
+                <a:tc>
+                  <a:txBody>
+                    <a:bodyPr/>
+                    <a:lstStyle/>
+                    <a:p>
+                      <a:pPr indent="0" marL="0">
+                        <a:buNone/>
+                      </a:pPr>
+                      <a:r>
+                        <a:rPr lang="en-US" sz="1500" b="1" dirty="0">
+                          <a:solidFill>
+                            <a:srgbClr val="000000"/>
+                          </a:solidFill>
+                          <a:latin typeface="Calibri" pitchFamily="34" charset="0"/>
+                          <a:ea typeface="Calibri" pitchFamily="34" charset="-122"/>
+                          <a:cs typeface="Calibri" pitchFamily="34" charset="-120"/>
+                        </a:rPr>
+                        <a:t>Hardware</a:t>
+                      </a:r>
+                      <a:endParaRPr lang="en-US" sz="1500" dirty="0">
+                        <a:latin typeface="Calibri" charset="0"/>
+                        <a:ea typeface="Calibri" charset="0"/>
+                        <a:cs typeface="Calibri" charset="0"/>
+                      </a:endParaRPr>
+                    </a:p>
+                  </a:txBody>
+                  <a:tcPr marL="0" marR="91440" marT="36576" marB="36576" anchor="ctr">
+                    <a:lnL w="0" cap="flat" cmpd="sng" algn="ctr">
+                      <a:noFill/>
+                    </a:lnL>
+                    <a:lnR w="0" cap="flat" cmpd="sng" algn="ctr">
+                      <a:noFill/>
+                    </a:lnR>
+                    <a:lnT w="0" cap="flat" cmpd="sng" algn="ctr">
+                      <a:noFill/>
+                    </a:lnT>
+                    <a:lnB w="9525" cap="flat" cmpd="sng" algn="ctr">
+                      <a:solidFill>
+                        <a:srgbClr val="C8CCD2"/>
+                      </a:solidFill>
+                      <a:prstDash val="solid"/>
+                      <a:round/>
+                      <a:headEnd type="none" w="med" len="med"/>
+                      <a:tailEnd type="none" w="med" len="med"/>
+                    </a:lnB>
+                  </a:tcPr>
+                </a:tc>
+                <a:tc>
+                  <a:txBody>
+                    <a:bodyPr/>
+                    <a:lstStyle/>
+                    <a:p>
+                      <a:pPr indent="0" marL="0">
+                        <a:buNone/>
+                      </a:pPr>
+                      <a:r>
+                        <a:rPr lang="en-US" sz="1500" dirty="0">
+                          <a:solidFill>
+                            <a:srgbClr val="000000"/>
+                          </a:solidFill>
+                          <a:latin typeface="Calibri" pitchFamily="34" charset="0"/>
+                          <a:ea typeface="Calibri" pitchFamily="34" charset="-122"/>
+                          <a:cs typeface="Calibri" pitchFamily="34" charset="-120"/>
+                        </a:rPr>
+                        <a:t>Any CPU</a:t>
+                      </a:r>
+                      <a:endParaRPr lang="en-US" sz="1500" dirty="0">
+                        <a:latin typeface="Calibri" charset="0"/>
+                        <a:ea typeface="Calibri" charset="0"/>
+                        <a:cs typeface="Calibri" charset="0"/>
+                      </a:endParaRPr>
+                    </a:p>
+                  </a:txBody>
+                  <a:tcPr marL="0" marR="91440" marT="36576" marB="36576" anchor="ctr">
+                    <a:lnL w="0" cap="flat" cmpd="sng" algn="ctr">
+                      <a:noFill/>
+                    </a:lnL>
+                    <a:lnR w="0" cap="flat" cmpd="sng" algn="ctr">
+                      <a:noFill/>
+                    </a:lnR>
+                    <a:lnT w="0" cap="flat" cmpd="sng" algn="ctr">
+                      <a:noFill/>
+                    </a:lnT>
+                    <a:lnB w="9525" cap="flat" cmpd="sng" algn="ctr">
+                      <a:solidFill>
+                        <a:srgbClr val="C8CCD2"/>
+                      </a:solidFill>
+                      <a:prstDash val="solid"/>
+                      <a:round/>
+                      <a:headEnd type="none" w="med" len="med"/>
+                      <a:tailEnd type="none" w="med" len="med"/>
+                    </a:lnB>
+                  </a:tcPr>
+                </a:tc>
+                <a:tc>
+                  <a:txBody>
+                    <a:bodyPr/>
+                    <a:lstStyle/>
+                    <a:p>
+                      <a:pPr indent="0" marL="0">
+                        <a:buNone/>
+                      </a:pPr>
+                      <a:r>
+                        <a:rPr lang="en-US" sz="1500" dirty="0">
+                          <a:solidFill>
+                            <a:srgbClr val="000000"/>
                           </a:solidFill>
                           <a:latin typeface="Calibri" pitchFamily="34" charset="0"/>
                           <a:ea typeface="Calibri" pitchFamily="34" charset="-122"/>
@@ -4956,44 +4274,26 @@
                         </a:rPr>
                         <a:t>Fault-tolerant quantum computer</a:t>
                       </a:r>
-                      <a:endParaRPr lang="en-US" sz="1250" dirty="0">
+                      <a:endParaRPr lang="en-US" sz="1500" dirty="0">
                         <a:latin typeface="Calibri" charset="0"/>
                         <a:ea typeface="Calibri" charset="0"/>
                         <a:cs typeface="Calibri" charset="0"/>
                       </a:endParaRPr>
                     </a:p>
                   </a:txBody>
-                  <a:tcPr marL="109728" marR="109728" marT="45720" marB="45720" anchor="ctr">
-                    <a:lnL w="9525" cap="flat" cmpd="sng" algn="ctr">
-                      <a:solidFill>
-                        <a:srgbClr val="D5D9DF"/>
-                      </a:solidFill>
-                      <a:prstDash val="solid"/>
-                      <a:round/>
-                      <a:headEnd type="none" w="med" len="med"/>
-                      <a:tailEnd type="none" w="med" len="med"/>
+                  <a:tcPr marL="0" marR="91440" marT="36576" marB="36576" anchor="ctr">
+                    <a:lnL w="0" cap="flat" cmpd="sng" algn="ctr">
+                      <a:noFill/>
                     </a:lnL>
-                    <a:lnR w="9525" cap="flat" cmpd="sng" algn="ctr">
-                      <a:solidFill>
-                        <a:srgbClr val="D5D9DF"/>
-                      </a:solidFill>
-                      <a:prstDash val="solid"/>
-                      <a:round/>
-                      <a:headEnd type="none" w="med" len="med"/>
-                      <a:tailEnd type="none" w="med" len="med"/>
+                    <a:lnR w="0" cap="flat" cmpd="sng" algn="ctr">
+                      <a:noFill/>
                     </a:lnR>
-                    <a:lnT w="9525" cap="flat" cmpd="sng" algn="ctr">
-                      <a:solidFill>
-                        <a:srgbClr val="D5D9DF"/>
-                      </a:solidFill>
-                      <a:prstDash val="solid"/>
-                      <a:round/>
-                      <a:headEnd type="none" w="med" len="med"/>
-                      <a:tailEnd type="none" w="med" len="med"/>
+                    <a:lnT w="0" cap="flat" cmpd="sng" algn="ctr">
+                      <a:noFill/>
                     </a:lnT>
                     <a:lnB w="9525" cap="flat" cmpd="sng" algn="ctr">
                       <a:solidFill>
-                        <a:srgbClr val="D5D9DF"/>
+                        <a:srgbClr val="C8CCD2"/>
                       </a:solidFill>
                       <a:prstDash val="solid"/>
                       <a:round/>
@@ -5007,11 +4307,148 @@
           </a:graphicData>
         </a:graphic>
       </p:graphicFrame>
+      <p:sp>
+        <p:nvSpPr>
+          <p:cNvPr id="25" name="Slide Number Placeholder 0"/>
+          <p:cNvSpPr>
+            <a:spLocks noGrp="1"/>
+          </p:cNvSpPr>
+          <p:nvPr>
+            <p:ph type="sldNum" sz="quarter" idx="4294967295"/>
+          </p:nvPr>
+        </p:nvSpPr>
+        <p:spPr>
+          <a:xfrm>
+            <a:off x="8229600" y="4709160"/>
+            <a:ext cx="457200" cy="274320"/>
+          </a:xfrm>
+          <a:prstGeom prst="rect">
+            <a:avLst/>
+          </a:prstGeom>
+          <a:extLst>
+            <a:ext uri="{C572A759-6A51-4108-AA02-DFA0A04FC94B}">
+              <ma14:wrappingTextBoxFlag xmlns:ma14="http://schemas.microsoft.com/office/mac/drawingml/2011/main" val="0"/>
+            </a:ext>
+          </a:extLst>
+        </p:spPr>
+        <p:txBody>
+          <a:bodyPr/>
+          <a:lstStyle>
+            <a:lvl1pPr>
+              <a:defRPr sz="1000">
+                <a:solidFill>
+                  <a:srgbClr val="000000"/>
+                </a:solidFill>
+                <a:latin typeface="Calibri"/>
+                <a:ea typeface="Calibri"/>
+                <a:cs typeface="Calibri"/>
+              </a:defRPr>
+            </a:lvl1pPr>
+          </a:lstStyle>
+          <a:p>
+            <a:pPr algn="r"/>
+            <a:fld id="{F7021451-1387-4CA6-816F-3879F97B5CBC}" type="slidenum">
+              <a:rPr b="0" lang="en-US"/>
+              <a:t>10</a:t>
+            </a:fld>
+            <a:endParaRPr lang="en-US"/>
+          </a:p>
+        </p:txBody>
+      </p:sp>
     </p:spTree>
   </p:cSld>
   <p:clrMapOvr>
     <a:masterClrMapping/>
   </p:clrMapOvr>
+  <p:transition spd="med">
+    <p:fade/>
+  </p:transition>
+  <p:timing>
+    <p:tnLst>
+      <p:par>
+        <p:cTn id="1" dur="indefinite" restart="never" nodeType="tmRoot">
+          <p:childTnLst>
+            <p:seq concurrent="1" nextAc="seek">
+              <p:cTn id="2" dur="indefinite" nodeType="mainSeq">
+                <p:childTnLst>
+                  <p:par>
+                    <p:cTn id="3" fill="hold">
+                      <p:stCondLst>
+                        <p:cond delay="indefinite"/>
+                        <p:cond evt="onBegin" delay="0">
+                          <p:tn val="2"/>
+                        </p:cond>
+                      </p:stCondLst>
+                      <p:childTnLst>
+                        <p:par>
+                          <p:cTn id="4" fill="hold">
+                            <p:stCondLst>
+                              <p:cond delay="0"/>
+                            </p:stCondLst>
+                            <p:childTnLst>
+                              <p:par>
+                                <p:cTn id="5" presetID="10" presetClass="entr" presetSubtype="0" fill="hold" nodeType="afterEffect">
+                                  <p:stCondLst>
+                                    <p:cond delay="0"/>
+                                  </p:stCondLst>
+                                  <p:childTnLst>
+                                    <p:set>
+                                      <p:cBhvr>
+                                        <p:cTn id="6" dur="1" fill="hold">
+                                          <p:stCondLst>
+                                            <p:cond delay="0"/>
+                                          </p:stCondLst>
+                                        </p:cTn>
+                                        <p:tgtEl>
+                                          <p:spTgt spid="11"/>
+                                        </p:tgtEl>
+                                        <p:attrNameLst>
+                                          <p:attrName>style.visibility</p:attrName>
+                                        </p:attrNameLst>
+                                      </p:cBhvr>
+                                      <p:to>
+                                        <p:strVal val="visible"/>
+                                      </p:to>
+                                    </p:set>
+                                    <p:animEffect transition="in" filter="fade">
+                                      <p:cBhvr>
+                                        <p:cTn id="7" dur="500"/>
+                                        <p:tgtEl>
+                                          <p:spTgt spid="11"/>
+                                        </p:tgtEl>
+                                      </p:cBhvr>
+                                    </p:animEffect>
+                                  </p:childTnLst>
+                                </p:cTn>
+                              </p:par>
+                            </p:childTnLst>
+                          </p:cTn>
+                        </p:par>
+                      </p:childTnLst>
+                    </p:cTn>
+                  </p:par>
+                </p:childTnLst>
+              </p:cTn>
+              <p:prevCondLst>
+                <p:cond evt="onPrev" delay="0">
+                  <p:tgtEl>
+                    <p:sldTgt/>
+                  </p:tgtEl>
+                </p:cond>
+              </p:prevCondLst>
+              <p:nextCondLst>
+                <p:cond evt="onNext" delay="0">
+                  <p:tgtEl>
+                    <p:sldTgt/>
+                  </p:tgtEl>
+                </p:cond>
+              </p:nextCondLst>
+            </p:seq>
+          </p:childTnLst>
+        </p:cTn>
+      </p:par>
+    </p:tnLst>
+  </p:timing>
 </p:sld>
 </file>
 
@@ -5021,7 +4458,7 @@
     <p:bg>
       <p:bgPr>
         <a:solidFill>
-          <a:srgbClr val="0E2340"/>
+          <a:srgbClr val="FFFFFF"/>
         </a:solidFill>
       </p:bgPr>
     </p:bg>
@@ -5041,14 +4478,14 @@
       </p:grpSpPr>
       <p:sp>
         <p:nvSpPr>
-          <p:cNvPr id="2" name="Text 0"/>
-          <p:cNvSpPr txBox="1"/>
+          <p:cNvPr id="2" name="Title"/>
+          <p:cNvSpPr/>
           <p:nvPr/>
         </p:nvSpPr>
         <p:spPr>
           <a:xfrm>
-            <a:off x="548640" y="365760"/>
-            <a:ext cx="8046720" cy="731520"/>
+            <a:off x="548640" y="320040"/>
+            <a:ext cx="8046720" cy="640080"/>
           </a:xfrm>
           <a:prstGeom prst="rect">
             <a:avLst/>
@@ -5064,30 +4501,30 @@
               <a:buNone/>
             </a:pPr>
             <a:r>
-              <a:rPr lang="en-US" sz="3600" b="1" dirty="0">
+              <a:rPr lang="en-US" sz="3000" b="1" dirty="0">
                 <a:solidFill>
-                  <a:srgbClr val="FFFFFF"/>
+                  <a:srgbClr val="000000"/>
                 </a:solidFill>
-                <a:latin typeface="Cambria" pitchFamily="34" charset="0"/>
-                <a:ea typeface="Cambria" pitchFamily="34" charset="-122"/>
-                <a:cs typeface="Cambria" pitchFamily="34" charset="-120"/>
+                <a:latin typeface="Calibri" pitchFamily="34" charset="0"/>
+                <a:ea typeface="Calibri" pitchFamily="34" charset="-122"/>
+                <a:cs typeface="Calibri" pitchFamily="34" charset="-120"/>
               </a:rPr>
               <a:t>Conclusion</a:t>
             </a:r>
-            <a:endParaRPr lang="en-US" sz="3600" dirty="0"/>
+            <a:endParaRPr lang="en-US" sz="3000" dirty="0"/>
           </a:p>
         </p:txBody>
       </p:sp>
       <p:sp>
         <p:nvSpPr>
-          <p:cNvPr id="3" name="Text 1"/>
-          <p:cNvSpPr txBox="1"/>
+          <p:cNvPr id="3" name="anim1"/>
+          <p:cNvSpPr/>
           <p:nvPr/>
         </p:nvSpPr>
         <p:spPr>
           <a:xfrm>
             <a:off x="548640" y="1371600"/>
-            <a:ext cx="548640" cy="640080"/>
+            <a:ext cx="457200" cy="457200"/>
           </a:xfrm>
           <a:prstGeom prst="rect">
             <a:avLst/>
@@ -5103,69 +4540,30 @@
               <a:buNone/>
             </a:pPr>
             <a:r>
-              <a:rPr lang="en-US" sz="3400" b="1" dirty="0">
+              <a:rPr lang="en-US" sz="2400" b="1" dirty="0">
                 <a:solidFill>
-                  <a:srgbClr val="E5484D"/>
-                </a:solidFill>
-                <a:latin typeface="Cambria" pitchFamily="34" charset="0"/>
-                <a:ea typeface="Cambria" pitchFamily="34" charset="-122"/>
-                <a:cs typeface="Cambria" pitchFamily="34" charset="-120"/>
-              </a:rPr>
-              <a:t>1</a:t>
-            </a:r>
-            <a:endParaRPr lang="en-US" sz="3400" dirty="0"/>
-          </a:p>
-        </p:txBody>
-      </p:sp>
-      <p:sp>
-        <p:nvSpPr>
-          <p:cNvPr id="4" name="Text 2"/>
-          <p:cNvSpPr txBox="1"/>
-          <p:nvPr/>
-        </p:nvSpPr>
-        <p:spPr>
-          <a:xfrm>
-            <a:off x="1280160" y="1371600"/>
-            <a:ext cx="7315200" cy="365760"/>
-          </a:xfrm>
-          <a:prstGeom prst="rect">
-            <a:avLst/>
-          </a:prstGeom>
-          <a:noFill/>
-          <a:ln/>
-        </p:spPr>
-        <p:txBody>
-          <a:bodyPr wrap="square" lIns="0" tIns="0" rIns="0" bIns="0" rtlCol="0" anchor="ctr"/>
-          <a:lstStyle/>
-          <a:p>
-            <a:pPr indent="0" marL="0">
-              <a:buNone/>
-            </a:pPr>
-            <a:r>
-              <a:rPr lang="en-US" sz="1900" b="1" dirty="0">
-                <a:solidFill>
-                  <a:srgbClr val="FFFFFF"/>
+                  <a:srgbClr val="000000"/>
                 </a:solidFill>
                 <a:latin typeface="Calibri" pitchFamily="34" charset="0"/>
                 <a:ea typeface="Calibri" pitchFamily="34" charset="-122"/>
                 <a:cs typeface="Calibri" pitchFamily="34" charset="-120"/>
               </a:rPr>
-              <a:t>The implementation is correct</a:t>
+              <a:t>1</a:t>
             </a:r>
-            <a:endParaRPr lang="en-US" sz="1900" dirty="0"/>
+            <a:endParaRPr lang="en-US" sz="2400" dirty="0"/>
           </a:p>
         </p:txBody>
       </p:sp>
       <p:sp>
         <p:nvSpPr>
-          <p:cNvPr id="5" name="Text 3"/>
-          <p:cNvSpPr txBox="1"/>
+          <p:cNvPr id="4" name="anim1"/>
+          <p:cNvSpPr/>
           <p:nvPr/>
         </p:nvSpPr>
         <p:spPr>
           <a:xfrm>
-            <a:off x="1280160" y="1755648"/>
-            <a:ext cx="7315200" cy="457200"/>
+            <a:off x="1097280" y="1371600"/>
+            <a:ext cx="7498080" cy="822960"/>
           </a:xfrm>
           <a:prstGeom prst="rect">
             <a:avLst/>
@@ -5181,9 +4579,26 @@
               <a:buNone/>
             </a:pPr>
             <a:r>
-              <a:rPr lang="en-US" sz="1400" dirty="0">
+              <a:rPr lang="en-US" sz="2000" b="1" dirty="0">
                 <a:solidFill>
-                  <a:srgbClr val="CADCFC"/>
+                  <a:srgbClr val="000000"/>
+                </a:solidFill>
+                <a:latin typeface="Calibri" pitchFamily="34" charset="0"/>
+                <a:ea typeface="Calibri" pitchFamily="34" charset="-122"/>
+                <a:cs typeface="Calibri" pitchFamily="34" charset="-120"/>
+              </a:rPr>
+              <a:t>The implementation is correct</a:t>
+            </a:r>
+            <a:endParaRPr lang="en-US" sz="2000" dirty="0"/>
+          </a:p>
+          <a:p>
+            <a:pPr indent="0" marL="0">
+              <a:buNone/>
+            </a:pPr>
+            <a:r>
+              <a:rPr lang="en-US" sz="1600" dirty="0">
+                <a:solidFill>
+                  <a:srgbClr val="000000"/>
                 </a:solidFill>
                 <a:latin typeface="Calibri" pitchFamily="34" charset="0"/>
                 <a:ea typeface="Calibri" pitchFamily="34" charset="-122"/>
@@ -5191,20 +4606,20 @@
               </a:rPr>
               <a:t>A gate-level circuit that matches theory to 9 decimals at every iteration.</a:t>
             </a:r>
-            <a:endParaRPr lang="en-US" sz="1400" dirty="0"/>
+            <a:endParaRPr lang="en-US" sz="2000" dirty="0"/>
           </a:p>
         </p:txBody>
       </p:sp>
       <p:sp>
         <p:nvSpPr>
-          <p:cNvPr id="6" name="Text 4"/>
-          <p:cNvSpPr txBox="1"/>
+          <p:cNvPr id="5" name="anim2"/>
+          <p:cNvSpPr/>
           <p:nvPr/>
         </p:nvSpPr>
         <p:spPr>
           <a:xfrm>
-            <a:off x="548640" y="2377440"/>
-            <a:ext cx="548640" cy="640080"/>
+            <a:off x="548640" y="2423160"/>
+            <a:ext cx="457200" cy="457200"/>
           </a:xfrm>
           <a:prstGeom prst="rect">
             <a:avLst/>
@@ -5220,69 +4635,30 @@
               <a:buNone/>
             </a:pPr>
             <a:r>
-              <a:rPr lang="en-US" sz="3400" b="1" dirty="0">
+              <a:rPr lang="en-US" sz="2400" b="1" dirty="0">
                 <a:solidFill>
-                  <a:srgbClr val="E5484D"/>
-                </a:solidFill>
-                <a:latin typeface="Cambria" pitchFamily="34" charset="0"/>
-                <a:ea typeface="Cambria" pitchFamily="34" charset="-122"/>
-                <a:cs typeface="Cambria" pitchFamily="34" charset="-120"/>
-              </a:rPr>
-              <a:t>2</a:t>
-            </a:r>
-            <a:endParaRPr lang="en-US" sz="3400" dirty="0"/>
-          </a:p>
-        </p:txBody>
-      </p:sp>
-      <p:sp>
-        <p:nvSpPr>
-          <p:cNvPr id="7" name="Text 5"/>
-          <p:cNvSpPr txBox="1"/>
-          <p:nvPr/>
-        </p:nvSpPr>
-        <p:spPr>
-          <a:xfrm>
-            <a:off x="1280160" y="2377440"/>
-            <a:ext cx="7315200" cy="365760"/>
-          </a:xfrm>
-          <a:prstGeom prst="rect">
-            <a:avLst/>
-          </a:prstGeom>
-          <a:noFill/>
-          <a:ln/>
-        </p:spPr>
-        <p:txBody>
-          <a:bodyPr wrap="square" lIns="0" tIns="0" rIns="0" bIns="0" rtlCol="0" anchor="ctr"/>
-          <a:lstStyle/>
-          <a:p>
-            <a:pPr indent="0" marL="0">
-              <a:buNone/>
-            </a:pPr>
-            <a:r>
-              <a:rPr lang="en-US" sz="1900" b="1" dirty="0">
-                <a:solidFill>
-                  <a:srgbClr val="FFFFFF"/>
+                  <a:srgbClr val="000000"/>
                 </a:solidFill>
                 <a:latin typeface="Calibri" pitchFamily="34" charset="0"/>
                 <a:ea typeface="Calibri" pitchFamily="34" charset="-122"/>
                 <a:cs typeface="Calibri" pitchFamily="34" charset="-120"/>
               </a:rPr>
-              <a:t>The query advantage is real, quadratic and optimal</a:t>
+              <a:t>2</a:t>
             </a:r>
-            <a:endParaRPr lang="en-US" sz="1900" dirty="0"/>
+            <a:endParaRPr lang="en-US" sz="2400" dirty="0"/>
           </a:p>
         </p:txBody>
       </p:sp>
       <p:sp>
         <p:nvSpPr>
-          <p:cNvPr id="8" name="Text 6"/>
-          <p:cNvSpPr txBox="1"/>
+          <p:cNvPr id="6" name="anim2"/>
+          <p:cNvSpPr/>
           <p:nvPr/>
         </p:nvSpPr>
         <p:spPr>
           <a:xfrm>
-            <a:off x="1280160" y="2761488"/>
-            <a:ext cx="7315200" cy="457200"/>
+            <a:off x="1097280" y="2423160"/>
+            <a:ext cx="7498080" cy="822960"/>
           </a:xfrm>
           <a:prstGeom prst="rect">
             <a:avLst/>
@@ -5298,9 +4674,26 @@
               <a:buNone/>
             </a:pPr>
             <a:r>
-              <a:rPr lang="en-US" sz="1400" dirty="0">
+              <a:rPr lang="en-US" sz="2000" b="1" dirty="0">
                 <a:solidFill>
-                  <a:srgbClr val="CADCFC"/>
+                  <a:srgbClr val="000000"/>
+                </a:solidFill>
+                <a:latin typeface="Calibri" pitchFamily="34" charset="0"/>
+                <a:ea typeface="Calibri" pitchFamily="34" charset="-122"/>
+                <a:cs typeface="Calibri" pitchFamily="34" charset="-120"/>
+              </a:rPr>
+              <a:t>The query advantage is real, quadratic and optimal</a:t>
+            </a:r>
+            <a:endParaRPr lang="en-US" sz="2000" dirty="0"/>
+          </a:p>
+          <a:p>
+            <a:pPr indent="0" marL="0">
+              <a:buNone/>
+            </a:pPr>
+            <a:r>
+              <a:rPr lang="en-US" sz="1600" dirty="0">
+                <a:solidFill>
+                  <a:srgbClr val="000000"/>
                 </a:solidFill>
                 <a:latin typeface="Calibri" pitchFamily="34" charset="0"/>
                 <a:ea typeface="Calibri" pitchFamily="34" charset="-122"/>
@@ -5308,20 +4701,20 @@
               </a:rPr>
               <a:t>82× fewer queries at n = 14, growing as √N.</a:t>
             </a:r>
-            <a:endParaRPr lang="en-US" sz="1400" dirty="0"/>
+            <a:endParaRPr lang="en-US" sz="2000" dirty="0"/>
           </a:p>
         </p:txBody>
       </p:sp>
       <p:sp>
         <p:nvSpPr>
-          <p:cNvPr id="9" name="Text 7"/>
-          <p:cNvSpPr txBox="1"/>
+          <p:cNvPr id="7" name="anim3"/>
+          <p:cNvSpPr/>
           <p:nvPr/>
         </p:nvSpPr>
         <p:spPr>
           <a:xfrm>
-            <a:off x="548640" y="3383280"/>
-            <a:ext cx="548640" cy="640080"/>
+            <a:off x="548640" y="3474720"/>
+            <a:ext cx="457200" cy="457200"/>
           </a:xfrm>
           <a:prstGeom prst="rect">
             <a:avLst/>
@@ -5337,69 +4730,30 @@
               <a:buNone/>
             </a:pPr>
             <a:r>
-              <a:rPr lang="en-US" sz="3400" b="1" dirty="0">
+              <a:rPr lang="en-US" sz="2400" b="1" dirty="0">
                 <a:solidFill>
-                  <a:srgbClr val="E5484D"/>
-                </a:solidFill>
-                <a:latin typeface="Cambria" pitchFamily="34" charset="0"/>
-                <a:ea typeface="Cambria" pitchFamily="34" charset="-122"/>
-                <a:cs typeface="Cambria" pitchFamily="34" charset="-120"/>
-              </a:rPr>
-              <a:t>3</a:t>
-            </a:r>
-            <a:endParaRPr lang="en-US" sz="3400" dirty="0"/>
-          </a:p>
-        </p:txBody>
-      </p:sp>
-      <p:sp>
-        <p:nvSpPr>
-          <p:cNvPr id="10" name="Text 8"/>
-          <p:cNvSpPr txBox="1"/>
-          <p:nvPr/>
-        </p:nvSpPr>
-        <p:spPr>
-          <a:xfrm>
-            <a:off x="1280160" y="3383280"/>
-            <a:ext cx="7315200" cy="365760"/>
-          </a:xfrm>
-          <a:prstGeom prst="rect">
-            <a:avLst/>
-          </a:prstGeom>
-          <a:noFill/>
-          <a:ln/>
-        </p:spPr>
-        <p:txBody>
-          <a:bodyPr wrap="square" lIns="0" tIns="0" rIns="0" bIns="0" rtlCol="0" anchor="ctr"/>
-          <a:lstStyle/>
-          <a:p>
-            <a:pPr indent="0" marL="0">
-              <a:buNone/>
-            </a:pPr>
-            <a:r>
-              <a:rPr lang="en-US" sz="1900" b="1" dirty="0">
-                <a:solidFill>
-                  <a:srgbClr val="FFFFFF"/>
+                  <a:srgbClr val="000000"/>
                 </a:solidFill>
                 <a:latin typeface="Calibri" pitchFamily="34" charset="0"/>
                 <a:ea typeface="Calibri" pitchFamily="34" charset="-122"/>
                 <a:cs typeface="Calibri" pitchFamily="34" charset="-120"/>
               </a:rPr>
-              <a:t>It is not yet a practical advantage</a:t>
+              <a:t>3</a:t>
             </a:r>
-            <a:endParaRPr lang="en-US" sz="1900" dirty="0"/>
+            <a:endParaRPr lang="en-US" sz="2400" dirty="0"/>
           </a:p>
         </p:txBody>
       </p:sp>
       <p:sp>
         <p:nvSpPr>
-          <p:cNvPr id="11" name="Text 9"/>
-          <p:cNvSpPr txBox="1"/>
+          <p:cNvPr id="8" name="anim3"/>
+          <p:cNvSpPr/>
           <p:nvPr/>
         </p:nvSpPr>
         <p:spPr>
           <a:xfrm>
-            <a:off x="1280160" y="3767328"/>
-            <a:ext cx="7315200" cy="457200"/>
+            <a:off x="1097280" y="3474720"/>
+            <a:ext cx="7498080" cy="822960"/>
           </a:xfrm>
           <a:prstGeom prst="rect">
             <a:avLst/>
@@ -5415,56 +4769,82 @@
               <a:buNone/>
             </a:pPr>
             <a:r>
-              <a:rPr lang="en-US" sz="1400" dirty="0">
+              <a:rPr lang="en-US" sz="2000" b="1" dirty="0">
                 <a:solidFill>
-                  <a:srgbClr val="CADCFC"/>
+                  <a:srgbClr val="000000"/>
                 </a:solidFill>
                 <a:latin typeface="Calibri" pitchFamily="34" charset="0"/>
                 <a:ea typeface="Calibri" pitchFamily="34" charset="-122"/>
                 <a:cs typeface="Calibri" pitchFamily="34" charset="-120"/>
               </a:rPr>
-              <a:t>Circuit depth, noise and oracle cost dominate. It needs error-corrected hardware.</a:t>
+              <a:t>It is not yet a practical advantage</a:t>
             </a:r>
-            <a:endParaRPr lang="en-US" sz="1400" dirty="0"/>
-          </a:p>
-        </p:txBody>
-      </p:sp>
-      <p:sp>
-        <p:nvSpPr>
-          <p:cNvPr id="12" name="Text 10"/>
-          <p:cNvSpPr txBox="1"/>
-          <p:nvPr/>
-        </p:nvSpPr>
-        <p:spPr>
-          <a:xfrm>
-            <a:off x="548640" y="4526280"/>
-            <a:ext cx="4572000" cy="274320"/>
-          </a:xfrm>
-          <a:prstGeom prst="rect">
-            <a:avLst/>
-          </a:prstGeom>
-          <a:noFill/>
-          <a:ln/>
-        </p:spPr>
-        <p:txBody>
-          <a:bodyPr wrap="square" lIns="0" tIns="0" rIns="0" bIns="0" rtlCol="0" anchor="ctr"/>
-          <a:lstStyle/>
+            <a:endParaRPr lang="en-US" sz="2000" dirty="0"/>
+          </a:p>
           <a:p>
             <a:pPr indent="0" marL="0">
               <a:buNone/>
             </a:pPr>
             <a:r>
-              <a:rPr lang="en-US" sz="1300" dirty="0">
+              <a:rPr lang="en-US" sz="1600" dirty="0">
                 <a:solidFill>
-                  <a:srgbClr val="9FB3CC"/>
+                  <a:srgbClr val="000000"/>
                 </a:solidFill>
                 <a:latin typeface="Calibri" pitchFamily="34" charset="0"/>
                 <a:ea typeface="Calibri" pitchFamily="34" charset="-122"/>
                 <a:cs typeface="Calibri" pitchFamily="34" charset="-120"/>
               </a:rPr>
-              <a:t>Kavin-JS.github.io/GrovX</a:t>
+              <a:t>Circuit depth, noise and oracle cost dominate; it needs error-corrected hardware.</a:t>
             </a:r>
-            <a:endParaRPr lang="en-US" sz="1300" dirty="0"/>
+            <a:endParaRPr lang="en-US" sz="2000" dirty="0"/>
+          </a:p>
+        </p:txBody>
+      </p:sp>
+      <p:sp>
+        <p:nvSpPr>
+          <p:cNvPr id="25" name="Slide Number Placeholder 0"/>
+          <p:cNvSpPr>
+            <a:spLocks noGrp="1"/>
+          </p:cNvSpPr>
+          <p:nvPr>
+            <p:ph type="sldNum" sz="quarter" idx="4294967295"/>
+          </p:nvPr>
+        </p:nvSpPr>
+        <p:spPr>
+          <a:xfrm>
+            <a:off x="8229600" y="4709160"/>
+            <a:ext cx="457200" cy="274320"/>
+          </a:xfrm>
+          <a:prstGeom prst="rect">
+            <a:avLst/>
+          </a:prstGeom>
+          <a:extLst>
+            <a:ext uri="{C572A759-6A51-4108-AA02-DFA0A04FC94B}">
+              <ma14:wrappingTextBoxFlag xmlns:ma14="http://schemas.microsoft.com/office/mac/drawingml/2011/main" val="0"/>
+            </a:ext>
+          </a:extLst>
+        </p:spPr>
+        <p:txBody>
+          <a:bodyPr/>
+          <a:lstStyle>
+            <a:lvl1pPr>
+              <a:defRPr sz="1000">
+                <a:solidFill>
+                  <a:srgbClr val="000000"/>
+                </a:solidFill>
+                <a:latin typeface="Calibri"/>
+                <a:ea typeface="Calibri"/>
+                <a:cs typeface="Calibri"/>
+              </a:defRPr>
+            </a:lvl1pPr>
+          </a:lstStyle>
+          <a:p>
+            <a:pPr algn="r"/>
+            <a:fld id="{F7021451-1387-4CA6-816F-3879F97B5CBC}" type="slidenum">
+              <a:rPr b="0" lang="en-US"/>
+              <a:t>11</a:t>
+            </a:fld>
+            <a:endParaRPr lang="en-US"/>
           </a:p>
         </p:txBody>
       </p:sp>
@@ -5473,6 +4853,296 @@
   <p:clrMapOvr>
     <a:masterClrMapping/>
   </p:clrMapOvr>
+  <p:transition spd="med">
+    <p:fade/>
+  </p:transition>
+  <p:timing>
+    <p:tnLst>
+      <p:par>
+        <p:cTn id="1" dur="indefinite" restart="never" nodeType="tmRoot">
+          <p:childTnLst>
+            <p:seq concurrent="1" nextAc="seek">
+              <p:cTn id="2" dur="indefinite" nodeType="mainSeq">
+                <p:childTnLst>
+                  <p:par>
+                    <p:cTn id="3" fill="hold">
+                      <p:stCondLst>
+                        <p:cond delay="indefinite"/>
+                        <p:cond evt="onBegin" delay="0">
+                          <p:tn val="2"/>
+                        </p:cond>
+                      </p:stCondLst>
+                      <p:childTnLst>
+                        <p:par>
+                          <p:cTn id="4" fill="hold">
+                            <p:stCondLst>
+                              <p:cond delay="0"/>
+                            </p:stCondLst>
+                            <p:childTnLst>
+                              <p:par>
+                                <p:cTn id="5" presetID="10" presetClass="entr" presetSubtype="0" fill="hold" grpId="0" nodeType="afterEffect">
+                                  <p:stCondLst>
+                                    <p:cond delay="0"/>
+                                  </p:stCondLst>
+                                  <p:childTnLst>
+                                    <p:set>
+                                      <p:cBhvr>
+                                        <p:cTn id="6" dur="1" fill="hold">
+                                          <p:stCondLst>
+                                            <p:cond delay="0"/>
+                                          </p:stCondLst>
+                                        </p:cTn>
+                                        <p:tgtEl>
+                                          <p:spTgt spid="3"/>
+                                        </p:tgtEl>
+                                        <p:attrNameLst>
+                                          <p:attrName>style.visibility</p:attrName>
+                                        </p:attrNameLst>
+                                      </p:cBhvr>
+                                      <p:to>
+                                        <p:strVal val="visible"/>
+                                      </p:to>
+                                    </p:set>
+                                    <p:animEffect transition="in" filter="fade">
+                                      <p:cBhvr>
+                                        <p:cTn id="7" dur="500"/>
+                                        <p:tgtEl>
+                                          <p:spTgt spid="3"/>
+                                        </p:tgtEl>
+                                      </p:cBhvr>
+                                    </p:animEffect>
+                                  </p:childTnLst>
+                                </p:cTn>
+                              </p:par>
+                              <p:par>
+                                <p:cTn id="8" presetID="10" presetClass="entr" presetSubtype="0" fill="hold" grpId="0" nodeType="withEffect">
+                                  <p:stCondLst>
+                                    <p:cond delay="0"/>
+                                  </p:stCondLst>
+                                  <p:childTnLst>
+                                    <p:set>
+                                      <p:cBhvr>
+                                        <p:cTn id="9" dur="1" fill="hold">
+                                          <p:stCondLst>
+                                            <p:cond delay="0"/>
+                                          </p:stCondLst>
+                                        </p:cTn>
+                                        <p:tgtEl>
+                                          <p:spTgt spid="4"/>
+                                        </p:tgtEl>
+                                        <p:attrNameLst>
+                                          <p:attrName>style.visibility</p:attrName>
+                                        </p:attrNameLst>
+                                      </p:cBhvr>
+                                      <p:to>
+                                        <p:strVal val="visible"/>
+                                      </p:to>
+                                    </p:set>
+                                    <p:animEffect transition="in" filter="fade">
+                                      <p:cBhvr>
+                                        <p:cTn id="10" dur="500"/>
+                                        <p:tgtEl>
+                                          <p:spTgt spid="4"/>
+                                        </p:tgtEl>
+                                      </p:cBhvr>
+                                    </p:animEffect>
+                                  </p:childTnLst>
+                                </p:cTn>
+                              </p:par>
+                            </p:childTnLst>
+                          </p:cTn>
+                        </p:par>
+                        <p:par>
+                          <p:cTn id="11" fill="hold">
+                            <p:stCondLst>
+                              <p:cond delay="500"/>
+                            </p:stCondLst>
+                            <p:childTnLst>
+                              <p:par>
+                                <p:cTn id="12" presetID="10" presetClass="entr" presetSubtype="0" fill="hold" grpId="0" nodeType="afterEffect">
+                                  <p:stCondLst>
+                                    <p:cond delay="0"/>
+                                  </p:stCondLst>
+                                  <p:childTnLst>
+                                    <p:set>
+                                      <p:cBhvr>
+                                        <p:cTn id="13" dur="1" fill="hold">
+                                          <p:stCondLst>
+                                            <p:cond delay="0"/>
+                                          </p:stCondLst>
+                                        </p:cTn>
+                                        <p:tgtEl>
+                                          <p:spTgt spid="5"/>
+                                        </p:tgtEl>
+                                        <p:attrNameLst>
+                                          <p:attrName>style.visibility</p:attrName>
+                                        </p:attrNameLst>
+                                      </p:cBhvr>
+                                      <p:to>
+                                        <p:strVal val="visible"/>
+                                      </p:to>
+                                    </p:set>
+                                    <p:animEffect transition="in" filter="fade">
+                                      <p:cBhvr>
+                                        <p:cTn id="14" dur="500"/>
+                                        <p:tgtEl>
+                                          <p:spTgt spid="5"/>
+                                        </p:tgtEl>
+                                      </p:cBhvr>
+                                    </p:animEffect>
+                                  </p:childTnLst>
+                                </p:cTn>
+                              </p:par>
+                              <p:par>
+                                <p:cTn id="15" presetID="10" presetClass="entr" presetSubtype="0" fill="hold" grpId="0" nodeType="withEffect">
+                                  <p:stCondLst>
+                                    <p:cond delay="0"/>
+                                  </p:stCondLst>
+                                  <p:childTnLst>
+                                    <p:set>
+                                      <p:cBhvr>
+                                        <p:cTn id="16" dur="1" fill="hold">
+                                          <p:stCondLst>
+                                            <p:cond delay="0"/>
+                                          </p:stCondLst>
+                                        </p:cTn>
+                                        <p:tgtEl>
+                                          <p:spTgt spid="6"/>
+                                        </p:tgtEl>
+                                        <p:attrNameLst>
+                                          <p:attrName>style.visibility</p:attrName>
+                                        </p:attrNameLst>
+                                      </p:cBhvr>
+                                      <p:to>
+                                        <p:strVal val="visible"/>
+                                      </p:to>
+                                    </p:set>
+                                    <p:animEffect transition="in" filter="fade">
+                                      <p:cBhvr>
+                                        <p:cTn id="17" dur="500"/>
+                                        <p:tgtEl>
+                                          <p:spTgt spid="6"/>
+                                        </p:tgtEl>
+                                      </p:cBhvr>
+                                    </p:animEffect>
+                                  </p:childTnLst>
+                                </p:cTn>
+                              </p:par>
+                            </p:childTnLst>
+                          </p:cTn>
+                        </p:par>
+                        <p:par>
+                          <p:cTn id="18" fill="hold">
+                            <p:stCondLst>
+                              <p:cond delay="1000"/>
+                            </p:stCondLst>
+                            <p:childTnLst>
+                              <p:par>
+                                <p:cTn id="19" presetID="10" presetClass="entr" presetSubtype="0" fill="hold" grpId="0" nodeType="afterEffect">
+                                  <p:stCondLst>
+                                    <p:cond delay="0"/>
+                                  </p:stCondLst>
+                                  <p:childTnLst>
+                                    <p:set>
+                                      <p:cBhvr>
+                                        <p:cTn id="20" dur="1" fill="hold">
+                                          <p:stCondLst>
+                                            <p:cond delay="0"/>
+                                          </p:stCondLst>
+                                        </p:cTn>
+                                        <p:tgtEl>
+                                          <p:spTgt spid="7"/>
+                                        </p:tgtEl>
+                                        <p:attrNameLst>
+                                          <p:attrName>style.visibility</p:attrName>
+                                        </p:attrNameLst>
+                                      </p:cBhvr>
+                                      <p:to>
+                                        <p:strVal val="visible"/>
+                                      </p:to>
+                                    </p:set>
+                                    <p:animEffect transition="in" filter="fade">
+                                      <p:cBhvr>
+                                        <p:cTn id="21" dur="500"/>
+                                        <p:tgtEl>
+                                          <p:spTgt spid="7"/>
+                                        </p:tgtEl>
+                                      </p:cBhvr>
+                                    </p:animEffect>
+                                  </p:childTnLst>
+                                </p:cTn>
+                              </p:par>
+                              <p:par>
+                                <p:cTn id="22" presetID="10" presetClass="entr" presetSubtype="0" fill="hold" grpId="0" nodeType="withEffect">
+                                  <p:stCondLst>
+                                    <p:cond delay="0"/>
+                                  </p:stCondLst>
+                                  <p:childTnLst>
+                                    <p:set>
+                                      <p:cBhvr>
+                                        <p:cTn id="23" dur="1" fill="hold">
+                                          <p:stCondLst>
+                                            <p:cond delay="0"/>
+                                          </p:stCondLst>
+                                        </p:cTn>
+                                        <p:tgtEl>
+                                          <p:spTgt spid="8"/>
+                                        </p:tgtEl>
+                                        <p:attrNameLst>
+                                          <p:attrName>style.visibility</p:attrName>
+                                        </p:attrNameLst>
+                                      </p:cBhvr>
+                                      <p:to>
+                                        <p:strVal val="visible"/>
+                                      </p:to>
+                                    </p:set>
+                                    <p:animEffect transition="in" filter="fade">
+                                      <p:cBhvr>
+                                        <p:cTn id="24" dur="500"/>
+                                        <p:tgtEl>
+                                          <p:spTgt spid="8"/>
+                                        </p:tgtEl>
+                                      </p:cBhvr>
+                                    </p:animEffect>
+                                  </p:childTnLst>
+                                </p:cTn>
+                              </p:par>
+                            </p:childTnLst>
+                          </p:cTn>
+                        </p:par>
+                      </p:childTnLst>
+                    </p:cTn>
+                  </p:par>
+                </p:childTnLst>
+              </p:cTn>
+              <p:prevCondLst>
+                <p:cond evt="onPrev" delay="0">
+                  <p:tgtEl>
+                    <p:sldTgt/>
+                  </p:tgtEl>
+                </p:cond>
+              </p:prevCondLst>
+              <p:nextCondLst>
+                <p:cond evt="onNext" delay="0">
+                  <p:tgtEl>
+                    <p:sldTgt/>
+                  </p:tgtEl>
+                </p:cond>
+              </p:nextCondLst>
+            </p:seq>
+          </p:childTnLst>
+        </p:cTn>
+      </p:par>
+    </p:tnLst>
+    <p:bldLst>
+      <p:bldP spid="3" grpId="0"/>
+      <p:bldP spid="4" grpId="0"/>
+      <p:bldP spid="5" grpId="0"/>
+      <p:bldP spid="6" grpId="0"/>
+      <p:bldP spid="7" grpId="0"/>
+      <p:bldP spid="8" grpId="0"/>
+    </p:bldLst>
+  </p:timing>
 </p:sld>
 </file>
 
@@ -5502,14 +5172,14 @@
       </p:grpSpPr>
       <p:sp>
         <p:nvSpPr>
-          <p:cNvPr id="2" name="Text 0"/>
-          <p:cNvSpPr txBox="1"/>
+          <p:cNvPr id="2" name="Title"/>
+          <p:cNvSpPr/>
           <p:nvPr/>
         </p:nvSpPr>
         <p:spPr>
           <a:xfrm>
-            <a:off x="457200" y="274320"/>
-            <a:ext cx="8229600" cy="685800"/>
+            <a:off x="548640" y="320040"/>
+            <a:ext cx="8046720" cy="640080"/>
           </a:xfrm>
           <a:prstGeom prst="rect">
             <a:avLst/>
@@ -5527,11 +5197,11 @@
             <a:r>
               <a:rPr lang="en-US" sz="3000" b="1" dirty="0">
                 <a:solidFill>
-                  <a:srgbClr val="0E2340"/>
+                  <a:srgbClr val="000000"/>
                 </a:solidFill>
-                <a:latin typeface="Cambria" pitchFamily="34" charset="0"/>
-                <a:ea typeface="Cambria" pitchFamily="34" charset="-122"/>
-                <a:cs typeface="Cambria" pitchFamily="34" charset="-120"/>
+                <a:latin typeface="Calibri" pitchFamily="34" charset="0"/>
+                <a:ea typeface="Calibri" pitchFamily="34" charset="-122"/>
+                <a:cs typeface="Calibri" pitchFamily="34" charset="-120"/>
               </a:rPr>
               <a:t>The problem: one item among N</a:t>
             </a:r>
@@ -5541,14 +5211,14 @@
       </p:sp>
       <p:sp>
         <p:nvSpPr>
-          <p:cNvPr id="3" name="Text 1"/>
-          <p:cNvSpPr txBox="1"/>
+          <p:cNvPr id="3" name="anim1"/>
+          <p:cNvSpPr/>
           <p:nvPr/>
         </p:nvSpPr>
         <p:spPr>
           <a:xfrm>
-            <a:off x="457200" y="1188720"/>
-            <a:ext cx="4206240" cy="914400"/>
+            <a:off x="548640" y="1371600"/>
+            <a:ext cx="4297680" cy="2926080"/>
           </a:xfrm>
           <a:prstGeom prst="rect">
             <a:avLst/>
@@ -5560,59 +5230,116 @@
           <a:bodyPr wrap="square" lIns="0" tIns="0" rIns="0" bIns="0" rtlCol="0" anchor="t"/>
           <a:lstStyle/>
           <a:p>
-            <a:pPr indent="0" marL="0">
-              <a:buNone/>
+            <a:pPr marL="228600" indent="-228600">
+              <a:spcAft>
+                <a:spcPts val="1400"/>
+              </a:spcAft>
+              <a:buSzPct val="100000"/>
+              <a:buChar char="•"/>
             </a:pPr>
             <a:r>
-              <a:rPr lang="en-US" sz="1700" dirty="0">
+              <a:rPr lang="en-US" sz="2000" dirty="0">
                 <a:solidFill>
-                  <a:srgbClr val="14181F"/>
+                  <a:srgbClr val="000000"/>
                 </a:solidFill>
                 <a:latin typeface="Calibri" pitchFamily="34" charset="0"/>
                 <a:ea typeface="Calibri" pitchFamily="34" charset="-122"/>
                 <a:cs typeface="Calibri" pitchFamily="34" charset="-120"/>
               </a:rPr>
-              <a:t>You have N = 2ⁿ candidates and a yes/no check. Nothing else: no order, no structure to exploit.</a:t>
+              <a:t>Find one secret item among N = 2ⁿ candidates</a:t>
             </a:r>
-            <a:endParaRPr lang="en-US" sz="1700" dirty="0"/>
+            <a:endParaRPr lang="en-US" sz="2000" dirty="0"/>
+          </a:p>
+          <a:p>
+            <a:pPr marL="228600" indent="-228600">
+              <a:spcAft>
+                <a:spcPts val="1400"/>
+              </a:spcAft>
+              <a:buSzPct val="100000"/>
+              <a:buChar char="•"/>
+            </a:pPr>
+            <a:r>
+              <a:rPr lang="en-US" sz="2000" dirty="0">
+                <a:solidFill>
+                  <a:srgbClr val="000000"/>
+                </a:solidFill>
+                <a:latin typeface="Calibri" pitchFamily="34" charset="0"/>
+                <a:ea typeface="Calibri" pitchFamily="34" charset="-122"/>
+                <a:cs typeface="Calibri" pitchFamily="34" charset="-120"/>
+              </a:rPr>
+              <a:t>The only tool is a yes/no check: an unlock code, a database record, a cipher key</a:t>
+            </a:r>
+            <a:endParaRPr lang="en-US" sz="2000" dirty="0"/>
+          </a:p>
+          <a:p>
+            <a:pPr marL="228600" indent="-228600">
+              <a:buSzPct val="100000"/>
+              <a:buChar char="•"/>
+            </a:pPr>
+            <a:r>
+              <a:rPr lang="en-US" sz="2000" dirty="0">
+                <a:solidFill>
+                  <a:srgbClr val="000000"/>
+                </a:solidFill>
+                <a:latin typeface="Calibri" pitchFamily="34" charset="0"/>
+                <a:ea typeface="Calibri" pitchFamily="34" charset="-122"/>
+                <a:cs typeface="Calibri" pitchFamily="34" charset="-120"/>
+              </a:rPr>
+              <a:t>No order and no structure to exploit</a:t>
+            </a:r>
+            <a:endParaRPr lang="en-US" sz="2000" dirty="0"/>
           </a:p>
         </p:txBody>
       </p:sp>
       <p:sp>
         <p:nvSpPr>
-          <p:cNvPr id="4" name="Shape 2"/>
+          <p:cNvPr id="4" name="anim2"/>
           <p:cNvSpPr/>
           <p:nvPr/>
         </p:nvSpPr>
         <p:spPr>
           <a:xfrm>
-            <a:off x="457200" y="2286000"/>
-            <a:ext cx="4206240" cy="640080"/>
+            <a:off x="5303520" y="1371600"/>
+            <a:ext cx="3291840" cy="274320"/>
           </a:xfrm>
           <a:prstGeom prst="rect">
             <a:avLst/>
           </a:prstGeom>
-          <a:solidFill>
-            <a:srgbClr val="F4F5F7"/>
-          </a:solidFill>
-          <a:ln w="12700">
-            <a:solidFill>
-              <a:srgbClr val="F4F5F7"/>
-            </a:solidFill>
-            <a:prstDash val="solid"/>
-          </a:ln>
+          <a:noFill/>
+          <a:ln/>
         </p:spPr>
+        <p:txBody>
+          <a:bodyPr wrap="square" lIns="0" tIns="0" rIns="0" bIns="0" rtlCol="0" anchor="t"/>
+          <a:lstStyle/>
+          <a:p>
+            <a:pPr indent="0" marL="0">
+              <a:buNone/>
+            </a:pPr>
+            <a:r>
+              <a:rPr lang="en-US" sz="1400" dirty="0">
+                <a:solidFill>
+                  <a:srgbClr val="000000"/>
+                </a:solidFill>
+                <a:latin typeface="Calibri" pitchFamily="34" charset="0"/>
+                <a:ea typeface="Calibri" pitchFamily="34" charset="-122"/>
+                <a:cs typeface="Calibri" pitchFamily="34" charset="-120"/>
+              </a:rPr>
+              <a:t>Classical linear search</a:t>
+            </a:r>
+            <a:endParaRPr lang="en-US" sz="1400" dirty="0"/>
+          </a:p>
+        </p:txBody>
       </p:sp>
       <p:sp>
         <p:nvSpPr>
-          <p:cNvPr id="5" name="Text 3"/>
-          <p:cNvSpPr txBox="1"/>
+          <p:cNvPr id="5" name="anim2"/>
+          <p:cNvSpPr/>
           <p:nvPr/>
         </p:nvSpPr>
         <p:spPr>
           <a:xfrm>
-            <a:off x="640080" y="2340864"/>
-            <a:ext cx="3840480" cy="274320"/>
+            <a:off x="5303520" y="1691640"/>
+            <a:ext cx="3291840" cy="548640"/>
           </a:xfrm>
           <a:prstGeom prst="rect">
             <a:avLst/>
@@ -5628,30 +5355,69 @@
               <a:buNone/>
             </a:pPr>
             <a:r>
-              <a:rPr lang="en-US" sz="1500" b="1" dirty="0">
+              <a:rPr lang="en-US" sz="3200" b="1" dirty="0">
                 <a:solidFill>
-                  <a:srgbClr val="0E2340"/>
+                  <a:srgbClr val="000000"/>
                 </a:solidFill>
                 <a:latin typeface="Calibri" pitchFamily="34" charset="0"/>
                 <a:ea typeface="Calibri" pitchFamily="34" charset="-122"/>
                 <a:cs typeface="Calibri" pitchFamily="34" charset="-120"/>
               </a:rPr>
-              <a:t>Unlock code</a:t>
+              <a:t>≈ N / 2 checks</a:t>
             </a:r>
-            <a:endParaRPr lang="en-US" sz="1500" dirty="0"/>
+            <a:endParaRPr lang="en-US" sz="3200" dirty="0"/>
           </a:p>
         </p:txBody>
       </p:sp>
       <p:sp>
         <p:nvSpPr>
-          <p:cNvPr id="6" name="Text 4"/>
-          <p:cNvSpPr txBox="1"/>
+          <p:cNvPr id="6" name="anim3"/>
+          <p:cNvSpPr/>
           <p:nvPr/>
         </p:nvSpPr>
         <p:spPr>
           <a:xfrm>
-            <a:off x="640080" y="2615184"/>
-            <a:ext cx="3840480" cy="256032"/>
+            <a:off x="5303520" y="2743200"/>
+            <a:ext cx="3291840" cy="274320"/>
+          </a:xfrm>
+          <a:prstGeom prst="rect">
+            <a:avLst/>
+          </a:prstGeom>
+          <a:noFill/>
+          <a:ln/>
+        </p:spPr>
+        <p:txBody>
+          <a:bodyPr wrap="square" lIns="0" tIns="0" rIns="0" bIns="0" rtlCol="0" anchor="t"/>
+          <a:lstStyle/>
+          <a:p>
+            <a:pPr indent="0" marL="0">
+              <a:buNone/>
+            </a:pPr>
+            <a:r>
+              <a:rPr lang="en-US" sz="1400" dirty="0">
+                <a:solidFill>
+                  <a:srgbClr val="000000"/>
+                </a:solidFill>
+                <a:latin typeface="Calibri" pitchFamily="34" charset="0"/>
+                <a:ea typeface="Calibri" pitchFamily="34" charset="-122"/>
+                <a:cs typeface="Calibri" pitchFamily="34" charset="-120"/>
+              </a:rPr>
+              <a:t>Grover’s algorithm</a:t>
+            </a:r>
+            <a:endParaRPr lang="en-US" sz="1400" dirty="0"/>
+          </a:p>
+        </p:txBody>
+      </p:sp>
+      <p:sp>
+        <p:nvSpPr>
+          <p:cNvPr id="7" name="anim3"/>
+          <p:cNvSpPr/>
+          <p:nvPr/>
+        </p:nvSpPr>
+        <p:spPr>
+          <a:xfrm>
+            <a:off x="5303520" y="3063240"/>
+            <a:ext cx="3291840" cy="548640"/>
           </a:xfrm>
           <a:prstGeom prst="rect">
             <a:avLst/>
@@ -5667,300 +5433,30 @@
               <a:buNone/>
             </a:pPr>
             <a:r>
-              <a:rPr lang="en-US" sz="1200" dirty="0">
+              <a:rPr lang="en-US" sz="3200" b="1" dirty="0">
                 <a:solidFill>
-                  <a:srgbClr val="5B6472"/>
+                  <a:srgbClr val="000000"/>
                 </a:solidFill>
                 <a:latin typeface="Calibri" pitchFamily="34" charset="0"/>
                 <a:ea typeface="Calibri" pitchFamily="34" charset="-122"/>
                 <a:cs typeface="Calibri" pitchFamily="34" charset="-120"/>
               </a:rPr>
-              <a:t>the lock says open or denied</a:t>
+              <a:t>≈ 0.785·√N queries</a:t>
             </a:r>
-            <a:endParaRPr lang="en-US" sz="1200" dirty="0"/>
+            <a:endParaRPr lang="en-US" sz="3200" dirty="0"/>
           </a:p>
         </p:txBody>
       </p:sp>
       <p:sp>
         <p:nvSpPr>
-          <p:cNvPr id="7" name="Shape 5"/>
+          <p:cNvPr id="8" name="anim4"/>
           <p:cNvSpPr/>
           <p:nvPr/>
         </p:nvSpPr>
         <p:spPr>
           <a:xfrm>
-            <a:off x="457200" y="3063240"/>
-            <a:ext cx="4206240" cy="640080"/>
-          </a:xfrm>
-          <a:prstGeom prst="rect">
-            <a:avLst/>
-          </a:prstGeom>
-          <a:solidFill>
-            <a:srgbClr val="F4F5F7"/>
-          </a:solidFill>
-          <a:ln w="12700">
-            <a:solidFill>
-              <a:srgbClr val="F4F5F7"/>
-            </a:solidFill>
-            <a:prstDash val="solid"/>
-          </a:ln>
-        </p:spPr>
-      </p:sp>
-      <p:sp>
-        <p:nvSpPr>
-          <p:cNvPr id="8" name="Text 6"/>
-          <p:cNvSpPr txBox="1"/>
-          <p:nvPr/>
-        </p:nvSpPr>
-        <p:spPr>
-          <a:xfrm>
-            <a:off x="640080" y="3118104"/>
-            <a:ext cx="3840480" cy="274320"/>
-          </a:xfrm>
-          <a:prstGeom prst="rect">
-            <a:avLst/>
-          </a:prstGeom>
-          <a:noFill/>
-          <a:ln/>
-        </p:spPr>
-        <p:txBody>
-          <a:bodyPr wrap="square" lIns="0" tIns="0" rIns="0" bIns="0" rtlCol="0" anchor="ctr"/>
-          <a:lstStyle/>
-          <a:p>
-            <a:pPr indent="0" marL="0">
-              <a:buNone/>
-            </a:pPr>
-            <a:r>
-              <a:rPr lang="en-US" sz="1500" b="1" dirty="0">
-                <a:solidFill>
-                  <a:srgbClr val="0E2340"/>
-                </a:solidFill>
-                <a:latin typeface="Calibri" pitchFamily="34" charset="0"/>
-                <a:ea typeface="Calibri" pitchFamily="34" charset="-122"/>
-                <a:cs typeface="Calibri" pitchFamily="34" charset="-120"/>
-              </a:rPr>
-              <a:t>Database record</a:t>
-            </a:r>
-            <a:endParaRPr lang="en-US" sz="1500" dirty="0"/>
-          </a:p>
-        </p:txBody>
-      </p:sp>
-      <p:sp>
-        <p:nvSpPr>
-          <p:cNvPr id="9" name="Text 7"/>
-          <p:cNvSpPr txBox="1"/>
-          <p:nvPr/>
-        </p:nvSpPr>
-        <p:spPr>
-          <a:xfrm>
-            <a:off x="640080" y="3392424"/>
-            <a:ext cx="3840480" cy="256032"/>
-          </a:xfrm>
-          <a:prstGeom prst="rect">
-            <a:avLst/>
-          </a:prstGeom>
-          <a:noFill/>
-          <a:ln/>
-        </p:spPr>
-        <p:txBody>
-          <a:bodyPr wrap="square" lIns="0" tIns="0" rIns="0" bIns="0" rtlCol="0" anchor="ctr"/>
-          <a:lstStyle/>
-          <a:p>
-            <a:pPr indent="0" marL="0">
-              <a:buNone/>
-            </a:pPr>
-            <a:r>
-              <a:rPr lang="en-US" sz="1200" dirty="0">
-                <a:solidFill>
-                  <a:srgbClr val="5B6472"/>
-                </a:solidFill>
-                <a:latin typeface="Calibri" pitchFamily="34" charset="0"/>
-                <a:ea typeface="Calibri" pitchFamily="34" charset="-122"/>
-                <a:cs typeface="Calibri" pitchFamily="34" charset="-120"/>
-              </a:rPr>
-              <a:t>does record x match the query?</a:t>
-            </a:r>
-            <a:endParaRPr lang="en-US" sz="1200" dirty="0"/>
-          </a:p>
-        </p:txBody>
-      </p:sp>
-      <p:sp>
-        <p:nvSpPr>
-          <p:cNvPr id="10" name="Shape 8"/>
-          <p:cNvSpPr/>
-          <p:nvPr/>
-        </p:nvSpPr>
-        <p:spPr>
-          <a:xfrm>
-            <a:off x="457200" y="3840480"/>
-            <a:ext cx="4206240" cy="640080"/>
-          </a:xfrm>
-          <a:prstGeom prst="rect">
-            <a:avLst/>
-          </a:prstGeom>
-          <a:solidFill>
-            <a:srgbClr val="F4F5F7"/>
-          </a:solidFill>
-          <a:ln w="12700">
-            <a:solidFill>
-              <a:srgbClr val="F4F5F7"/>
-            </a:solidFill>
-            <a:prstDash val="solid"/>
-          </a:ln>
-        </p:spPr>
-      </p:sp>
-      <p:sp>
-        <p:nvSpPr>
-          <p:cNvPr id="11" name="Text 9"/>
-          <p:cNvSpPr txBox="1"/>
-          <p:nvPr/>
-        </p:nvSpPr>
-        <p:spPr>
-          <a:xfrm>
-            <a:off x="640080" y="3895344"/>
-            <a:ext cx="3840480" cy="274320"/>
-          </a:xfrm>
-          <a:prstGeom prst="rect">
-            <a:avLst/>
-          </a:prstGeom>
-          <a:noFill/>
-          <a:ln/>
-        </p:spPr>
-        <p:txBody>
-          <a:bodyPr wrap="square" lIns="0" tIns="0" rIns="0" bIns="0" rtlCol="0" anchor="ctr"/>
-          <a:lstStyle/>
-          <a:p>
-            <a:pPr indent="0" marL="0">
-              <a:buNone/>
-            </a:pPr>
-            <a:r>
-              <a:rPr lang="en-US" sz="1500" b="1" dirty="0">
-                <a:solidFill>
-                  <a:srgbClr val="0E2340"/>
-                </a:solidFill>
-                <a:latin typeface="Calibri" pitchFamily="34" charset="0"/>
-                <a:ea typeface="Calibri" pitchFamily="34" charset="-122"/>
-                <a:cs typeface="Calibri" pitchFamily="34" charset="-120"/>
-              </a:rPr>
-              <a:t>Cipher key</a:t>
-            </a:r>
-            <a:endParaRPr lang="en-US" sz="1500" dirty="0"/>
-          </a:p>
-        </p:txBody>
-      </p:sp>
-      <p:sp>
-        <p:nvSpPr>
-          <p:cNvPr id="12" name="Text 10"/>
-          <p:cNvSpPr txBox="1"/>
-          <p:nvPr/>
-        </p:nvSpPr>
-        <p:spPr>
-          <a:xfrm>
-            <a:off x="640080" y="4169664"/>
-            <a:ext cx="3840480" cy="256032"/>
-          </a:xfrm>
-          <a:prstGeom prst="rect">
-            <a:avLst/>
-          </a:prstGeom>
-          <a:noFill/>
-          <a:ln/>
-        </p:spPr>
-        <p:txBody>
-          <a:bodyPr wrap="square" lIns="0" tIns="0" rIns="0" bIns="0" rtlCol="0" anchor="ctr"/>
-          <a:lstStyle/>
-          <a:p>
-            <a:pPr indent="0" marL="0">
-              <a:buNone/>
-            </a:pPr>
-            <a:r>
-              <a:rPr lang="en-US" sz="1200" dirty="0">
-                <a:solidFill>
-                  <a:srgbClr val="5B6472"/>
-                </a:solidFill>
-                <a:latin typeface="Calibri" pitchFamily="34" charset="0"/>
-                <a:ea typeface="Calibri" pitchFamily="34" charset="-122"/>
-                <a:cs typeface="Calibri" pitchFamily="34" charset="-120"/>
-              </a:rPr>
-              <a:t>does this key decrypt correctly?</a:t>
-            </a:r>
-            <a:endParaRPr lang="en-US" sz="1200" dirty="0"/>
-          </a:p>
-        </p:txBody>
-      </p:sp>
-      <p:sp>
-        <p:nvSpPr>
-          <p:cNvPr id="13" name="Shape 11"/>
-          <p:cNvSpPr/>
-          <p:nvPr/>
-        </p:nvSpPr>
-        <p:spPr>
-          <a:xfrm>
-            <a:off x="5212080" y="1325880"/>
-            <a:ext cx="3474720" cy="1051560"/>
-          </a:xfrm>
-          <a:prstGeom prst="rect">
-            <a:avLst/>
-          </a:prstGeom>
-          <a:solidFill>
-            <a:srgbClr val="F4F5F7"/>
-          </a:solidFill>
-          <a:ln w="12700">
-            <a:solidFill>
-              <a:srgbClr val="F4F5F7"/>
-            </a:solidFill>
-            <a:prstDash val="solid"/>
-          </a:ln>
-        </p:spPr>
-      </p:sp>
-      <p:sp>
-        <p:nvSpPr>
-          <p:cNvPr id="14" name="Text 12"/>
-          <p:cNvSpPr txBox="1"/>
-          <p:nvPr/>
-        </p:nvSpPr>
-        <p:spPr>
-          <a:xfrm>
-            <a:off x="5394960" y="1399032"/>
-            <a:ext cx="3108960" cy="548640"/>
-          </a:xfrm>
-          <a:prstGeom prst="rect">
-            <a:avLst/>
-          </a:prstGeom>
-          <a:noFill/>
-          <a:ln/>
-        </p:spPr>
-        <p:txBody>
-          <a:bodyPr wrap="square" lIns="0" tIns="0" rIns="0" bIns="0" rtlCol="0" anchor="ctr"/>
-          <a:lstStyle/>
-          <a:p>
-            <a:pPr indent="0" marL="0">
-              <a:buNone/>
-            </a:pPr>
-            <a:r>
-              <a:rPr lang="en-US" sz="4000" b="1" dirty="0">
-                <a:solidFill>
-                  <a:srgbClr val="6B7280"/>
-                </a:solidFill>
-                <a:latin typeface="Cambria" pitchFamily="34" charset="0"/>
-                <a:ea typeface="Cambria" pitchFamily="34" charset="-122"/>
-                <a:cs typeface="Cambria" pitchFamily="34" charset="-120"/>
-              </a:rPr>
-              <a:t>≈ N / 2</a:t>
-            </a:r>
-            <a:endParaRPr lang="en-US" sz="4000" dirty="0"/>
-          </a:p>
-        </p:txBody>
-      </p:sp>
-      <p:sp>
-        <p:nvSpPr>
-          <p:cNvPr id="15" name="Text 13"/>
-          <p:cNvSpPr txBox="1"/>
-          <p:nvPr/>
-        </p:nvSpPr>
-        <p:spPr>
-          <a:xfrm>
-            <a:off x="5394960" y="1947672"/>
-            <a:ext cx="3108960" cy="384048"/>
+            <a:off x="5303520" y="3931920"/>
+            <a:ext cx="3291840" cy="548640"/>
           </a:xfrm>
           <a:prstGeom prst="rect">
             <a:avLst/>
@@ -5976,159 +5472,65 @@
               <a:buNone/>
             </a:pPr>
             <a:r>
-              <a:rPr lang="en-US" sz="1150" dirty="0">
+              <a:rPr lang="en-US" sz="1400" i="1" dirty="0">
                 <a:solidFill>
-                  <a:srgbClr val="5B6472"/>
+                  <a:srgbClr val="000000"/>
                 </a:solidFill>
                 <a:latin typeface="Calibri" pitchFamily="34" charset="0"/>
                 <a:ea typeface="Calibri" pitchFamily="34" charset="-122"/>
                 <a:cs typeface="Calibri" pitchFamily="34" charset="-120"/>
               </a:rPr>
-              <a:t>checks on average with classical linear search</a:t>
+              <a:t>A quadratic reduction, not an exponential one.</a:t>
             </a:r>
-            <a:endParaRPr lang="en-US" sz="1150" dirty="0"/>
+            <a:endParaRPr lang="en-US" sz="1400" dirty="0"/>
           </a:p>
         </p:txBody>
       </p:sp>
       <p:sp>
         <p:nvSpPr>
-          <p:cNvPr id="16" name="Shape 14"/>
-          <p:cNvSpPr/>
-          <p:nvPr/>
+          <p:cNvPr id="25" name="Slide Number Placeholder 0"/>
+          <p:cNvSpPr>
+            <a:spLocks noGrp="1"/>
+          </p:cNvSpPr>
+          <p:nvPr>
+            <p:ph type="sldNum" sz="quarter" idx="4294967295"/>
+          </p:nvPr>
         </p:nvSpPr>
         <p:spPr>
           <a:xfrm>
-            <a:off x="5212080" y="2697480"/>
-            <a:ext cx="3474720" cy="1051560"/>
+            <a:off x="8229600" y="4709160"/>
+            <a:ext cx="457200" cy="274320"/>
           </a:xfrm>
           <a:prstGeom prst="rect">
             <a:avLst/>
           </a:prstGeom>
-          <a:solidFill>
-            <a:srgbClr val="F4F5F7"/>
-          </a:solidFill>
-          <a:ln w="12700">
-            <a:solidFill>
-              <a:srgbClr val="F4F5F7"/>
-            </a:solidFill>
-            <a:prstDash val="solid"/>
-          </a:ln>
-        </p:spPr>
-      </p:sp>
-      <p:sp>
-        <p:nvSpPr>
-          <p:cNvPr id="17" name="Text 15"/>
-          <p:cNvSpPr txBox="1"/>
-          <p:nvPr/>
-        </p:nvSpPr>
-        <p:spPr>
-          <a:xfrm>
-            <a:off x="5394960" y="2770632"/>
-            <a:ext cx="3108960" cy="548640"/>
-          </a:xfrm>
-          <a:prstGeom prst="rect">
-            <a:avLst/>
-          </a:prstGeom>
-          <a:noFill/>
-          <a:ln/>
+          <a:extLst>
+            <a:ext uri="{C572A759-6A51-4108-AA02-DFA0A04FC94B}">
+              <ma14:wrappingTextBoxFlag xmlns:ma14="http://schemas.microsoft.com/office/mac/drawingml/2011/main" val="0"/>
+            </a:ext>
+          </a:extLst>
         </p:spPr>
         <p:txBody>
-          <a:bodyPr wrap="square" lIns="0" tIns="0" rIns="0" bIns="0" rtlCol="0" anchor="ctr"/>
-          <a:lstStyle/>
-          <a:p>
-            <a:pPr indent="0" marL="0">
-              <a:buNone/>
-            </a:pPr>
-            <a:r>
-              <a:rPr lang="en-US" sz="4000" b="1" dirty="0">
+          <a:bodyPr/>
+          <a:lstStyle>
+            <a:lvl1pPr>
+              <a:defRPr sz="1000">
                 <a:solidFill>
-                  <a:srgbClr val="1D3F6E"/>
+                  <a:srgbClr val="000000"/>
                 </a:solidFill>
-                <a:latin typeface="Cambria" pitchFamily="34" charset="0"/>
-                <a:ea typeface="Cambria" pitchFamily="34" charset="-122"/>
-                <a:cs typeface="Cambria" pitchFamily="34" charset="-120"/>
-              </a:rPr>
-              <a:t>≈ 0.785·√N</a:t>
-            </a:r>
-            <a:endParaRPr lang="en-US" sz="4000" dirty="0"/>
-          </a:p>
-        </p:txBody>
-      </p:sp>
-      <p:sp>
-        <p:nvSpPr>
-          <p:cNvPr id="18" name="Text 16"/>
-          <p:cNvSpPr txBox="1"/>
-          <p:nvPr/>
-        </p:nvSpPr>
-        <p:spPr>
-          <a:xfrm>
-            <a:off x="5394960" y="3319272"/>
-            <a:ext cx="3108960" cy="384048"/>
-          </a:xfrm>
-          <a:prstGeom prst="rect">
-            <a:avLst/>
-          </a:prstGeom>
-          <a:noFill/>
-          <a:ln/>
-        </p:spPr>
-        <p:txBody>
-          <a:bodyPr wrap="square" lIns="0" tIns="0" rIns="0" bIns="0" rtlCol="0" anchor="t"/>
-          <a:lstStyle/>
-          <a:p>
-            <a:pPr indent="0" marL="0">
-              <a:buNone/>
-            </a:pPr>
-            <a:r>
-              <a:rPr lang="en-US" sz="1150" dirty="0">
-                <a:solidFill>
-                  <a:srgbClr val="5B6472"/>
-                </a:solidFill>
-                <a:latin typeface="Calibri" pitchFamily="34" charset="0"/>
-                <a:ea typeface="Calibri" pitchFamily="34" charset="-122"/>
-                <a:cs typeface="Calibri" pitchFamily="34" charset="-120"/>
-              </a:rPr>
-              <a:t>oracle queries with Grover’s algorithm</a:t>
-            </a:r>
-            <a:endParaRPr lang="en-US" sz="1150" dirty="0"/>
-          </a:p>
-        </p:txBody>
-      </p:sp>
-      <p:sp>
-        <p:nvSpPr>
-          <p:cNvPr id="19" name="Text 17"/>
-          <p:cNvSpPr txBox="1"/>
-          <p:nvPr/>
-        </p:nvSpPr>
-        <p:spPr>
-          <a:xfrm>
-            <a:off x="5212080" y="3977640"/>
-            <a:ext cx="3474720" cy="365760"/>
-          </a:xfrm>
-          <a:prstGeom prst="rect">
-            <a:avLst/>
-          </a:prstGeom>
-          <a:noFill/>
-          <a:ln/>
-        </p:spPr>
-        <p:txBody>
-          <a:bodyPr wrap="square" lIns="0" tIns="0" rIns="0" bIns="0" rtlCol="0" anchor="ctr"/>
-          <a:lstStyle/>
-          <a:p>
-            <a:pPr indent="0" marL="0">
-              <a:buNone/>
-            </a:pPr>
-            <a:r>
-              <a:rPr lang="en-US" sz="1400" i="1" dirty="0">
-                <a:solidFill>
-                  <a:srgbClr val="B3261E"/>
-                </a:solidFill>
-                <a:latin typeface="Calibri" pitchFamily="34" charset="0"/>
-                <a:ea typeface="Calibri" pitchFamily="34" charset="-122"/>
-                <a:cs typeface="Calibri" pitchFamily="34" charset="-120"/>
-              </a:rPr>
-              <a:t>A quadratic reduction. Not exponential.</a:t>
-            </a:r>
-            <a:endParaRPr lang="en-US" sz="1400" dirty="0"/>
+                <a:latin typeface="Calibri"/>
+                <a:ea typeface="Calibri"/>
+                <a:cs typeface="Calibri"/>
+              </a:defRPr>
+            </a:lvl1pPr>
+          </a:lstStyle>
+          <a:p>
+            <a:pPr algn="r"/>
+            <a:fld id="{F7021451-1387-4CA6-816F-3879F97B5CBC}" type="slidenum">
+              <a:rPr b="0" lang="en-US"/>
+              <a:t>2</a:t>
+            </a:fld>
+            <a:endParaRPr lang="en-US"/>
           </a:p>
         </p:txBody>
       </p:sp>
@@ -6137,6 +5539,305 @@
   <p:clrMapOvr>
     <a:masterClrMapping/>
   </p:clrMapOvr>
+  <p:transition spd="med">
+    <p:fade/>
+  </p:transition>
+  <p:timing>
+    <p:tnLst>
+      <p:par>
+        <p:cTn id="1" dur="indefinite" restart="never" nodeType="tmRoot">
+          <p:childTnLst>
+            <p:seq concurrent="1" nextAc="seek">
+              <p:cTn id="2" dur="indefinite" nodeType="mainSeq">
+                <p:childTnLst>
+                  <p:par>
+                    <p:cTn id="3" fill="hold">
+                      <p:stCondLst>
+                        <p:cond delay="indefinite"/>
+                        <p:cond evt="onBegin" delay="0">
+                          <p:tn val="2"/>
+                        </p:cond>
+                      </p:stCondLst>
+                      <p:childTnLst>
+                        <p:par>
+                          <p:cTn id="4" fill="hold">
+                            <p:stCondLst>
+                              <p:cond delay="0"/>
+                            </p:stCondLst>
+                            <p:childTnLst>
+                              <p:par>
+                                <p:cTn id="5" presetID="10" presetClass="entr" presetSubtype="0" fill="hold" grpId="0" nodeType="afterEffect">
+                                  <p:stCondLst>
+                                    <p:cond delay="0"/>
+                                  </p:stCondLst>
+                                  <p:childTnLst>
+                                    <p:set>
+                                      <p:cBhvr>
+                                        <p:cTn id="6" dur="1" fill="hold">
+                                          <p:stCondLst>
+                                            <p:cond delay="0"/>
+                                          </p:stCondLst>
+                                        </p:cTn>
+                                        <p:tgtEl>
+                                          <p:spTgt spid="3"/>
+                                        </p:tgtEl>
+                                        <p:attrNameLst>
+                                          <p:attrName>style.visibility</p:attrName>
+                                        </p:attrNameLst>
+                                      </p:cBhvr>
+                                      <p:to>
+                                        <p:strVal val="visible"/>
+                                      </p:to>
+                                    </p:set>
+                                    <p:animEffect transition="in" filter="fade">
+                                      <p:cBhvr>
+                                        <p:cTn id="7" dur="500"/>
+                                        <p:tgtEl>
+                                          <p:spTgt spid="3"/>
+                                        </p:tgtEl>
+                                      </p:cBhvr>
+                                    </p:animEffect>
+                                  </p:childTnLst>
+                                </p:cTn>
+                              </p:par>
+                            </p:childTnLst>
+                          </p:cTn>
+                        </p:par>
+                        <p:par>
+                          <p:cTn id="8" fill="hold">
+                            <p:stCondLst>
+                              <p:cond delay="500"/>
+                            </p:stCondLst>
+                            <p:childTnLst>
+                              <p:par>
+                                <p:cTn id="9" presetID="10" presetClass="entr" presetSubtype="0" fill="hold" grpId="0" nodeType="afterEffect">
+                                  <p:stCondLst>
+                                    <p:cond delay="0"/>
+                                  </p:stCondLst>
+                                  <p:childTnLst>
+                                    <p:set>
+                                      <p:cBhvr>
+                                        <p:cTn id="10" dur="1" fill="hold">
+                                          <p:stCondLst>
+                                            <p:cond delay="0"/>
+                                          </p:stCondLst>
+                                        </p:cTn>
+                                        <p:tgtEl>
+                                          <p:spTgt spid="4"/>
+                                        </p:tgtEl>
+                                        <p:attrNameLst>
+                                          <p:attrName>style.visibility</p:attrName>
+                                        </p:attrNameLst>
+                                      </p:cBhvr>
+                                      <p:to>
+                                        <p:strVal val="visible"/>
+                                      </p:to>
+                                    </p:set>
+                                    <p:animEffect transition="in" filter="fade">
+                                      <p:cBhvr>
+                                        <p:cTn id="11" dur="500"/>
+                                        <p:tgtEl>
+                                          <p:spTgt spid="4"/>
+                                        </p:tgtEl>
+                                      </p:cBhvr>
+                                    </p:animEffect>
+                                  </p:childTnLst>
+                                </p:cTn>
+                              </p:par>
+                              <p:par>
+                                <p:cTn id="12" presetID="10" presetClass="entr" presetSubtype="0" fill="hold" grpId="0" nodeType="withEffect">
+                                  <p:stCondLst>
+                                    <p:cond delay="0"/>
+                                  </p:stCondLst>
+                                  <p:childTnLst>
+                                    <p:set>
+                                      <p:cBhvr>
+                                        <p:cTn id="13" dur="1" fill="hold">
+                                          <p:stCondLst>
+                                            <p:cond delay="0"/>
+                                          </p:stCondLst>
+                                        </p:cTn>
+                                        <p:tgtEl>
+                                          <p:spTgt spid="5"/>
+                                        </p:tgtEl>
+                                        <p:attrNameLst>
+                                          <p:attrName>style.visibility</p:attrName>
+                                        </p:attrNameLst>
+                                      </p:cBhvr>
+                                      <p:to>
+                                        <p:strVal val="visible"/>
+                                      </p:to>
+                                    </p:set>
+                                    <p:animEffect transition="in" filter="fade">
+                                      <p:cBhvr>
+                                        <p:cTn id="14" dur="500"/>
+                                        <p:tgtEl>
+                                          <p:spTgt spid="5"/>
+                                        </p:tgtEl>
+                                      </p:cBhvr>
+                                    </p:animEffect>
+                                  </p:childTnLst>
+                                </p:cTn>
+                              </p:par>
+                            </p:childTnLst>
+                          </p:cTn>
+                        </p:par>
+                        <p:par>
+                          <p:cTn id="15" fill="hold">
+                            <p:stCondLst>
+                              <p:cond delay="1000"/>
+                            </p:stCondLst>
+                            <p:childTnLst>
+                              <p:par>
+                                <p:cTn id="16" presetID="10" presetClass="entr" presetSubtype="0" fill="hold" grpId="0" nodeType="afterEffect">
+                                  <p:stCondLst>
+                                    <p:cond delay="0"/>
+                                  </p:stCondLst>
+                                  <p:childTnLst>
+                                    <p:set>
+                                      <p:cBhvr>
+                                        <p:cTn id="17" dur="1" fill="hold">
+                                          <p:stCondLst>
+                                            <p:cond delay="0"/>
+                                          </p:stCondLst>
+                                        </p:cTn>
+                                        <p:tgtEl>
+                                          <p:spTgt spid="6"/>
+                                        </p:tgtEl>
+                                        <p:attrNameLst>
+                                          <p:attrName>style.visibility</p:attrName>
+                                        </p:attrNameLst>
+                                      </p:cBhvr>
+                                      <p:to>
+                                        <p:strVal val="visible"/>
+                                      </p:to>
+                                    </p:set>
+                                    <p:animEffect transition="in" filter="fade">
+                                      <p:cBhvr>
+                                        <p:cTn id="18" dur="500"/>
+                                        <p:tgtEl>
+                                          <p:spTgt spid="6"/>
+                                        </p:tgtEl>
+                                      </p:cBhvr>
+                                    </p:animEffect>
+                                  </p:childTnLst>
+                                </p:cTn>
+                              </p:par>
+                              <p:par>
+                                <p:cTn id="19" presetID="10" presetClass="entr" presetSubtype="0" fill="hold" grpId="0" nodeType="withEffect">
+                                  <p:stCondLst>
+                                    <p:cond delay="0"/>
+                                  </p:stCondLst>
+                                  <p:childTnLst>
+                                    <p:set>
+                                      <p:cBhvr>
+                                        <p:cTn id="20" dur="1" fill="hold">
+                                          <p:stCondLst>
+                                            <p:cond delay="0"/>
+                                          </p:stCondLst>
+                                        </p:cTn>
+                                        <p:tgtEl>
+                                          <p:spTgt spid="7"/>
+                                        </p:tgtEl>
+                                        <p:attrNameLst>
+                                          <p:attrName>style.visibility</p:attrName>
+                                        </p:attrNameLst>
+                                      </p:cBhvr>
+                                      <p:to>
+                                        <p:strVal val="visible"/>
+                                      </p:to>
+                                    </p:set>
+                                    <p:animEffect transition="in" filter="fade">
+                                      <p:cBhvr>
+                                        <p:cTn id="21" dur="500"/>
+                                        <p:tgtEl>
+                                          <p:spTgt spid="7"/>
+                                        </p:tgtEl>
+                                      </p:cBhvr>
+                                    </p:animEffect>
+                                  </p:childTnLst>
+                                </p:cTn>
+                              </p:par>
+                            </p:childTnLst>
+                          </p:cTn>
+                        </p:par>
+                        <p:par>
+                          <p:cTn id="22" fill="hold">
+                            <p:stCondLst>
+                              <p:cond delay="1500"/>
+                            </p:stCondLst>
+                            <p:childTnLst>
+                              <p:par>
+                                <p:cTn id="23" presetID="10" presetClass="entr" presetSubtype="0" fill="hold" grpId="0" nodeType="afterEffect">
+                                  <p:stCondLst>
+                                    <p:cond delay="0"/>
+                                  </p:stCondLst>
+                                  <p:childTnLst>
+                                    <p:set>
+                                      <p:cBhvr>
+                                        <p:cTn id="24" dur="1" fill="hold">
+                                          <p:stCondLst>
+                                            <p:cond delay="0"/>
+                                          </p:stCondLst>
+                                        </p:cTn>
+                                        <p:tgtEl>
+                                          <p:spTgt spid="8"/>
+                                        </p:tgtEl>
+                                        <p:attrNameLst>
+                                          <p:attrName>style.visibility</p:attrName>
+                                        </p:attrNameLst>
+                                      </p:cBhvr>
+                                      <p:to>
+                                        <p:strVal val="visible"/>
+                                      </p:to>
+                                    </p:set>
+                                    <p:animEffect transition="in" filter="fade">
+                                      <p:cBhvr>
+                                        <p:cTn id="25" dur="500"/>
+                                        <p:tgtEl>
+                                          <p:spTgt spid="8"/>
+                                        </p:tgtEl>
+                                      </p:cBhvr>
+                                    </p:animEffect>
+                                  </p:childTnLst>
+                                </p:cTn>
+                              </p:par>
+                            </p:childTnLst>
+                          </p:cTn>
+                        </p:par>
+                      </p:childTnLst>
+                    </p:cTn>
+                  </p:par>
+                </p:childTnLst>
+              </p:cTn>
+              <p:prevCondLst>
+                <p:cond evt="onPrev" delay="0">
+                  <p:tgtEl>
+                    <p:sldTgt/>
+                  </p:tgtEl>
+                </p:cond>
+              </p:prevCondLst>
+              <p:nextCondLst>
+                <p:cond evt="onNext" delay="0">
+                  <p:tgtEl>
+                    <p:sldTgt/>
+                  </p:tgtEl>
+                </p:cond>
+              </p:nextCondLst>
+            </p:seq>
+          </p:childTnLst>
+        </p:cTn>
+      </p:par>
+    </p:tnLst>
+    <p:bldLst>
+      <p:bldP spid="3" grpId="0"/>
+      <p:bldP spid="4" grpId="0"/>
+      <p:bldP spid="5" grpId="0"/>
+      <p:bldP spid="6" grpId="0"/>
+      <p:bldP spid="7" grpId="0"/>
+      <p:bldP spid="8" grpId="0"/>
+    </p:bldLst>
+  </p:timing>
 </p:sld>
 </file>
 
@@ -6166,14 +5867,14 @@
       </p:grpSpPr>
       <p:sp>
         <p:nvSpPr>
-          <p:cNvPr id="2" name="Text 0"/>
-          <p:cNvSpPr txBox="1"/>
+          <p:cNvPr id="2" name="Title"/>
+          <p:cNvSpPr/>
           <p:nvPr/>
         </p:nvSpPr>
         <p:spPr>
           <a:xfrm>
-            <a:off x="457200" y="274320"/>
-            <a:ext cx="8229600" cy="685800"/>
+            <a:off x="548640" y="320040"/>
+            <a:ext cx="8046720" cy="640080"/>
           </a:xfrm>
           <a:prstGeom prst="rect">
             <a:avLst/>
@@ -6191,11 +5892,11 @@
             <a:r>
               <a:rPr lang="en-US" sz="3000" b="1" dirty="0">
                 <a:solidFill>
-                  <a:srgbClr val="0E2340"/>
+                  <a:srgbClr val="000000"/>
                 </a:solidFill>
-                <a:latin typeface="Cambria" pitchFamily="34" charset="0"/>
-                <a:ea typeface="Cambria" pitchFamily="34" charset="-122"/>
-                <a:cs typeface="Cambria" pitchFamily="34" charset="-120"/>
+                <a:latin typeface="Calibri" pitchFamily="34" charset="0"/>
+                <a:ea typeface="Calibri" pitchFamily="34" charset="-122"/>
+                <a:cs typeface="Calibri" pitchFamily="34" charset="-120"/>
               </a:rPr>
               <a:t>How Grover’s algorithm works</a:t>
             </a:r>
@@ -6205,14 +5906,14 @@
       </p:sp>
       <p:sp>
         <p:nvSpPr>
-          <p:cNvPr id="3" name="Text 1"/>
-          <p:cNvSpPr txBox="1"/>
+          <p:cNvPr id="3" name="anim1"/>
+          <p:cNvSpPr/>
           <p:nvPr/>
         </p:nvSpPr>
         <p:spPr>
           <a:xfrm>
-            <a:off x="457200" y="1234440"/>
-            <a:ext cx="548640" cy="457200"/>
+            <a:off x="548640" y="1371600"/>
+            <a:ext cx="4206240" cy="3108960"/>
           </a:xfrm>
           <a:prstGeom prst="rect">
             <a:avLst/>
@@ -6224,456 +5925,95 @@
           <a:bodyPr wrap="square" lIns="0" tIns="0" rIns="0" bIns="0" rtlCol="0" anchor="t"/>
           <a:lstStyle/>
           <a:p>
-            <a:pPr indent="0" marL="0">
-              <a:buNone/>
+            <a:pPr marL="342900" indent="-342900">
+              <a:spcAft>
+                <a:spcPts val="1200"/>
+              </a:spcAft>
+              <a:buSzPct val="100000"/>
+              <a:buFont typeface="+mj-lt"/>
+              <a:buAutoNum type="arabicPeriod" startAt="1"/>
             </a:pPr>
             <a:r>
-              <a:rPr lang="en-US" sz="2400" b="1" dirty="0">
+              <a:rPr lang="en-US" sz="1900" dirty="0">
                 <a:solidFill>
-                  <a:srgbClr val="B3261E"/>
-                </a:solidFill>
-                <a:latin typeface="Cambria" pitchFamily="34" charset="0"/>
-                <a:ea typeface="Cambria" pitchFamily="34" charset="-122"/>
-                <a:cs typeface="Cambria" pitchFamily="34" charset="-120"/>
-              </a:rPr>
-              <a:t>01</a:t>
-            </a:r>
-            <a:endParaRPr lang="en-US" sz="2400" dirty="0"/>
-          </a:p>
-        </p:txBody>
-      </p:sp>
-      <p:sp>
-        <p:nvSpPr>
-          <p:cNvPr id="4" name="Text 2"/>
-          <p:cNvSpPr txBox="1"/>
-          <p:nvPr/>
-        </p:nvSpPr>
-        <p:spPr>
-          <a:xfrm>
-            <a:off x="1097280" y="1234440"/>
-            <a:ext cx="3383280" cy="292608"/>
-          </a:xfrm>
-          <a:prstGeom prst="rect">
-            <a:avLst/>
-          </a:prstGeom>
-          <a:noFill/>
-          <a:ln/>
-        </p:spPr>
-        <p:txBody>
-          <a:bodyPr wrap="square" lIns="0" tIns="0" rIns="0" bIns="0" rtlCol="0" anchor="ctr"/>
-          <a:lstStyle/>
-          <a:p>
-            <a:pPr indent="0" marL="0">
-              <a:buNone/>
-            </a:pPr>
-            <a:r>
-              <a:rPr lang="en-US" sz="1600" b="1" dirty="0">
-                <a:solidFill>
-                  <a:srgbClr val="0E2340"/>
+                  <a:srgbClr val="000000"/>
                 </a:solidFill>
                 <a:latin typeface="Calibri" pitchFamily="34" charset="0"/>
                 <a:ea typeface="Calibri" pitchFamily="34" charset="-122"/>
                 <a:cs typeface="Calibri" pitchFamily="34" charset="-120"/>
               </a:rPr>
-              <a:t>Superpose</a:t>
+              <a:t>Put all N items in superposition with Hadamard gates</a:t>
             </a:r>
-            <a:endParaRPr lang="en-US" sz="1600" dirty="0"/>
-          </a:p>
-        </p:txBody>
-      </p:sp>
-      <p:sp>
-        <p:nvSpPr>
-          <p:cNvPr id="5" name="Text 3"/>
-          <p:cNvSpPr txBox="1"/>
-          <p:nvPr/>
-        </p:nvSpPr>
-        <p:spPr>
-          <a:xfrm>
-            <a:off x="1097280" y="1527048"/>
-            <a:ext cx="3383280" cy="457200"/>
-          </a:xfrm>
-          <a:prstGeom prst="rect">
-            <a:avLst/>
-          </a:prstGeom>
-          <a:noFill/>
-          <a:ln/>
-        </p:spPr>
-        <p:txBody>
-          <a:bodyPr wrap="square" lIns="0" tIns="0" rIns="0" bIns="0" rtlCol="0" anchor="t"/>
-          <a:lstStyle/>
-          <a:p>
-            <a:pPr indent="0" marL="0">
-              <a:buNone/>
+            <a:endParaRPr lang="en-US" sz="1900" dirty="0"/>
+          </a:p>
+          <a:p>
+            <a:pPr marL="342900" indent="-342900">
+              <a:spcAft>
+                <a:spcPts val="1200"/>
+              </a:spcAft>
+              <a:buSzPct val="100000"/>
+              <a:buFont typeface="+mj-lt"/>
+              <a:buAutoNum type="arabicPeriod" startAt="1"/>
             </a:pPr>
             <a:r>
-              <a:rPr lang="en-US" sz="1250" dirty="0">
+              <a:rPr lang="en-US" sz="1900" dirty="0">
                 <a:solidFill>
-                  <a:srgbClr val="5B6472"/>
+                  <a:srgbClr val="000000"/>
                 </a:solidFill>
                 <a:latin typeface="Calibri" pitchFamily="34" charset="0"/>
                 <a:ea typeface="Calibri" pitchFamily="34" charset="-122"/>
                 <a:cs typeface="Calibri" pitchFamily="34" charset="-120"/>
               </a:rPr>
-              <a:t>Hadamard on every qubit: all N items get equal amplitude.</a:t>
+              <a:t>Oracle: flip the sign of the secret item</a:t>
             </a:r>
-            <a:endParaRPr lang="en-US" sz="1250" dirty="0"/>
-          </a:p>
-        </p:txBody>
-      </p:sp>
-      <p:sp>
-        <p:nvSpPr>
-          <p:cNvPr id="6" name="Text 4"/>
-          <p:cNvSpPr txBox="1"/>
-          <p:nvPr/>
-        </p:nvSpPr>
-        <p:spPr>
-          <a:xfrm>
-            <a:off x="457200" y="2103120"/>
-            <a:ext cx="548640" cy="457200"/>
-          </a:xfrm>
-          <a:prstGeom prst="rect">
-            <a:avLst/>
-          </a:prstGeom>
-          <a:noFill/>
-          <a:ln/>
-        </p:spPr>
-        <p:txBody>
-          <a:bodyPr wrap="square" lIns="0" tIns="0" rIns="0" bIns="0" rtlCol="0" anchor="t"/>
-          <a:lstStyle/>
-          <a:p>
-            <a:pPr indent="0" marL="0">
-              <a:buNone/>
+            <a:endParaRPr lang="en-US" sz="1900" dirty="0"/>
+          </a:p>
+          <a:p>
+            <a:pPr marL="342900" indent="-342900">
+              <a:spcAft>
+                <a:spcPts val="1200"/>
+              </a:spcAft>
+              <a:buSzPct val="100000"/>
+              <a:buFont typeface="+mj-lt"/>
+              <a:buAutoNum type="arabicPeriod" startAt="1"/>
             </a:pPr>
             <a:r>
-              <a:rPr lang="en-US" sz="2400" b="1" dirty="0">
+              <a:rPr lang="en-US" sz="1900" dirty="0">
                 <a:solidFill>
-                  <a:srgbClr val="B3261E"/>
-                </a:solidFill>
-                <a:latin typeface="Cambria" pitchFamily="34" charset="0"/>
-                <a:ea typeface="Cambria" pitchFamily="34" charset="-122"/>
-                <a:cs typeface="Cambria" pitchFamily="34" charset="-120"/>
-              </a:rPr>
-              <a:t>02</a:t>
-            </a:r>
-            <a:endParaRPr lang="en-US" sz="2400" dirty="0"/>
-          </a:p>
-        </p:txBody>
-      </p:sp>
-      <p:sp>
-        <p:nvSpPr>
-          <p:cNvPr id="7" name="Text 5"/>
-          <p:cNvSpPr txBox="1"/>
-          <p:nvPr/>
-        </p:nvSpPr>
-        <p:spPr>
-          <a:xfrm>
-            <a:off x="1097280" y="2103120"/>
-            <a:ext cx="3383280" cy="292608"/>
-          </a:xfrm>
-          <a:prstGeom prst="rect">
-            <a:avLst/>
-          </a:prstGeom>
-          <a:noFill/>
-          <a:ln/>
-        </p:spPr>
-        <p:txBody>
-          <a:bodyPr wrap="square" lIns="0" tIns="0" rIns="0" bIns="0" rtlCol="0" anchor="ctr"/>
-          <a:lstStyle/>
-          <a:p>
-            <a:pPr indent="0" marL="0">
-              <a:buNone/>
-            </a:pPr>
-            <a:r>
-              <a:rPr lang="en-US" sz="1600" b="1" dirty="0">
-                <a:solidFill>
-                  <a:srgbClr val="0E2340"/>
+                  <a:srgbClr val="000000"/>
                 </a:solidFill>
                 <a:latin typeface="Calibri" pitchFamily="34" charset="0"/>
                 <a:ea typeface="Calibri" pitchFamily="34" charset="-122"/>
                 <a:cs typeface="Calibri" pitchFamily="34" charset="-120"/>
               </a:rPr>
-              <a:t>Oracle</a:t>
+              <a:t>Diffusion: reflect all amplitudes about their mean</a:t>
             </a:r>
-            <a:endParaRPr lang="en-US" sz="1600" dirty="0"/>
-          </a:p>
-        </p:txBody>
-      </p:sp>
-      <p:sp>
-        <p:nvSpPr>
-          <p:cNvPr id="8" name="Text 6"/>
-          <p:cNvSpPr txBox="1"/>
-          <p:nvPr/>
-        </p:nvSpPr>
-        <p:spPr>
-          <a:xfrm>
-            <a:off x="1097280" y="2395728"/>
-            <a:ext cx="3383280" cy="457200"/>
-          </a:xfrm>
-          <a:prstGeom prst="rect">
-            <a:avLst/>
-          </a:prstGeom>
-          <a:noFill/>
-          <a:ln/>
-        </p:spPr>
-        <p:txBody>
-          <a:bodyPr wrap="square" lIns="0" tIns="0" rIns="0" bIns="0" rtlCol="0" anchor="t"/>
-          <a:lstStyle/>
-          <a:p>
-            <a:pPr indent="0" marL="0">
-              <a:buNone/>
+            <a:endParaRPr lang="en-US" sz="1900" dirty="0"/>
+          </a:p>
+          <a:p>
+            <a:pPr marL="342900" indent="-342900">
+              <a:buSzPct val="100000"/>
+              <a:buFont typeface="+mj-lt"/>
+              <a:buAutoNum type="arabicPeriod" startAt="1"/>
             </a:pPr>
             <a:r>
-              <a:rPr lang="en-US" sz="1250" dirty="0">
+              <a:rPr lang="en-US" sz="1900" dirty="0">
                 <a:solidFill>
-                  <a:srgbClr val="5B6472"/>
+                  <a:srgbClr val="000000"/>
                 </a:solidFill>
                 <a:latin typeface="Calibri" pitchFamily="34" charset="0"/>
                 <a:ea typeface="Calibri" pitchFamily="34" charset="-122"/>
                 <a:cs typeface="Calibri" pitchFamily="34" charset="-120"/>
               </a:rPr>
-              <a:t>Flip the sign of the secret item’s amplitude.</a:t>
+              <a:t>Repeat about (π/4)√N times, then measure</a:t>
             </a:r>
-            <a:endParaRPr lang="en-US" sz="1250" dirty="0"/>
-          </a:p>
-        </p:txBody>
-      </p:sp>
-      <p:sp>
-        <p:nvSpPr>
-          <p:cNvPr id="9" name="Text 7"/>
-          <p:cNvSpPr txBox="1"/>
-          <p:nvPr/>
-        </p:nvSpPr>
-        <p:spPr>
-          <a:xfrm>
-            <a:off x="457200" y="2971800"/>
-            <a:ext cx="548640" cy="457200"/>
-          </a:xfrm>
-          <a:prstGeom prst="rect">
-            <a:avLst/>
-          </a:prstGeom>
-          <a:noFill/>
-          <a:ln/>
-        </p:spPr>
-        <p:txBody>
-          <a:bodyPr wrap="square" lIns="0" tIns="0" rIns="0" bIns="0" rtlCol="0" anchor="t"/>
-          <a:lstStyle/>
-          <a:p>
-            <a:pPr indent="0" marL="0">
-              <a:buNone/>
-            </a:pPr>
-            <a:r>
-              <a:rPr lang="en-US" sz="2400" b="1" dirty="0">
-                <a:solidFill>
-                  <a:srgbClr val="B3261E"/>
-                </a:solidFill>
-                <a:latin typeface="Cambria" pitchFamily="34" charset="0"/>
-                <a:ea typeface="Cambria" pitchFamily="34" charset="-122"/>
-                <a:cs typeface="Cambria" pitchFamily="34" charset="-120"/>
-              </a:rPr>
-              <a:t>03</a:t>
-            </a:r>
-            <a:endParaRPr lang="en-US" sz="2400" dirty="0"/>
-          </a:p>
-        </p:txBody>
-      </p:sp>
-      <p:sp>
-        <p:nvSpPr>
-          <p:cNvPr id="10" name="Text 8"/>
-          <p:cNvSpPr txBox="1"/>
-          <p:nvPr/>
-        </p:nvSpPr>
-        <p:spPr>
-          <a:xfrm>
-            <a:off x="1097280" y="2971800"/>
-            <a:ext cx="3383280" cy="292608"/>
-          </a:xfrm>
-          <a:prstGeom prst="rect">
-            <a:avLst/>
-          </a:prstGeom>
-          <a:noFill/>
-          <a:ln/>
-        </p:spPr>
-        <p:txBody>
-          <a:bodyPr wrap="square" lIns="0" tIns="0" rIns="0" bIns="0" rtlCol="0" anchor="ctr"/>
-          <a:lstStyle/>
-          <a:p>
-            <a:pPr indent="0" marL="0">
-              <a:buNone/>
-            </a:pPr>
-            <a:r>
-              <a:rPr lang="en-US" sz="1600" b="1" dirty="0">
-                <a:solidFill>
-                  <a:srgbClr val="0E2340"/>
-                </a:solidFill>
-                <a:latin typeface="Calibri" pitchFamily="34" charset="0"/>
-                <a:ea typeface="Calibri" pitchFamily="34" charset="-122"/>
-                <a:cs typeface="Calibri" pitchFamily="34" charset="-120"/>
-              </a:rPr>
-              <a:t>Diffuse</a:t>
-            </a:r>
-            <a:endParaRPr lang="en-US" sz="1600" dirty="0"/>
-          </a:p>
-        </p:txBody>
-      </p:sp>
-      <p:sp>
-        <p:nvSpPr>
-          <p:cNvPr id="11" name="Text 9"/>
-          <p:cNvSpPr txBox="1"/>
-          <p:nvPr/>
-        </p:nvSpPr>
-        <p:spPr>
-          <a:xfrm>
-            <a:off x="1097280" y="3264408"/>
-            <a:ext cx="3383280" cy="457200"/>
-          </a:xfrm>
-          <a:prstGeom prst="rect">
-            <a:avLst/>
-          </a:prstGeom>
-          <a:noFill/>
-          <a:ln/>
-        </p:spPr>
-        <p:txBody>
-          <a:bodyPr wrap="square" lIns="0" tIns="0" rIns="0" bIns="0" rtlCol="0" anchor="t"/>
-          <a:lstStyle/>
-          <a:p>
-            <a:pPr indent="0" marL="0">
-              <a:buNone/>
-            </a:pPr>
-            <a:r>
-              <a:rPr lang="en-US" sz="1250" dirty="0">
-                <a:solidFill>
-                  <a:srgbClr val="5B6472"/>
-                </a:solidFill>
-                <a:latin typeface="Calibri" pitchFamily="34" charset="0"/>
-                <a:ea typeface="Calibri" pitchFamily="34" charset="-122"/>
-                <a:cs typeface="Calibri" pitchFamily="34" charset="-120"/>
-              </a:rPr>
-              <a:t>Reflect all amplitudes about their mean: the secret grows, others shrink.</a:t>
-            </a:r>
-            <a:endParaRPr lang="en-US" sz="1250" dirty="0"/>
-          </a:p>
-        </p:txBody>
-      </p:sp>
-      <p:sp>
-        <p:nvSpPr>
-          <p:cNvPr id="12" name="Text 10"/>
-          <p:cNvSpPr txBox="1"/>
-          <p:nvPr/>
-        </p:nvSpPr>
-        <p:spPr>
-          <a:xfrm>
-            <a:off x="457200" y="3840480"/>
-            <a:ext cx="548640" cy="457200"/>
-          </a:xfrm>
-          <a:prstGeom prst="rect">
-            <a:avLst/>
-          </a:prstGeom>
-          <a:noFill/>
-          <a:ln/>
-        </p:spPr>
-        <p:txBody>
-          <a:bodyPr wrap="square" lIns="0" tIns="0" rIns="0" bIns="0" rtlCol="0" anchor="t"/>
-          <a:lstStyle/>
-          <a:p>
-            <a:pPr indent="0" marL="0">
-              <a:buNone/>
-            </a:pPr>
-            <a:r>
-              <a:rPr lang="en-US" sz="2400" b="1" dirty="0">
-                <a:solidFill>
-                  <a:srgbClr val="B3261E"/>
-                </a:solidFill>
-                <a:latin typeface="Cambria" pitchFamily="34" charset="0"/>
-                <a:ea typeface="Cambria" pitchFamily="34" charset="-122"/>
-                <a:cs typeface="Cambria" pitchFamily="34" charset="-120"/>
-              </a:rPr>
-              <a:t>04</a:t>
-            </a:r>
-            <a:endParaRPr lang="en-US" sz="2400" dirty="0"/>
-          </a:p>
-        </p:txBody>
-      </p:sp>
-      <p:sp>
-        <p:nvSpPr>
-          <p:cNvPr id="13" name="Text 11"/>
-          <p:cNvSpPr txBox="1"/>
-          <p:nvPr/>
-        </p:nvSpPr>
-        <p:spPr>
-          <a:xfrm>
-            <a:off x="1097280" y="3840480"/>
-            <a:ext cx="3383280" cy="292608"/>
-          </a:xfrm>
-          <a:prstGeom prst="rect">
-            <a:avLst/>
-          </a:prstGeom>
-          <a:noFill/>
-          <a:ln/>
-        </p:spPr>
-        <p:txBody>
-          <a:bodyPr wrap="square" lIns="0" tIns="0" rIns="0" bIns="0" rtlCol="0" anchor="ctr"/>
-          <a:lstStyle/>
-          <a:p>
-            <a:pPr indent="0" marL="0">
-              <a:buNone/>
-            </a:pPr>
-            <a:r>
-              <a:rPr lang="en-US" sz="1600" b="1" dirty="0">
-                <a:solidFill>
-                  <a:srgbClr val="0E2340"/>
-                </a:solidFill>
-                <a:latin typeface="Calibri" pitchFamily="34" charset="0"/>
-                <a:ea typeface="Calibri" pitchFamily="34" charset="-122"/>
-                <a:cs typeface="Calibri" pitchFamily="34" charset="-120"/>
-              </a:rPr>
-              <a:t>Repeat, then measure</a:t>
-            </a:r>
-            <a:endParaRPr lang="en-US" sz="1600" dirty="0"/>
-          </a:p>
-        </p:txBody>
-      </p:sp>
-      <p:sp>
-        <p:nvSpPr>
-          <p:cNvPr id="14" name="Text 12"/>
-          <p:cNvSpPr txBox="1"/>
-          <p:nvPr/>
-        </p:nvSpPr>
-        <p:spPr>
-          <a:xfrm>
-            <a:off x="1097280" y="4133088"/>
-            <a:ext cx="3383280" cy="457200"/>
-          </a:xfrm>
-          <a:prstGeom prst="rect">
-            <a:avLst/>
-          </a:prstGeom>
-          <a:noFill/>
-          <a:ln/>
-        </p:spPr>
-        <p:txBody>
-          <a:bodyPr wrap="square" lIns="0" tIns="0" rIns="0" bIns="0" rtlCol="0" anchor="t"/>
-          <a:lstStyle/>
-          <a:p>
-            <a:pPr indent="0" marL="0">
-              <a:buNone/>
-            </a:pPr>
-            <a:r>
-              <a:rPr lang="en-US" sz="1250" dirty="0">
-                <a:solidFill>
-                  <a:srgbClr val="5B6472"/>
-                </a:solidFill>
-                <a:latin typeface="Calibri" pitchFamily="34" charset="0"/>
-                <a:ea typeface="Calibri" pitchFamily="34" charset="-122"/>
-                <a:cs typeface="Calibri" pitchFamily="34" charset="-120"/>
-              </a:rPr>
-              <a:t>About (π/4)√N rounds, then read out all qubits.</a:t>
-            </a:r>
-            <a:endParaRPr lang="en-US" sz="1250" dirty="0"/>
+            <a:endParaRPr lang="en-US" sz="1900" dirty="0"/>
           </a:p>
         </p:txBody>
       </p:sp>
       <p:pic>
         <p:nvPicPr>
-          <p:cNvPr id="15" name="Image 0" descr="fig_rotation.png">    </p:cNvPr>
+          <p:cNvPr id="4" name="anim2" descr="fig_rotation.png">    </p:cNvPr>
           <p:cNvPicPr>
             <a:picLocks noChangeAspect="1"/>
           </p:cNvPicPr>
@@ -6687,8 +6027,8 @@
         </p:blipFill>
         <p:spPr>
           <a:xfrm>
-            <a:off x="4754880" y="1371600"/>
-            <a:ext cx="3931920" cy="2485535"/>
+            <a:off x="4937760" y="1325880"/>
+            <a:ext cx="3749040" cy="2369929"/>
           </a:xfrm>
           <a:prstGeom prst="rect">
             <a:avLst/>
@@ -6697,14 +6037,14 @@
       </p:pic>
       <p:sp>
         <p:nvSpPr>
-          <p:cNvPr id="16" name="Text 13"/>
-          <p:cNvSpPr txBox="1"/>
+          <p:cNvPr id="5" name="anim3"/>
+          <p:cNvSpPr/>
           <p:nvPr/>
         </p:nvSpPr>
         <p:spPr>
           <a:xfrm>
-            <a:off x="4754880" y="3994295"/>
-            <a:ext cx="3931920" cy="502920"/>
+            <a:off x="4937760" y="3805537"/>
+            <a:ext cx="3749040" cy="457200"/>
           </a:xfrm>
           <a:prstGeom prst="rect">
             <a:avLst/>
@@ -6722,15 +6062,63 @@
             <a:r>
               <a:rPr lang="en-US" sz="1200" dirty="0">
                 <a:solidFill>
-                  <a:srgbClr val="5B6472"/>
+                  <a:srgbClr val="000000"/>
                 </a:solidFill>
                 <a:latin typeface="Calibri" pitchFamily="34" charset="0"/>
                 <a:ea typeface="Calibri" pitchFamily="34" charset="-122"/>
                 <a:cs typeface="Calibri" pitchFamily="34" charset="-120"/>
               </a:rPr>
-              <a:t>Each iteration rotates the state by 2θ toward the secret. P = sin²((2k+1)θ).</a:t>
+              <a:t>Success probability after k iterations: P = sin²((2k+1)θ)</a:t>
             </a:r>
             <a:endParaRPr lang="en-US" sz="1200" dirty="0"/>
+          </a:p>
+        </p:txBody>
+      </p:sp>
+      <p:sp>
+        <p:nvSpPr>
+          <p:cNvPr id="25" name="Slide Number Placeholder 0"/>
+          <p:cNvSpPr>
+            <a:spLocks noGrp="1"/>
+          </p:cNvSpPr>
+          <p:nvPr>
+            <p:ph type="sldNum" sz="quarter" idx="4294967295"/>
+          </p:nvPr>
+        </p:nvSpPr>
+        <p:spPr>
+          <a:xfrm>
+            <a:off x="8229600" y="4709160"/>
+            <a:ext cx="457200" cy="274320"/>
+          </a:xfrm>
+          <a:prstGeom prst="rect">
+            <a:avLst/>
+          </a:prstGeom>
+          <a:extLst>
+            <a:ext uri="{C572A759-6A51-4108-AA02-DFA0A04FC94B}">
+              <ma14:wrappingTextBoxFlag xmlns:ma14="http://schemas.microsoft.com/office/mac/drawingml/2011/main" val="0"/>
+            </a:ext>
+          </a:extLst>
+        </p:spPr>
+        <p:txBody>
+          <a:bodyPr/>
+          <a:lstStyle>
+            <a:lvl1pPr>
+              <a:defRPr sz="1000">
+                <a:solidFill>
+                  <a:srgbClr val="000000"/>
+                </a:solidFill>
+                <a:latin typeface="Calibri"/>
+                <a:ea typeface="Calibri"/>
+                <a:cs typeface="Calibri"/>
+              </a:defRPr>
+            </a:lvl1pPr>
+          </a:lstStyle>
+          <a:p>
+            <a:pPr algn="r"/>
+            <a:fld id="{F7021451-1387-4CA6-816F-3879F97B5CBC}" type="slidenum">
+              <a:rPr b="0" lang="en-US"/>
+              <a:t>3</a:t>
+            </a:fld>
+            <a:endParaRPr lang="en-US"/>
           </a:p>
         </p:txBody>
       </p:sp>
@@ -6739,6 +6127,187 @@
   <p:clrMapOvr>
     <a:masterClrMapping/>
   </p:clrMapOvr>
+  <p:transition spd="med">
+    <p:fade/>
+  </p:transition>
+  <p:timing>
+    <p:tnLst>
+      <p:par>
+        <p:cTn id="1" dur="indefinite" restart="never" nodeType="tmRoot">
+          <p:childTnLst>
+            <p:seq concurrent="1" nextAc="seek">
+              <p:cTn id="2" dur="indefinite" nodeType="mainSeq">
+                <p:childTnLst>
+                  <p:par>
+                    <p:cTn id="3" fill="hold">
+                      <p:stCondLst>
+                        <p:cond delay="indefinite"/>
+                        <p:cond evt="onBegin" delay="0">
+                          <p:tn val="2"/>
+                        </p:cond>
+                      </p:stCondLst>
+                      <p:childTnLst>
+                        <p:par>
+                          <p:cTn id="4" fill="hold">
+                            <p:stCondLst>
+                              <p:cond delay="0"/>
+                            </p:stCondLst>
+                            <p:childTnLst>
+                              <p:par>
+                                <p:cTn id="5" presetID="10" presetClass="entr" presetSubtype="0" fill="hold" grpId="0" nodeType="afterEffect">
+                                  <p:stCondLst>
+                                    <p:cond delay="0"/>
+                                  </p:stCondLst>
+                                  <p:childTnLst>
+                                    <p:set>
+                                      <p:cBhvr>
+                                        <p:cTn id="6" dur="1" fill="hold">
+                                          <p:stCondLst>
+                                            <p:cond delay="0"/>
+                                          </p:stCondLst>
+                                        </p:cTn>
+                                        <p:tgtEl>
+                                          <p:spTgt spid="3"/>
+                                        </p:tgtEl>
+                                        <p:attrNameLst>
+                                          <p:attrName>style.visibility</p:attrName>
+                                        </p:attrNameLst>
+                                      </p:cBhvr>
+                                      <p:to>
+                                        <p:strVal val="visible"/>
+                                      </p:to>
+                                    </p:set>
+                                    <p:animEffect transition="in" filter="fade">
+                                      <p:cBhvr>
+                                        <p:cTn id="7" dur="500"/>
+                                        <p:tgtEl>
+                                          <p:spTgt spid="3"/>
+                                        </p:tgtEl>
+                                      </p:cBhvr>
+                                    </p:animEffect>
+                                  </p:childTnLst>
+                                </p:cTn>
+                              </p:par>
+                            </p:childTnLst>
+                          </p:cTn>
+                        </p:par>
+                        <p:par>
+                          <p:cTn id="8" fill="hold">
+                            <p:stCondLst>
+                              <p:cond delay="500"/>
+                            </p:stCondLst>
+                            <p:childTnLst>
+                              <p:par>
+                                <p:cTn id="9" presetID="10" presetClass="entr" presetSubtype="0" fill="hold" nodeType="afterEffect">
+                                  <p:stCondLst>
+                                    <p:cond delay="0"/>
+                                  </p:stCondLst>
+                                  <p:childTnLst>
+                                    <p:set>
+                                      <p:cBhvr>
+                                        <p:cTn id="10" dur="1" fill="hold">
+                                          <p:stCondLst>
+                                            <p:cond delay="0"/>
+                                          </p:stCondLst>
+                                        </p:cTn>
+                                        <p:tgtEl>
+                                          <p:spTgt spid="4"/>
+                                        </p:tgtEl>
+                                        <p:attrNameLst>
+                                          <p:attrName>style.visibility</p:attrName>
+                                        </p:attrNameLst>
+                                      </p:cBhvr>
+                                      <p:to>
+                                        <p:strVal val="visible"/>
+                                      </p:to>
+                                    </p:set>
+                                    <p:animEffect transition="in" filter="fade">
+                                      <p:cBhvr>
+                                        <p:cTn id="11" dur="500"/>
+                                        <p:tgtEl>
+                                          <p:spTgt spid="4"/>
+                                        </p:tgtEl>
+                                      </p:cBhvr>
+                                    </p:animEffect>
+                                  </p:childTnLst>
+                                </p:cTn>
+                              </p:par>
+                            </p:childTnLst>
+                          </p:cTn>
+                        </p:par>
+                        <p:par>
+                          <p:cTn id="12" fill="hold">
+                            <p:stCondLst>
+                              <p:cond delay="1000"/>
+                            </p:stCondLst>
+                            <p:childTnLst>
+                              <p:par>
+                                <p:cTn id="13" presetID="10" presetClass="entr" presetSubtype="0" fill="hold" grpId="0" nodeType="afterEffect">
+                                  <p:stCondLst>
+                                    <p:cond delay="0"/>
+                                  </p:stCondLst>
+                                  <p:childTnLst>
+                                    <p:set>
+                                      <p:cBhvr>
+                                        <p:cTn id="14" dur="1" fill="hold">
+                                          <p:stCondLst>
+                                            <p:cond delay="0"/>
+                                          </p:stCondLst>
+                                        </p:cTn>
+                                        <p:tgtEl>
+                                          <p:spTgt spid="5"/>
+                                        </p:tgtEl>
+                                        <p:attrNameLst>
+                                          <p:attrName>style.visibility</p:attrName>
+                                        </p:attrNameLst>
+                                      </p:cBhvr>
+                                      <p:to>
+                                        <p:strVal val="visible"/>
+                                      </p:to>
+                                    </p:set>
+                                    <p:animEffect transition="in" filter="fade">
+                                      <p:cBhvr>
+                                        <p:cTn id="15" dur="500"/>
+                                        <p:tgtEl>
+                                          <p:spTgt spid="5"/>
+                                        </p:tgtEl>
+                                      </p:cBhvr>
+                                    </p:animEffect>
+                                  </p:childTnLst>
+                                </p:cTn>
+                              </p:par>
+                            </p:childTnLst>
+                          </p:cTn>
+                        </p:par>
+                      </p:childTnLst>
+                    </p:cTn>
+                  </p:par>
+                </p:childTnLst>
+              </p:cTn>
+              <p:prevCondLst>
+                <p:cond evt="onPrev" delay="0">
+                  <p:tgtEl>
+                    <p:sldTgt/>
+                  </p:tgtEl>
+                </p:cond>
+              </p:prevCondLst>
+              <p:nextCondLst>
+                <p:cond evt="onNext" delay="0">
+                  <p:tgtEl>
+                    <p:sldTgt/>
+                  </p:tgtEl>
+                </p:cond>
+              </p:nextCondLst>
+            </p:seq>
+          </p:childTnLst>
+        </p:cTn>
+      </p:par>
+    </p:tnLst>
+    <p:bldLst>
+      <p:bldP spid="3" grpId="0"/>
+      <p:bldP spid="5" grpId="0"/>
+    </p:bldLst>
+  </p:timing>
 </p:sld>
 </file>
 
@@ -6768,14 +6337,14 @@
       </p:grpSpPr>
       <p:sp>
         <p:nvSpPr>
-          <p:cNvPr id="2" name="Text 0"/>
-          <p:cNvSpPr txBox="1"/>
+          <p:cNvPr id="2" name="Title"/>
+          <p:cNvSpPr/>
           <p:nvPr/>
         </p:nvSpPr>
         <p:spPr>
           <a:xfrm>
-            <a:off x="457200" y="274320"/>
-            <a:ext cx="8229600" cy="685800"/>
+            <a:off x="548640" y="320040"/>
+            <a:ext cx="8046720" cy="640080"/>
           </a:xfrm>
           <a:prstGeom prst="rect">
             <a:avLst/>
@@ -6793,11 +6362,11 @@
             <a:r>
               <a:rPr lang="en-US" sz="3000" b="1" dirty="0">
                 <a:solidFill>
-                  <a:srgbClr val="0E2340"/>
+                  <a:srgbClr val="000000"/>
                 </a:solidFill>
-                <a:latin typeface="Cambria" pitchFamily="34" charset="0"/>
-                <a:ea typeface="Cambria" pitchFamily="34" charset="-122"/>
-                <a:cs typeface="Cambria" pitchFamily="34" charset="-120"/>
+                <a:latin typeface="Calibri" pitchFamily="34" charset="0"/>
+                <a:ea typeface="Calibri" pitchFamily="34" charset="-122"/>
+                <a:cs typeface="Calibri" pitchFamily="34" charset="-120"/>
               </a:rPr>
               <a:t>The circuit I implemented</a:t>
             </a:r>
@@ -6807,7 +6376,7 @@
       </p:sp>
       <p:pic>
         <p:nvPicPr>
-          <p:cNvPr id="3" name="Image 0" descr="fig_circuit_gates.png">    </p:cNvPr>
+          <p:cNvPr id="3" name="anim1" descr="fig_circuit_gates.png">    </p:cNvPr>
           <p:cNvPicPr>
             <a:picLocks noChangeAspect="1"/>
           </p:cNvPicPr>
@@ -6821,8 +6390,8 @@
         </p:blipFill>
         <p:spPr>
           <a:xfrm>
-            <a:off x="640080" y="1143000"/>
-            <a:ext cx="7863840" cy="2484360"/>
+            <a:off x="548640" y="1188720"/>
+            <a:ext cx="8046720" cy="2542136"/>
           </a:xfrm>
           <a:prstGeom prst="rect">
             <a:avLst/>
@@ -6831,78 +6400,14 @@
       </p:pic>
       <p:sp>
         <p:nvSpPr>
-          <p:cNvPr id="4" name="Shape 1"/>
+          <p:cNvPr id="4" name="anim2"/>
           <p:cNvSpPr/>
           <p:nvPr/>
         </p:nvSpPr>
         <p:spPr>
           <a:xfrm>
-            <a:off x="457200" y="3855960"/>
-            <a:ext cx="2651760" cy="1188720"/>
-          </a:xfrm>
-          <a:prstGeom prst="rect">
-            <a:avLst/>
-          </a:prstGeom>
-          <a:solidFill>
-            <a:srgbClr val="F4F5F7"/>
-          </a:solidFill>
-          <a:ln w="12700">
-            <a:solidFill>
-              <a:srgbClr val="F4F5F7"/>
-            </a:solidFill>
-            <a:prstDash val="solid"/>
-          </a:ln>
-        </p:spPr>
-      </p:sp>
-      <p:sp>
-        <p:nvSpPr>
-          <p:cNvPr id="5" name="Text 2"/>
-          <p:cNvSpPr txBox="1"/>
-          <p:nvPr/>
-        </p:nvSpPr>
-        <p:spPr>
-          <a:xfrm>
-            <a:off x="594360" y="3947400"/>
-            <a:ext cx="2377440" cy="274320"/>
-          </a:xfrm>
-          <a:prstGeom prst="rect">
-            <a:avLst/>
-          </a:prstGeom>
-          <a:noFill/>
-          <a:ln/>
-        </p:spPr>
-        <p:txBody>
-          <a:bodyPr wrap="square" lIns="0" tIns="0" rIns="0" bIns="0" rtlCol="0" anchor="ctr"/>
-          <a:lstStyle/>
-          <a:p>
-            <a:pPr indent="0" marL="0">
-              <a:buNone/>
-            </a:pPr>
-            <a:r>
-              <a:rPr lang="en-US" sz="1350" b="1" dirty="0">
-                <a:solidFill>
-                  <a:srgbClr val="0E2340"/>
-                </a:solidFill>
-                <a:latin typeface="Calibri" pitchFamily="34" charset="0"/>
-                <a:ea typeface="Calibri" pitchFamily="34" charset="-122"/>
-                <a:cs typeface="Calibri" pitchFamily="34" charset="-120"/>
-              </a:rPr>
-              <a:t>Only three gates</a:t>
-            </a:r>
-            <a:endParaRPr lang="en-US" sz="1350" dirty="0"/>
-          </a:p>
-        </p:txBody>
-      </p:sp>
-      <p:sp>
-        <p:nvSpPr>
-          <p:cNvPr id="6" name="Text 3"/>
-          <p:cNvSpPr txBox="1"/>
-          <p:nvPr/>
-        </p:nvSpPr>
-        <p:spPr>
-          <a:xfrm>
-            <a:off x="594360" y="4240008"/>
-            <a:ext cx="2377440" cy="749808"/>
+            <a:off x="548640" y="4005176"/>
+            <a:ext cx="8046720" cy="914400"/>
           </a:xfrm>
           <a:prstGeom prst="rect">
             <a:avLst/>
@@ -6914,227 +6419,91 @@
           <a:bodyPr wrap="square" lIns="0" tIns="0" rIns="0" bIns="0" rtlCol="0" anchor="t"/>
           <a:lstStyle/>
           <a:p>
-            <a:pPr indent="0" marL="0">
-              <a:buNone/>
+            <a:pPr marL="228600" indent="-228600">
+              <a:spcAft>
+                <a:spcPts val="800"/>
+              </a:spcAft>
+              <a:buSzPct val="100000"/>
+              <a:buChar char="•"/>
             </a:pPr>
             <a:r>
-              <a:rPr lang="en-US" sz="1150" dirty="0">
+              <a:rPr lang="en-US" sz="1600" dirty="0">
                 <a:solidFill>
-                  <a:srgbClr val="5B6472"/>
+                  <a:srgbClr val="000000"/>
                 </a:solidFill>
                 <a:latin typeface="Calibri" pitchFamily="34" charset="0"/>
                 <a:ea typeface="Calibri" pitchFamily="34" charset="-122"/>
                 <a:cs typeface="Calibri" pitchFamily="34" charset="-120"/>
               </a:rPr>
-              <a:t>Hadamard, Pauli-X and multi-controlled Z. All real-valued, so the simulation is exact.</a:t>
+              <a:t>Only three gates: Hadamard, Pauli-X and multi-controlled Z, so the simulation is exact</a:t>
             </a:r>
-            <a:endParaRPr lang="en-US" sz="1150" dirty="0"/>
-          </a:p>
-        </p:txBody>
-      </p:sp>
-      <p:sp>
-        <p:nvSpPr>
-          <p:cNvPr id="7" name="Shape 4"/>
-          <p:cNvSpPr/>
-          <p:nvPr/>
-        </p:nvSpPr>
-        <p:spPr>
-          <a:xfrm>
-            <a:off x="3291840" y="3855960"/>
-            <a:ext cx="2651760" cy="1188720"/>
-          </a:xfrm>
-          <a:prstGeom prst="rect">
-            <a:avLst/>
-          </a:prstGeom>
-          <a:solidFill>
-            <a:srgbClr val="F4F5F7"/>
-          </a:solidFill>
-          <a:ln w="12700">
-            <a:solidFill>
-              <a:srgbClr val="F4F5F7"/>
-            </a:solidFill>
-            <a:prstDash val="solid"/>
-          </a:ln>
-        </p:spPr>
-      </p:sp>
-      <p:sp>
-        <p:nvSpPr>
-          <p:cNvPr id="8" name="Text 5"/>
-          <p:cNvSpPr txBox="1"/>
-          <p:nvPr/>
-        </p:nvSpPr>
-        <p:spPr>
-          <a:xfrm>
-            <a:off x="3429000" y="3947400"/>
-            <a:ext cx="2377440" cy="274320"/>
-          </a:xfrm>
-          <a:prstGeom prst="rect">
-            <a:avLst/>
-          </a:prstGeom>
-          <a:noFill/>
-          <a:ln/>
-        </p:spPr>
-        <p:txBody>
-          <a:bodyPr wrap="square" lIns="0" tIns="0" rIns="0" bIns="0" rtlCol="0" anchor="ctr"/>
-          <a:lstStyle/>
-          <a:p>
-            <a:pPr indent="0" marL="0">
-              <a:buNone/>
+            <a:endParaRPr lang="en-US" sz="1600" dirty="0"/>
+          </a:p>
+          <a:p>
+            <a:pPr marL="228600" indent="-228600">
+              <a:buSzPct val="100000"/>
+              <a:buChar char="•"/>
             </a:pPr>
             <a:r>
-              <a:rPr lang="en-US" sz="1350" b="1" dirty="0">
+              <a:rPr lang="en-US" sz="1600" dirty="0">
                 <a:solidFill>
-                  <a:srgbClr val="0E2340"/>
+                  <a:srgbClr val="000000"/>
                 </a:solidFill>
                 <a:latin typeface="Calibri" pitchFamily="34" charset="0"/>
                 <a:ea typeface="Calibri" pitchFamily="34" charset="-122"/>
                 <a:cs typeface="Calibri" pitchFamily="34" charset="-120"/>
               </a:rPr>
-              <a:t>Oracle = X, MCZ, X</a:t>
+              <a:t>At n = 14: 100 iterations, 2,814 H, 4,200 X and 200 multi-controlled Z gates</a:t>
             </a:r>
-            <a:endParaRPr lang="en-US" sz="1350" dirty="0"/>
+            <a:endParaRPr lang="en-US" sz="1600" dirty="0"/>
           </a:p>
         </p:txBody>
       </p:sp>
       <p:sp>
         <p:nvSpPr>
-          <p:cNvPr id="9" name="Text 6"/>
-          <p:cNvSpPr txBox="1"/>
-          <p:nvPr/>
+          <p:cNvPr id="25" name="Slide Number Placeholder 0"/>
+          <p:cNvSpPr>
+            <a:spLocks noGrp="1"/>
+          </p:cNvSpPr>
+          <p:nvPr>
+            <p:ph type="sldNum" sz="quarter" idx="4294967295"/>
+          </p:nvPr>
         </p:nvSpPr>
         <p:spPr>
           <a:xfrm>
-            <a:off x="3429000" y="4240008"/>
-            <a:ext cx="2377440" cy="749808"/>
+            <a:off x="8229600" y="4709160"/>
+            <a:ext cx="457200" cy="274320"/>
           </a:xfrm>
           <a:prstGeom prst="rect">
             <a:avLst/>
           </a:prstGeom>
-          <a:noFill/>
-          <a:ln/>
+          <a:extLst>
+            <a:ext uri="{C572A759-6A51-4108-AA02-DFA0A04FC94B}">
+              <ma14:wrappingTextBoxFlag xmlns:ma14="http://schemas.microsoft.com/office/mac/drawingml/2011/main" val="0"/>
+            </a:ext>
+          </a:extLst>
         </p:spPr>
         <p:txBody>
-          <a:bodyPr wrap="square" lIns="0" tIns="0" rIns="0" bIns="0" rtlCol="0" anchor="t"/>
-          <a:lstStyle/>
-          <a:p>
-            <a:pPr indent="0" marL="0">
-              <a:buNone/>
-            </a:pPr>
-            <a:r>
-              <a:rPr lang="en-US" sz="1150" dirty="0">
+          <a:bodyPr/>
+          <a:lstStyle>
+            <a:lvl1pPr>
+              <a:defRPr sz="1000">
                 <a:solidFill>
-                  <a:srgbClr val="5B6472"/>
+                  <a:srgbClr val="000000"/>
                 </a:solidFill>
-                <a:latin typeface="Calibri" pitchFamily="34" charset="0"/>
-                <a:ea typeface="Calibri" pitchFamily="34" charset="-122"/>
-                <a:cs typeface="Calibri" pitchFamily="34" charset="-120"/>
-              </a:rPr>
-              <a:t>X gates select which bit pattern is marked; the MCZ flips its sign.</a:t>
-            </a:r>
-            <a:endParaRPr lang="en-US" sz="1150" dirty="0"/>
-          </a:p>
-        </p:txBody>
-      </p:sp>
-      <p:sp>
-        <p:nvSpPr>
-          <p:cNvPr id="10" name="Shape 7"/>
-          <p:cNvSpPr/>
-          <p:nvPr/>
-        </p:nvSpPr>
-        <p:spPr>
-          <a:xfrm>
-            <a:off x="6126480" y="3855960"/>
-            <a:ext cx="2651760" cy="1188720"/>
-          </a:xfrm>
-          <a:prstGeom prst="rect">
-            <a:avLst/>
-          </a:prstGeom>
-          <a:solidFill>
-            <a:srgbClr val="F4F5F7"/>
-          </a:solidFill>
-          <a:ln w="12700">
-            <a:solidFill>
-              <a:srgbClr val="F4F5F7"/>
-            </a:solidFill>
-            <a:prstDash val="solid"/>
-          </a:ln>
-        </p:spPr>
-      </p:sp>
-      <p:sp>
-        <p:nvSpPr>
-          <p:cNvPr id="11" name="Text 8"/>
-          <p:cNvSpPr txBox="1"/>
-          <p:nvPr/>
-        </p:nvSpPr>
-        <p:spPr>
-          <a:xfrm>
-            <a:off x="6263640" y="3947400"/>
-            <a:ext cx="2377440" cy="274320"/>
-          </a:xfrm>
-          <a:prstGeom prst="rect">
-            <a:avLst/>
-          </a:prstGeom>
-          <a:noFill/>
-          <a:ln/>
-        </p:spPr>
-        <p:txBody>
-          <a:bodyPr wrap="square" lIns="0" tIns="0" rIns="0" bIns="0" rtlCol="0" anchor="ctr"/>
-          <a:lstStyle/>
-          <a:p>
-            <a:pPr indent="0" marL="0">
-              <a:buNone/>
-            </a:pPr>
-            <a:r>
-              <a:rPr lang="en-US" sz="1350" b="1" dirty="0">
-                <a:solidFill>
-                  <a:srgbClr val="0E2340"/>
-                </a:solidFill>
-                <a:latin typeface="Calibri" pitchFamily="34" charset="0"/>
-                <a:ea typeface="Calibri" pitchFamily="34" charset="-122"/>
-                <a:cs typeface="Calibri" pitchFamily="34" charset="-120"/>
-              </a:rPr>
-              <a:t>Diffusion = H, X, MCZ, X, H</a:t>
-            </a:r>
-            <a:endParaRPr lang="en-US" sz="1350" dirty="0"/>
-          </a:p>
-        </p:txBody>
-      </p:sp>
-      <p:sp>
-        <p:nvSpPr>
-          <p:cNvPr id="12" name="Text 9"/>
-          <p:cNvSpPr txBox="1"/>
-          <p:nvPr/>
-        </p:nvSpPr>
-        <p:spPr>
-          <a:xfrm>
-            <a:off x="6263640" y="4240008"/>
-            <a:ext cx="2377440" cy="749808"/>
-          </a:xfrm>
-          <a:prstGeom prst="rect">
-            <a:avLst/>
-          </a:prstGeom>
-          <a:noFill/>
-          <a:ln/>
-        </p:spPr>
-        <p:txBody>
-          <a:bodyPr wrap="square" lIns="0" tIns="0" rIns="0" bIns="0" rtlCol="0" anchor="t"/>
-          <a:lstStyle/>
-          <a:p>
-            <a:pPr indent="0" marL="0">
-              <a:buNone/>
-            </a:pPr>
-            <a:r>
-              <a:rPr lang="en-US" sz="1150" dirty="0">
-                <a:solidFill>
-                  <a:srgbClr val="5B6472"/>
-                </a:solidFill>
-                <a:latin typeface="Calibri" pitchFamily="34" charset="0"/>
-                <a:ea typeface="Calibri" pitchFamily="34" charset="-122"/>
-                <a:cs typeface="Calibri" pitchFamily="34" charset="-120"/>
-              </a:rPr>
-              <a:t>At n = 14: 100 iterations, 2,814 H, 4,200 X and 200 MCZ gates.</a:t>
-            </a:r>
-            <a:endParaRPr lang="en-US" sz="1150" dirty="0"/>
+                <a:latin typeface="Calibri"/>
+                <a:ea typeface="Calibri"/>
+                <a:cs typeface="Calibri"/>
+              </a:defRPr>
+            </a:lvl1pPr>
+          </a:lstStyle>
+          <a:p>
+            <a:pPr algn="r"/>
+            <a:fld id="{F7021451-1387-4CA6-816F-3879F97B5CBC}" type="slidenum">
+              <a:rPr b="0" lang="en-US"/>
+              <a:t>4</a:t>
+            </a:fld>
+            <a:endParaRPr lang="en-US"/>
           </a:p>
         </p:txBody>
       </p:sp>
@@ -7143,6 +6512,142 @@
   <p:clrMapOvr>
     <a:masterClrMapping/>
   </p:clrMapOvr>
+  <p:transition spd="med">
+    <p:fade/>
+  </p:transition>
+  <p:timing>
+    <p:tnLst>
+      <p:par>
+        <p:cTn id="1" dur="indefinite" restart="never" nodeType="tmRoot">
+          <p:childTnLst>
+            <p:seq concurrent="1" nextAc="seek">
+              <p:cTn id="2" dur="indefinite" nodeType="mainSeq">
+                <p:childTnLst>
+                  <p:par>
+                    <p:cTn id="3" fill="hold">
+                      <p:stCondLst>
+                        <p:cond delay="indefinite"/>
+                        <p:cond evt="onBegin" delay="0">
+                          <p:tn val="2"/>
+                        </p:cond>
+                      </p:stCondLst>
+                      <p:childTnLst>
+                        <p:par>
+                          <p:cTn id="4" fill="hold">
+                            <p:stCondLst>
+                              <p:cond delay="0"/>
+                            </p:stCondLst>
+                            <p:childTnLst>
+                              <p:par>
+                                <p:cTn id="5" presetID="10" presetClass="entr" presetSubtype="0" fill="hold" nodeType="afterEffect">
+                                  <p:stCondLst>
+                                    <p:cond delay="0"/>
+                                  </p:stCondLst>
+                                  <p:childTnLst>
+                                    <p:set>
+                                      <p:cBhvr>
+                                        <p:cTn id="6" dur="1" fill="hold">
+                                          <p:stCondLst>
+                                            <p:cond delay="0"/>
+                                          </p:stCondLst>
+                                        </p:cTn>
+                                        <p:tgtEl>
+                                          <p:spTgt spid="3"/>
+                                        </p:tgtEl>
+                                        <p:attrNameLst>
+                                          <p:attrName>style.visibility</p:attrName>
+                                        </p:attrNameLst>
+                                      </p:cBhvr>
+                                      <p:to>
+                                        <p:strVal val="visible"/>
+                                      </p:to>
+                                    </p:set>
+                                    <p:animEffect transition="in" filter="fade">
+                                      <p:cBhvr>
+                                        <p:cTn id="7" dur="500"/>
+                                        <p:tgtEl>
+                                          <p:spTgt spid="3"/>
+                                        </p:tgtEl>
+                                      </p:cBhvr>
+                                    </p:animEffect>
+                                  </p:childTnLst>
+                                </p:cTn>
+                              </p:par>
+                            </p:childTnLst>
+                          </p:cTn>
+                        </p:par>
+                        <p:par>
+                          <p:cTn id="8" fill="hold">
+                            <p:stCondLst>
+                              <p:cond delay="500"/>
+                            </p:stCondLst>
+                            <p:childTnLst>
+                              <p:par>
+                                <p:cTn id="9" presetID="10" presetClass="entr" presetSubtype="0" fill="hold" grpId="0" nodeType="afterEffect">
+                                  <p:stCondLst>
+                                    <p:cond delay="0"/>
+                                  </p:stCondLst>
+                                  <p:childTnLst>
+                                    <p:set>
+                                      <p:cBhvr>
+                                        <p:cTn id="10" dur="1" fill="hold">
+                                          <p:stCondLst>
+                                            <p:cond delay="0"/>
+                                          </p:stCondLst>
+                                        </p:cTn>
+                                        <p:tgtEl>
+                                          <p:spTgt spid="4"/>
+                                        </p:tgtEl>
+                                        <p:attrNameLst>
+                                          <p:attrName>style.visibility</p:attrName>
+                                        </p:attrNameLst>
+                                      </p:cBhvr>
+                                      <p:to>
+                                        <p:strVal val="visible"/>
+                                      </p:to>
+                                    </p:set>
+                                    <p:animEffect transition="in" filter="fade">
+                                      <p:cBhvr>
+                                        <p:cTn id="11" dur="500"/>
+                                        <p:tgtEl>
+                                          <p:spTgt spid="4"/>
+                                        </p:tgtEl>
+                                      </p:cBhvr>
+                                    </p:animEffect>
+                                  </p:childTnLst>
+                                </p:cTn>
+                              </p:par>
+                            </p:childTnLst>
+                          </p:cTn>
+                        </p:par>
+                      </p:childTnLst>
+                    </p:cTn>
+                  </p:par>
+                </p:childTnLst>
+              </p:cTn>
+              <p:prevCondLst>
+                <p:cond evt="onPrev" delay="0">
+                  <p:tgtEl>
+                    <p:sldTgt/>
+                  </p:tgtEl>
+                </p:cond>
+              </p:prevCondLst>
+              <p:nextCondLst>
+                <p:cond evt="onNext" delay="0">
+                  <p:tgtEl>
+                    <p:sldTgt/>
+                  </p:tgtEl>
+                </p:cond>
+              </p:nextCondLst>
+            </p:seq>
+          </p:childTnLst>
+        </p:cTn>
+      </p:par>
+    </p:tnLst>
+    <p:bldLst>
+      <p:bldP spid="4" grpId="0"/>
+    </p:bldLst>
+  </p:timing>
 </p:sld>
 </file>
 
@@ -7172,14 +6677,14 @@
       </p:grpSpPr>
       <p:sp>
         <p:nvSpPr>
-          <p:cNvPr id="2" name="Text 0"/>
-          <p:cNvSpPr txBox="1"/>
+          <p:cNvPr id="2" name="Title"/>
+          <p:cNvSpPr/>
           <p:nvPr/>
         </p:nvSpPr>
         <p:spPr>
           <a:xfrm>
-            <a:off x="457200" y="274320"/>
-            <a:ext cx="8229600" cy="685800"/>
+            <a:off x="548640" y="320040"/>
+            <a:ext cx="8046720" cy="640080"/>
           </a:xfrm>
           <a:prstGeom prst="rect">
             <a:avLst/>
@@ -7197,11 +6702,11 @@
             <a:r>
               <a:rPr lang="en-US" sz="3000" b="1" dirty="0">
                 <a:solidFill>
-                  <a:srgbClr val="0E2340"/>
+                  <a:srgbClr val="000000"/>
                 </a:solidFill>
-                <a:latin typeface="Cambria" pitchFamily="34" charset="0"/>
-                <a:ea typeface="Cambria" pitchFamily="34" charset="-122"/>
-                <a:cs typeface="Cambria" pitchFamily="34" charset="-120"/>
+                <a:latin typeface="Calibri" pitchFamily="34" charset="0"/>
+                <a:ea typeface="Calibri" pitchFamily="34" charset="-122"/>
+                <a:cs typeface="Calibri" pitchFamily="34" charset="-120"/>
               </a:rPr>
               <a:t>System and verification</a:t>
             </a:r>
@@ -7211,7 +6716,7 @@
       </p:sp>
       <p:pic>
         <p:nvPicPr>
-          <p:cNvPr id="3" name="Image 0" descr="fig_arch.png">    </p:cNvPr>
+          <p:cNvPr id="3" name="anim1" descr="fig_arch.png">    </p:cNvPr>
           <p:cNvPicPr>
             <a:picLocks noChangeAspect="1"/>
           </p:cNvPicPr>
@@ -7225,8 +6730,8 @@
         </p:blipFill>
         <p:spPr>
           <a:xfrm>
-            <a:off x="457200" y="1325880"/>
-            <a:ext cx="5394960" cy="2351360"/>
+            <a:off x="548640" y="1371600"/>
+            <a:ext cx="5212080" cy="2271653"/>
           </a:xfrm>
           <a:prstGeom prst="rect">
             <a:avLst/>
@@ -7235,14 +6740,14 @@
       </p:pic>
       <p:sp>
         <p:nvSpPr>
-          <p:cNvPr id="4" name="Text 1"/>
-          <p:cNvSpPr txBox="1"/>
+          <p:cNvPr id="4" name="anim2"/>
+          <p:cNvSpPr/>
           <p:nvPr/>
         </p:nvSpPr>
         <p:spPr>
           <a:xfrm>
-            <a:off x="457200" y="3860120"/>
-            <a:ext cx="5394960" cy="640080"/>
+            <a:off x="6035040" y="1371600"/>
+            <a:ext cx="2651760" cy="2926080"/>
           </a:xfrm>
           <a:prstGeom prst="rect">
             <a:avLst/>
@@ -7254,227 +6759,133 @@
           <a:bodyPr wrap="square" lIns="0" tIns="0" rIns="0" bIns="0" rtlCol="0" anchor="t"/>
           <a:lstStyle/>
           <a:p>
-            <a:pPr indent="0" marL="0">
-              <a:buNone/>
+            <a:pPr marL="228600" indent="-228600">
+              <a:spcAft>
+                <a:spcPts val="1000"/>
+              </a:spcAft>
+              <a:buSzPct val="100000"/>
+              <a:buChar char="•"/>
             </a:pPr>
             <a:r>
-              <a:rPr lang="en-US" sz="1250" dirty="0">
+              <a:rPr lang="en-US" sz="1600" dirty="0">
                 <a:solidFill>
-                  <a:srgbClr val="5B6472"/>
+                  <a:srgbClr val="000000"/>
                 </a:solidFill>
                 <a:latin typeface="Calibri" pitchFamily="34" charset="0"/>
                 <a:ea typeface="Calibri" pitchFamily="34" charset="-122"/>
                 <a:cs typeface="Calibri" pitchFamily="34" charset="-120"/>
               </a:rPr>
-              <a:t>Everything runs in the browser: React + Vite, hosted on GitHub Pages. No backend, no database, no API keys.</a:t>
+              <a:t>Runs entirely in the browser</a:t>
             </a:r>
-            <a:endParaRPr lang="en-US" sz="1250" dirty="0"/>
-          </a:p>
-        </p:txBody>
-      </p:sp>
-      <p:sp>
-        <p:nvSpPr>
-          <p:cNvPr id="5" name="Shape 2"/>
-          <p:cNvSpPr/>
-          <p:nvPr/>
-        </p:nvSpPr>
-        <p:spPr>
-          <a:xfrm>
-            <a:off x="6217920" y="1325880"/>
-            <a:ext cx="2468880" cy="1051560"/>
-          </a:xfrm>
-          <a:prstGeom prst="rect">
-            <a:avLst/>
-          </a:prstGeom>
-          <a:solidFill>
-            <a:srgbClr val="F4F5F7"/>
-          </a:solidFill>
-          <a:ln w="12700">
-            <a:solidFill>
-              <a:srgbClr val="F4F5F7"/>
-            </a:solidFill>
-            <a:prstDash val="solid"/>
-          </a:ln>
-        </p:spPr>
-      </p:sp>
-      <p:sp>
-        <p:nvSpPr>
-          <p:cNvPr id="6" name="Text 3"/>
-          <p:cNvSpPr txBox="1"/>
-          <p:nvPr/>
-        </p:nvSpPr>
-        <p:spPr>
-          <a:xfrm>
-            <a:off x="6400800" y="1399032"/>
-            <a:ext cx="2103120" cy="548640"/>
-          </a:xfrm>
-          <a:prstGeom prst="rect">
-            <a:avLst/>
-          </a:prstGeom>
-          <a:noFill/>
-          <a:ln/>
-        </p:spPr>
-        <p:txBody>
-          <a:bodyPr wrap="square" lIns="0" tIns="0" rIns="0" bIns="0" rtlCol="0" anchor="ctr"/>
-          <a:lstStyle/>
-          <a:p>
-            <a:pPr indent="0" marL="0">
-              <a:buNone/>
+            <a:endParaRPr lang="en-US" sz="1600" dirty="0"/>
+          </a:p>
+          <a:p>
+            <a:pPr marL="228600" indent="-228600">
+              <a:spcAft>
+                <a:spcPts val="1000"/>
+              </a:spcAft>
+              <a:buSzPct val="100000"/>
+              <a:buChar char="•"/>
             </a:pPr>
             <a:r>
-              <a:rPr lang="en-US" sz="3000" b="1" dirty="0">
+              <a:rPr lang="en-US" sz="1600" dirty="0">
                 <a:solidFill>
-                  <a:srgbClr val="1D3F6E"/>
-                </a:solidFill>
-                <a:latin typeface="Cambria" pitchFamily="34" charset="0"/>
-                <a:ea typeface="Cambria" pitchFamily="34" charset="-122"/>
-                <a:cs typeface="Cambria" pitchFamily="34" charset="-120"/>
-              </a:rPr>
-              <a:t>12 tests</a:t>
-            </a:r>
-            <a:endParaRPr lang="en-US" sz="3000" dirty="0"/>
-          </a:p>
-        </p:txBody>
-      </p:sp>
-      <p:sp>
-        <p:nvSpPr>
-          <p:cNvPr id="7" name="Text 4"/>
-          <p:cNvSpPr txBox="1"/>
-          <p:nvPr/>
-        </p:nvSpPr>
-        <p:spPr>
-          <a:xfrm>
-            <a:off x="6400800" y="1947672"/>
-            <a:ext cx="2103120" cy="384048"/>
-          </a:xfrm>
-          <a:prstGeom prst="rect">
-            <a:avLst/>
-          </a:prstGeom>
-          <a:noFill/>
-          <a:ln/>
-        </p:spPr>
-        <p:txBody>
-          <a:bodyPr wrap="square" lIns="0" tIns="0" rIns="0" bIns="0" rtlCol="0" anchor="t"/>
-          <a:lstStyle/>
-          <a:p>
-            <a:pPr indent="0" marL="0">
-              <a:buNone/>
-            </a:pPr>
-            <a:r>
-              <a:rPr lang="en-US" sz="1150" dirty="0">
-                <a:solidFill>
-                  <a:srgbClr val="5B6472"/>
+                  <a:srgbClr val="000000"/>
                 </a:solidFill>
                 <a:latin typeface="Calibri" pitchFamily="34" charset="0"/>
                 <a:ea typeface="Calibri" pitchFamily="34" charset="-122"/>
                 <a:cs typeface="Calibri" pitchFamily="34" charset="-120"/>
               </a:rPr>
-              <a:t>automated unit tests, all passing</a:t>
+              <a:t>React, Vite and GitHub Pages; no backend</a:t>
             </a:r>
-            <a:endParaRPr lang="en-US" sz="1150" dirty="0"/>
-          </a:p>
-        </p:txBody>
-      </p:sp>
-      <p:sp>
-        <p:nvSpPr>
-          <p:cNvPr id="8" name="Shape 5"/>
-          <p:cNvSpPr/>
-          <p:nvPr/>
-        </p:nvSpPr>
-        <p:spPr>
-          <a:xfrm>
-            <a:off x="6217920" y="2606040"/>
-            <a:ext cx="2468880" cy="1051560"/>
-          </a:xfrm>
-          <a:prstGeom prst="rect">
-            <a:avLst/>
-          </a:prstGeom>
-          <a:solidFill>
-            <a:srgbClr val="F4F5F7"/>
-          </a:solidFill>
-          <a:ln w="12700">
-            <a:solidFill>
-              <a:srgbClr val="F4F5F7"/>
-            </a:solidFill>
-            <a:prstDash val="solid"/>
-          </a:ln>
-        </p:spPr>
-      </p:sp>
-      <p:sp>
-        <p:nvSpPr>
-          <p:cNvPr id="9" name="Text 6"/>
-          <p:cNvSpPr txBox="1"/>
-          <p:nvPr/>
-        </p:nvSpPr>
-        <p:spPr>
-          <a:xfrm>
-            <a:off x="6400800" y="2679192"/>
-            <a:ext cx="2103120" cy="548640"/>
-          </a:xfrm>
-          <a:prstGeom prst="rect">
-            <a:avLst/>
-          </a:prstGeom>
-          <a:noFill/>
-          <a:ln/>
-        </p:spPr>
-        <p:txBody>
-          <a:bodyPr wrap="square" lIns="0" tIns="0" rIns="0" bIns="0" rtlCol="0" anchor="ctr"/>
-          <a:lstStyle/>
-          <a:p>
-            <a:pPr indent="0" marL="0">
-              <a:buNone/>
+            <a:endParaRPr lang="en-US" sz="1600" dirty="0"/>
+          </a:p>
+          <a:p>
+            <a:pPr marL="228600" indent="-228600">
+              <a:spcAft>
+                <a:spcPts val="1000"/>
+              </a:spcAft>
+              <a:buSzPct val="100000"/>
+              <a:buChar char="•"/>
             </a:pPr>
             <a:r>
-              <a:rPr lang="en-US" sz="3000" b="1" dirty="0">
+              <a:rPr lang="en-US" sz="1600" dirty="0">
                 <a:solidFill>
-                  <a:srgbClr val="B3261E"/>
-                </a:solidFill>
-                <a:latin typeface="Cambria" pitchFamily="34" charset="0"/>
-                <a:ea typeface="Cambria" pitchFamily="34" charset="-122"/>
-                <a:cs typeface="Cambria" pitchFamily="34" charset="-120"/>
-              </a:rPr>
-              <a:t>9 decimals</a:t>
-            </a:r>
-            <a:endParaRPr lang="en-US" sz="3000" dirty="0"/>
-          </a:p>
-        </p:txBody>
-      </p:sp>
-      <p:sp>
-        <p:nvSpPr>
-          <p:cNvPr id="10" name="Text 7"/>
-          <p:cNvSpPr txBox="1"/>
-          <p:nvPr/>
-        </p:nvSpPr>
-        <p:spPr>
-          <a:xfrm>
-            <a:off x="6400800" y="3227832"/>
-            <a:ext cx="2103120" cy="384048"/>
-          </a:xfrm>
-          <a:prstGeom prst="rect">
-            <a:avLst/>
-          </a:prstGeom>
-          <a:noFill/>
-          <a:ln/>
-        </p:spPr>
-        <p:txBody>
-          <a:bodyPr wrap="square" lIns="0" tIns="0" rIns="0" bIns="0" rtlCol="0" anchor="t"/>
-          <a:lstStyle/>
-          <a:p>
-            <a:pPr indent="0" marL="0">
-              <a:buNone/>
-            </a:pPr>
-            <a:r>
-              <a:rPr lang="en-US" sz="1150" dirty="0">
-                <a:solidFill>
-                  <a:srgbClr val="5B6472"/>
+                  <a:srgbClr val="000000"/>
                 </a:solidFill>
                 <a:latin typeface="Calibri" pitchFamily="34" charset="0"/>
                 <a:ea typeface="Calibri" pitchFamily="34" charset="-122"/>
                 <a:cs typeface="Calibri" pitchFamily="34" charset="-120"/>
               </a:rPr>
-              <a:t>simulation matches sin²((2k+1)θ) at every iteration</a:t>
+              <a:t>12 automated tests</a:t>
             </a:r>
-            <a:endParaRPr lang="en-US" sz="1150" dirty="0"/>
+            <a:endParaRPr lang="en-US" sz="1600" dirty="0"/>
+          </a:p>
+          <a:p>
+            <a:pPr marL="228600" indent="-228600">
+              <a:buSzPct val="100000"/>
+              <a:buChar char="•"/>
+            </a:pPr>
+            <a:r>
+              <a:rPr lang="en-US" sz="1600" dirty="0">
+                <a:solidFill>
+                  <a:srgbClr val="000000"/>
+                </a:solidFill>
+                <a:latin typeface="Calibri" pitchFamily="34" charset="0"/>
+                <a:ea typeface="Calibri" pitchFamily="34" charset="-122"/>
+                <a:cs typeface="Calibri" pitchFamily="34" charset="-120"/>
+              </a:rPr>
+              <a:t>Simulation matches theory to 9 decimal places</a:t>
+            </a:r>
+            <a:endParaRPr lang="en-US" sz="1600" dirty="0"/>
+          </a:p>
+        </p:txBody>
+      </p:sp>
+      <p:sp>
+        <p:nvSpPr>
+          <p:cNvPr id="25" name="Slide Number Placeholder 0"/>
+          <p:cNvSpPr>
+            <a:spLocks noGrp="1"/>
+          </p:cNvSpPr>
+          <p:nvPr>
+            <p:ph type="sldNum" sz="quarter" idx="4294967295"/>
+          </p:nvPr>
+        </p:nvSpPr>
+        <p:spPr>
+          <a:xfrm>
+            <a:off x="8229600" y="4709160"/>
+            <a:ext cx="457200" cy="274320"/>
+          </a:xfrm>
+          <a:prstGeom prst="rect">
+            <a:avLst/>
+          </a:prstGeom>
+          <a:extLst>
+            <a:ext uri="{C572A759-6A51-4108-AA02-DFA0A04FC94B}">
+              <ma14:wrappingTextBoxFlag xmlns:ma14="http://schemas.microsoft.com/office/mac/drawingml/2011/main" val="0"/>
+            </a:ext>
+          </a:extLst>
+        </p:spPr>
+        <p:txBody>
+          <a:bodyPr/>
+          <a:lstStyle>
+            <a:lvl1pPr>
+              <a:defRPr sz="1000">
+                <a:solidFill>
+                  <a:srgbClr val="000000"/>
+                </a:solidFill>
+                <a:latin typeface="Calibri"/>
+                <a:ea typeface="Calibri"/>
+                <a:cs typeface="Calibri"/>
+              </a:defRPr>
+            </a:lvl1pPr>
+          </a:lstStyle>
+          <a:p>
+            <a:pPr algn="r"/>
+            <a:fld id="{F7021451-1387-4CA6-816F-3879F97B5CBC}" type="slidenum">
+              <a:rPr b="0" lang="en-US"/>
+              <a:t>5</a:t>
+            </a:fld>
+            <a:endParaRPr lang="en-US"/>
           </a:p>
         </p:txBody>
       </p:sp>
@@ -7483,6 +6894,142 @@
   <p:clrMapOvr>
     <a:masterClrMapping/>
   </p:clrMapOvr>
+  <p:transition spd="med">
+    <p:fade/>
+  </p:transition>
+  <p:timing>
+    <p:tnLst>
+      <p:par>
+        <p:cTn id="1" dur="indefinite" restart="never" nodeType="tmRoot">
+          <p:childTnLst>
+            <p:seq concurrent="1" nextAc="seek">
+              <p:cTn id="2" dur="indefinite" nodeType="mainSeq">
+                <p:childTnLst>
+                  <p:par>
+                    <p:cTn id="3" fill="hold">
+                      <p:stCondLst>
+                        <p:cond delay="indefinite"/>
+                        <p:cond evt="onBegin" delay="0">
+                          <p:tn val="2"/>
+                        </p:cond>
+                      </p:stCondLst>
+                      <p:childTnLst>
+                        <p:par>
+                          <p:cTn id="4" fill="hold">
+                            <p:stCondLst>
+                              <p:cond delay="0"/>
+                            </p:stCondLst>
+                            <p:childTnLst>
+                              <p:par>
+                                <p:cTn id="5" presetID="10" presetClass="entr" presetSubtype="0" fill="hold" nodeType="afterEffect">
+                                  <p:stCondLst>
+                                    <p:cond delay="0"/>
+                                  </p:stCondLst>
+                                  <p:childTnLst>
+                                    <p:set>
+                                      <p:cBhvr>
+                                        <p:cTn id="6" dur="1" fill="hold">
+                                          <p:stCondLst>
+                                            <p:cond delay="0"/>
+                                          </p:stCondLst>
+                                        </p:cTn>
+                                        <p:tgtEl>
+                                          <p:spTgt spid="3"/>
+                                        </p:tgtEl>
+                                        <p:attrNameLst>
+                                          <p:attrName>style.visibility</p:attrName>
+                                        </p:attrNameLst>
+                                      </p:cBhvr>
+                                      <p:to>
+                                        <p:strVal val="visible"/>
+                                      </p:to>
+                                    </p:set>
+                                    <p:animEffect transition="in" filter="fade">
+                                      <p:cBhvr>
+                                        <p:cTn id="7" dur="500"/>
+                                        <p:tgtEl>
+                                          <p:spTgt spid="3"/>
+                                        </p:tgtEl>
+                                      </p:cBhvr>
+                                    </p:animEffect>
+                                  </p:childTnLst>
+                                </p:cTn>
+                              </p:par>
+                            </p:childTnLst>
+                          </p:cTn>
+                        </p:par>
+                        <p:par>
+                          <p:cTn id="8" fill="hold">
+                            <p:stCondLst>
+                              <p:cond delay="500"/>
+                            </p:stCondLst>
+                            <p:childTnLst>
+                              <p:par>
+                                <p:cTn id="9" presetID="10" presetClass="entr" presetSubtype="0" fill="hold" grpId="0" nodeType="afterEffect">
+                                  <p:stCondLst>
+                                    <p:cond delay="0"/>
+                                  </p:stCondLst>
+                                  <p:childTnLst>
+                                    <p:set>
+                                      <p:cBhvr>
+                                        <p:cTn id="10" dur="1" fill="hold">
+                                          <p:stCondLst>
+                                            <p:cond delay="0"/>
+                                          </p:stCondLst>
+                                        </p:cTn>
+                                        <p:tgtEl>
+                                          <p:spTgt spid="4"/>
+                                        </p:tgtEl>
+                                        <p:attrNameLst>
+                                          <p:attrName>style.visibility</p:attrName>
+                                        </p:attrNameLst>
+                                      </p:cBhvr>
+                                      <p:to>
+                                        <p:strVal val="visible"/>
+                                      </p:to>
+                                    </p:set>
+                                    <p:animEffect transition="in" filter="fade">
+                                      <p:cBhvr>
+                                        <p:cTn id="11" dur="500"/>
+                                        <p:tgtEl>
+                                          <p:spTgt spid="4"/>
+                                        </p:tgtEl>
+                                      </p:cBhvr>
+                                    </p:animEffect>
+                                  </p:childTnLst>
+                                </p:cTn>
+                              </p:par>
+                            </p:childTnLst>
+                          </p:cTn>
+                        </p:par>
+                      </p:childTnLst>
+                    </p:cTn>
+                  </p:par>
+                </p:childTnLst>
+              </p:cTn>
+              <p:prevCondLst>
+                <p:cond evt="onPrev" delay="0">
+                  <p:tgtEl>
+                    <p:sldTgt/>
+                  </p:tgtEl>
+                </p:cond>
+              </p:prevCondLst>
+              <p:nextCondLst>
+                <p:cond evt="onNext" delay="0">
+                  <p:tgtEl>
+                    <p:sldTgt/>
+                  </p:tgtEl>
+                </p:cond>
+              </p:nextCondLst>
+            </p:seq>
+          </p:childTnLst>
+        </p:cTn>
+      </p:par>
+    </p:tnLst>
+    <p:bldLst>
+      <p:bldP spid="4" grpId="0"/>
+    </p:bldLst>
+  </p:timing>
 </p:sld>
 </file>
 
@@ -7512,14 +7059,14 @@
       </p:grpSpPr>
       <p:sp>
         <p:nvSpPr>
-          <p:cNvPr id="2" name="Text 0"/>
-          <p:cNvSpPr txBox="1"/>
+          <p:cNvPr id="2" name="Title"/>
+          <p:cNvSpPr/>
           <p:nvPr/>
         </p:nvSpPr>
         <p:spPr>
           <a:xfrm>
-            <a:off x="457200" y="274320"/>
-            <a:ext cx="8229600" cy="685800"/>
+            <a:off x="548640" y="320040"/>
+            <a:ext cx="8046720" cy="640080"/>
           </a:xfrm>
           <a:prstGeom prst="rect">
             <a:avLst/>
@@ -7537,13 +7084,13 @@
             <a:r>
               <a:rPr lang="en-US" sz="3000" b="1" dirty="0">
                 <a:solidFill>
-                  <a:srgbClr val="0E2340"/>
+                  <a:srgbClr val="000000"/>
                 </a:solidFill>
-                <a:latin typeface="Cambria" pitchFamily="34" charset="0"/>
-                <a:ea typeface="Cambria" pitchFamily="34" charset="-122"/>
-                <a:cs typeface="Cambria" pitchFamily="34" charset="-120"/>
+                <a:latin typeface="Calibri" pitchFamily="34" charset="0"/>
+                <a:ea typeface="Calibri" pitchFamily="34" charset="-122"/>
+                <a:cs typeface="Calibri" pitchFamily="34" charset="-120"/>
               </a:rPr>
-              <a:t>Watching the secret’s amplitude grow</a:t>
+              <a:t>The secret’s amplitude grows</a:t>
             </a:r>
             <a:endParaRPr lang="en-US" sz="3000" dirty="0"/>
           </a:p>
@@ -7551,7 +7098,7 @@
       </p:sp>
       <p:pic>
         <p:nvPicPr>
-          <p:cNvPr id="3" name="Image 0" descr="fig_amps.png">    </p:cNvPr>
+          <p:cNvPr id="3" name="anim1" descr="fig_amps.png">    </p:cNvPr>
           <p:cNvPicPr>
             <a:picLocks noChangeAspect="1"/>
           </p:cNvPicPr>
@@ -7565,8 +7112,8 @@
         </p:blipFill>
         <p:spPr>
           <a:xfrm>
-            <a:off x="457200" y="1188720"/>
-            <a:ext cx="8229600" cy="2085896"/>
+            <a:off x="548640" y="1188720"/>
+            <a:ext cx="8046720" cy="2039543"/>
           </a:xfrm>
           <a:prstGeom prst="rect">
             <a:avLst/>
@@ -7575,14 +7122,14 @@
       </p:pic>
       <p:sp>
         <p:nvSpPr>
-          <p:cNvPr id="4" name="Text 1"/>
-          <p:cNvSpPr txBox="1"/>
+          <p:cNvPr id="4" name="anim2"/>
+          <p:cNvSpPr/>
           <p:nvPr/>
         </p:nvSpPr>
         <p:spPr>
           <a:xfrm>
-            <a:off x="457200" y="3548936"/>
-            <a:ext cx="1463040" cy="548640"/>
+            <a:off x="548640" y="3383280"/>
+            <a:ext cx="8046720" cy="822960"/>
           </a:xfrm>
           <a:prstGeom prst="rect">
             <a:avLst/>
@@ -7591,37 +7138,57 @@
           <a:ln/>
         </p:spPr>
         <p:txBody>
-          <a:bodyPr wrap="square" lIns="0" tIns="0" rIns="0" bIns="0" rtlCol="0" anchor="ctr"/>
+          <a:bodyPr wrap="square" lIns="0" tIns="0" rIns="0" bIns="0" rtlCol="0" anchor="t"/>
           <a:lstStyle/>
+          <a:p>
+            <a:pPr indent="0" marL="0">
+              <a:spcAft>
+                <a:spcPts val="400"/>
+              </a:spcAft>
+              <a:buNone/>
+            </a:pPr>
+            <a:r>
+              <a:rPr lang="en-US" sz="1400" dirty="0">
+                <a:solidFill>
+                  <a:srgbClr val="000000"/>
+                </a:solidFill>
+                <a:latin typeface="Calibri" pitchFamily="34" charset="0"/>
+                <a:ea typeface="Calibri" pitchFamily="34" charset="-122"/>
+                <a:cs typeface="Calibri" pitchFamily="34" charset="-120"/>
+              </a:rPr>
+              <a:t>Probability of measuring the secret (n = 5)</a:t>
+            </a:r>
+            <a:endParaRPr lang="en-US" sz="1400" dirty="0"/>
+          </a:p>
           <a:p>
             <a:pPr indent="0" marL="0">
               <a:buNone/>
             </a:pPr>
             <a:r>
-              <a:rPr lang="en-US" sz="3000" b="1" dirty="0">
+              <a:rPr lang="en-US" sz="2400" b="1" dirty="0">
                 <a:solidFill>
-                  <a:srgbClr val="1D3F6E"/>
+                  <a:srgbClr val="000000"/>
                 </a:solidFill>
-                <a:latin typeface="Cambria" pitchFamily="34" charset="0"/>
-                <a:ea typeface="Cambria" pitchFamily="34" charset="-122"/>
-                <a:cs typeface="Cambria" pitchFamily="34" charset="-120"/>
+                <a:latin typeface="Calibri" pitchFamily="34" charset="0"/>
+                <a:ea typeface="Calibri" pitchFamily="34" charset="-122"/>
+                <a:cs typeface="Calibri" pitchFamily="34" charset="-120"/>
               </a:rPr>
-              <a:t>3.1%</a:t>
+              <a:t>3.1%   →   25.8%   →   60.2%   →   89.7%   →   99.9%</a:t>
             </a:r>
-            <a:endParaRPr lang="en-US" sz="3000" dirty="0"/>
+            <a:endParaRPr lang="en-US" sz="1400" dirty="0"/>
           </a:p>
         </p:txBody>
       </p:sp>
       <p:sp>
         <p:nvSpPr>
-          <p:cNvPr id="5" name="Text 2"/>
-          <p:cNvSpPr txBox="1"/>
+          <p:cNvPr id="5" name="anim3"/>
+          <p:cNvSpPr/>
           <p:nvPr/>
         </p:nvSpPr>
         <p:spPr>
           <a:xfrm>
-            <a:off x="457200" y="4097576"/>
-            <a:ext cx="1463040" cy="274320"/>
+            <a:off x="548640" y="4297680"/>
+            <a:ext cx="8046720" cy="320040"/>
           </a:xfrm>
           <a:prstGeom prst="rect">
             <a:avLst/>
@@ -7630,375 +7197,72 @@
           <a:ln/>
         </p:spPr>
         <p:txBody>
-          <a:bodyPr wrap="square" lIns="0" tIns="0" rIns="0" bIns="0" rtlCol="0" anchor="ctr"/>
+          <a:bodyPr wrap="square" lIns="0" tIns="0" rIns="0" bIns="0" rtlCol="0" anchor="t"/>
           <a:lstStyle/>
           <a:p>
             <a:pPr indent="0" marL="0">
               <a:buNone/>
             </a:pPr>
             <a:r>
-              <a:rPr lang="en-US" sz="1200" dirty="0">
+              <a:rPr lang="en-US" sz="1600" dirty="0">
                 <a:solidFill>
-                  <a:srgbClr val="5B6472"/>
+                  <a:srgbClr val="000000"/>
                 </a:solidFill>
                 <a:latin typeface="Calibri" pitchFamily="34" charset="0"/>
                 <a:ea typeface="Calibri" pitchFamily="34" charset="-122"/>
                 <a:cs typeface="Calibri" pitchFamily="34" charset="-120"/>
               </a:rPr>
-              <a:t>after k = 0</a:t>
+              <a:t>Four iterations, against 16.5 classical guesses on average.</a:t>
             </a:r>
-            <a:endParaRPr lang="en-US" sz="1200" dirty="0"/>
+            <a:endParaRPr lang="en-US" sz="1600" dirty="0"/>
           </a:p>
         </p:txBody>
       </p:sp>
       <p:sp>
         <p:nvSpPr>
-          <p:cNvPr id="6" name="Text 3"/>
-          <p:cNvSpPr txBox="1"/>
-          <p:nvPr/>
+          <p:cNvPr id="25" name="Slide Number Placeholder 0"/>
+          <p:cNvSpPr>
+            <a:spLocks noGrp="1"/>
+          </p:cNvSpPr>
+          <p:nvPr>
+            <p:ph type="sldNum" sz="quarter" idx="4294967295"/>
+          </p:nvPr>
         </p:nvSpPr>
         <p:spPr>
           <a:xfrm>
-            <a:off x="2103120" y="3548936"/>
-            <a:ext cx="1463040" cy="548640"/>
+            <a:off x="8229600" y="4709160"/>
+            <a:ext cx="457200" cy="274320"/>
           </a:xfrm>
           <a:prstGeom prst="rect">
             <a:avLst/>
           </a:prstGeom>
-          <a:noFill/>
-          <a:ln/>
+          <a:extLst>
+            <a:ext uri="{C572A759-6A51-4108-AA02-DFA0A04FC94B}">
+              <ma14:wrappingTextBoxFlag xmlns:ma14="http://schemas.microsoft.com/office/mac/drawingml/2011/main" val="0"/>
+            </a:ext>
+          </a:extLst>
         </p:spPr>
         <p:txBody>
-          <a:bodyPr wrap="square" lIns="0" tIns="0" rIns="0" bIns="0" rtlCol="0" anchor="ctr"/>
-          <a:lstStyle/>
-          <a:p>
-            <a:pPr indent="0" marL="0">
-              <a:buNone/>
-            </a:pPr>
-            <a:r>
-              <a:rPr lang="en-US" sz="3000" b="1" dirty="0">
+          <a:bodyPr/>
+          <a:lstStyle>
+            <a:lvl1pPr>
+              <a:defRPr sz="1000">
                 <a:solidFill>
-                  <a:srgbClr val="1D3F6E"/>
+                  <a:srgbClr val="000000"/>
                 </a:solidFill>
-                <a:latin typeface="Cambria" pitchFamily="34" charset="0"/>
-                <a:ea typeface="Cambria" pitchFamily="34" charset="-122"/>
-                <a:cs typeface="Cambria" pitchFamily="34" charset="-120"/>
-              </a:rPr>
-              <a:t>25.8%</a:t>
-            </a:r>
-            <a:endParaRPr lang="en-US" sz="3000" dirty="0"/>
-          </a:p>
-        </p:txBody>
-      </p:sp>
-      <p:sp>
-        <p:nvSpPr>
-          <p:cNvPr id="7" name="Text 4"/>
-          <p:cNvSpPr txBox="1"/>
-          <p:nvPr/>
-        </p:nvSpPr>
-        <p:spPr>
-          <a:xfrm>
-            <a:off x="2103120" y="4097576"/>
-            <a:ext cx="1463040" cy="274320"/>
-          </a:xfrm>
-          <a:prstGeom prst="rect">
-            <a:avLst/>
-          </a:prstGeom>
-          <a:noFill/>
-          <a:ln/>
-        </p:spPr>
-        <p:txBody>
-          <a:bodyPr wrap="square" lIns="0" tIns="0" rIns="0" bIns="0" rtlCol="0" anchor="ctr"/>
-          <a:lstStyle/>
-          <a:p>
-            <a:pPr indent="0" marL="0">
-              <a:buNone/>
-            </a:pPr>
-            <a:r>
-              <a:rPr lang="en-US" sz="1200" dirty="0">
-                <a:solidFill>
-                  <a:srgbClr val="5B6472"/>
-                </a:solidFill>
-                <a:latin typeface="Calibri" pitchFamily="34" charset="0"/>
-                <a:ea typeface="Calibri" pitchFamily="34" charset="-122"/>
-                <a:cs typeface="Calibri" pitchFamily="34" charset="-120"/>
-              </a:rPr>
-              <a:t>after k = 1</a:t>
-            </a:r>
-            <a:endParaRPr lang="en-US" sz="1200" dirty="0"/>
-          </a:p>
-        </p:txBody>
-      </p:sp>
-      <p:sp>
-        <p:nvSpPr>
-          <p:cNvPr id="8" name="Text 5"/>
-          <p:cNvSpPr txBox="1"/>
-          <p:nvPr/>
-        </p:nvSpPr>
-        <p:spPr>
-          <a:xfrm>
-            <a:off x="3749040" y="3548936"/>
-            <a:ext cx="1463040" cy="548640"/>
-          </a:xfrm>
-          <a:prstGeom prst="rect">
-            <a:avLst/>
-          </a:prstGeom>
-          <a:noFill/>
-          <a:ln/>
-        </p:spPr>
-        <p:txBody>
-          <a:bodyPr wrap="square" lIns="0" tIns="0" rIns="0" bIns="0" rtlCol="0" anchor="ctr"/>
-          <a:lstStyle/>
-          <a:p>
-            <a:pPr indent="0" marL="0">
-              <a:buNone/>
-            </a:pPr>
-            <a:r>
-              <a:rPr lang="en-US" sz="3000" b="1" dirty="0">
-                <a:solidFill>
-                  <a:srgbClr val="1D3F6E"/>
-                </a:solidFill>
-                <a:latin typeface="Cambria" pitchFamily="34" charset="0"/>
-                <a:ea typeface="Cambria" pitchFamily="34" charset="-122"/>
-                <a:cs typeface="Cambria" pitchFamily="34" charset="-120"/>
-              </a:rPr>
-              <a:t>60.2%</a:t>
-            </a:r>
-            <a:endParaRPr lang="en-US" sz="3000" dirty="0"/>
-          </a:p>
-        </p:txBody>
-      </p:sp>
-      <p:sp>
-        <p:nvSpPr>
-          <p:cNvPr id="9" name="Text 6"/>
-          <p:cNvSpPr txBox="1"/>
-          <p:nvPr/>
-        </p:nvSpPr>
-        <p:spPr>
-          <a:xfrm>
-            <a:off x="3749040" y="4097576"/>
-            <a:ext cx="1463040" cy="274320"/>
-          </a:xfrm>
-          <a:prstGeom prst="rect">
-            <a:avLst/>
-          </a:prstGeom>
-          <a:noFill/>
-          <a:ln/>
-        </p:spPr>
-        <p:txBody>
-          <a:bodyPr wrap="square" lIns="0" tIns="0" rIns="0" bIns="0" rtlCol="0" anchor="ctr"/>
-          <a:lstStyle/>
-          <a:p>
-            <a:pPr indent="0" marL="0">
-              <a:buNone/>
-            </a:pPr>
-            <a:r>
-              <a:rPr lang="en-US" sz="1200" dirty="0">
-                <a:solidFill>
-                  <a:srgbClr val="5B6472"/>
-                </a:solidFill>
-                <a:latin typeface="Calibri" pitchFamily="34" charset="0"/>
-                <a:ea typeface="Calibri" pitchFamily="34" charset="-122"/>
-                <a:cs typeface="Calibri" pitchFamily="34" charset="-120"/>
-              </a:rPr>
-              <a:t>after k = 2</a:t>
-            </a:r>
-            <a:endParaRPr lang="en-US" sz="1200" dirty="0"/>
-          </a:p>
-        </p:txBody>
-      </p:sp>
-      <p:sp>
-        <p:nvSpPr>
-          <p:cNvPr id="10" name="Text 7"/>
-          <p:cNvSpPr txBox="1"/>
-          <p:nvPr/>
-        </p:nvSpPr>
-        <p:spPr>
-          <a:xfrm>
-            <a:off x="5394960" y="3548936"/>
-            <a:ext cx="1463040" cy="548640"/>
-          </a:xfrm>
-          <a:prstGeom prst="rect">
-            <a:avLst/>
-          </a:prstGeom>
-          <a:noFill/>
-          <a:ln/>
-        </p:spPr>
-        <p:txBody>
-          <a:bodyPr wrap="square" lIns="0" tIns="0" rIns="0" bIns="0" rtlCol="0" anchor="ctr"/>
-          <a:lstStyle/>
-          <a:p>
-            <a:pPr indent="0" marL="0">
-              <a:buNone/>
-            </a:pPr>
-            <a:r>
-              <a:rPr lang="en-US" sz="3000" b="1" dirty="0">
-                <a:solidFill>
-                  <a:srgbClr val="1D3F6E"/>
-                </a:solidFill>
-                <a:latin typeface="Cambria" pitchFamily="34" charset="0"/>
-                <a:ea typeface="Cambria" pitchFamily="34" charset="-122"/>
-                <a:cs typeface="Cambria" pitchFamily="34" charset="-120"/>
-              </a:rPr>
-              <a:t>89.7%</a:t>
-            </a:r>
-            <a:endParaRPr lang="en-US" sz="3000" dirty="0"/>
-          </a:p>
-        </p:txBody>
-      </p:sp>
-      <p:sp>
-        <p:nvSpPr>
-          <p:cNvPr id="11" name="Text 8"/>
-          <p:cNvSpPr txBox="1"/>
-          <p:nvPr/>
-        </p:nvSpPr>
-        <p:spPr>
-          <a:xfrm>
-            <a:off x="5394960" y="4097576"/>
-            <a:ext cx="1463040" cy="274320"/>
-          </a:xfrm>
-          <a:prstGeom prst="rect">
-            <a:avLst/>
-          </a:prstGeom>
-          <a:noFill/>
-          <a:ln/>
-        </p:spPr>
-        <p:txBody>
-          <a:bodyPr wrap="square" lIns="0" tIns="0" rIns="0" bIns="0" rtlCol="0" anchor="ctr"/>
-          <a:lstStyle/>
-          <a:p>
-            <a:pPr indent="0" marL="0">
-              <a:buNone/>
-            </a:pPr>
-            <a:r>
-              <a:rPr lang="en-US" sz="1200" dirty="0">
-                <a:solidFill>
-                  <a:srgbClr val="5B6472"/>
-                </a:solidFill>
-                <a:latin typeface="Calibri" pitchFamily="34" charset="0"/>
-                <a:ea typeface="Calibri" pitchFamily="34" charset="-122"/>
-                <a:cs typeface="Calibri" pitchFamily="34" charset="-120"/>
-              </a:rPr>
-              <a:t>after k = 3</a:t>
-            </a:r>
-            <a:endParaRPr lang="en-US" sz="1200" dirty="0"/>
-          </a:p>
-        </p:txBody>
-      </p:sp>
-      <p:sp>
-        <p:nvSpPr>
-          <p:cNvPr id="12" name="Text 9"/>
-          <p:cNvSpPr txBox="1"/>
-          <p:nvPr/>
-        </p:nvSpPr>
-        <p:spPr>
-          <a:xfrm>
-            <a:off x="7040880" y="3548936"/>
-            <a:ext cx="1463040" cy="548640"/>
-          </a:xfrm>
-          <a:prstGeom prst="rect">
-            <a:avLst/>
-          </a:prstGeom>
-          <a:noFill/>
-          <a:ln/>
-        </p:spPr>
-        <p:txBody>
-          <a:bodyPr wrap="square" lIns="0" tIns="0" rIns="0" bIns="0" rtlCol="0" anchor="ctr"/>
-          <a:lstStyle/>
-          <a:p>
-            <a:pPr indent="0" marL="0">
-              <a:buNone/>
-            </a:pPr>
-            <a:r>
-              <a:rPr lang="en-US" sz="3000" b="1" dirty="0">
-                <a:solidFill>
-                  <a:srgbClr val="B3261E"/>
-                </a:solidFill>
-                <a:latin typeface="Cambria" pitchFamily="34" charset="0"/>
-                <a:ea typeface="Cambria" pitchFamily="34" charset="-122"/>
-                <a:cs typeface="Cambria" pitchFamily="34" charset="-120"/>
-              </a:rPr>
-              <a:t>99.9%</a:t>
-            </a:r>
-            <a:endParaRPr lang="en-US" sz="3000" dirty="0"/>
-          </a:p>
-        </p:txBody>
-      </p:sp>
-      <p:sp>
-        <p:nvSpPr>
-          <p:cNvPr id="13" name="Text 10"/>
-          <p:cNvSpPr txBox="1"/>
-          <p:nvPr/>
-        </p:nvSpPr>
-        <p:spPr>
-          <a:xfrm>
-            <a:off x="7040880" y="4097576"/>
-            <a:ext cx="1463040" cy="274320"/>
-          </a:xfrm>
-          <a:prstGeom prst="rect">
-            <a:avLst/>
-          </a:prstGeom>
-          <a:noFill/>
-          <a:ln/>
-        </p:spPr>
-        <p:txBody>
-          <a:bodyPr wrap="square" lIns="0" tIns="0" rIns="0" bIns="0" rtlCol="0" anchor="ctr"/>
-          <a:lstStyle/>
-          <a:p>
-            <a:pPr indent="0" marL="0">
-              <a:buNone/>
-            </a:pPr>
-            <a:r>
-              <a:rPr lang="en-US" sz="1200" dirty="0">
-                <a:solidFill>
-                  <a:srgbClr val="5B6472"/>
-                </a:solidFill>
-                <a:latin typeface="Calibri" pitchFamily="34" charset="0"/>
-                <a:ea typeface="Calibri" pitchFamily="34" charset="-122"/>
-                <a:cs typeface="Calibri" pitchFamily="34" charset="-120"/>
-              </a:rPr>
-              <a:t>after k = 4</a:t>
-            </a:r>
-            <a:endParaRPr lang="en-US" sz="1200" dirty="0"/>
-          </a:p>
-        </p:txBody>
-      </p:sp>
-      <p:sp>
-        <p:nvSpPr>
-          <p:cNvPr id="14" name="Text 11"/>
-          <p:cNvSpPr txBox="1"/>
-          <p:nvPr/>
-        </p:nvSpPr>
-        <p:spPr>
-          <a:xfrm>
-            <a:off x="457200" y="4509056"/>
-            <a:ext cx="8229600" cy="320040"/>
-          </a:xfrm>
-          <a:prstGeom prst="rect">
-            <a:avLst/>
-          </a:prstGeom>
-          <a:noFill/>
-          <a:ln/>
-        </p:spPr>
-        <p:txBody>
-          <a:bodyPr wrap="square" lIns="0" tIns="0" rIns="0" bIns="0" rtlCol="0" anchor="ctr"/>
-          <a:lstStyle/>
-          <a:p>
-            <a:pPr indent="0" marL="0">
-              <a:buNone/>
-            </a:pPr>
-            <a:r>
-              <a:rPr lang="en-US" sz="1300" dirty="0">
-                <a:solidFill>
-                  <a:srgbClr val="14181F"/>
-                </a:solidFill>
-                <a:latin typeface="Calibri" pitchFamily="34" charset="0"/>
-                <a:ea typeface="Calibri" pitchFamily="34" charset="-122"/>
-                <a:cs typeface="Calibri" pitchFamily="34" charset="-120"/>
-              </a:rPr>
-              <a:t>n = 5, secret item 19. Four iterations, against 16.5 classical guesses on average.</a:t>
-            </a:r>
-            <a:endParaRPr lang="en-US" sz="1300" dirty="0"/>
+                <a:latin typeface="Calibri"/>
+                <a:ea typeface="Calibri"/>
+                <a:cs typeface="Calibri"/>
+              </a:defRPr>
+            </a:lvl1pPr>
+          </a:lstStyle>
+          <a:p>
+            <a:pPr algn="r"/>
+            <a:fld id="{F7021451-1387-4CA6-816F-3879F97B5CBC}" type="slidenum">
+              <a:rPr b="0" lang="en-US"/>
+              <a:t>6</a:t>
+            </a:fld>
+            <a:endParaRPr lang="en-US"/>
           </a:p>
         </p:txBody>
       </p:sp>
@@ -8007,6 +7271,187 @@
   <p:clrMapOvr>
     <a:masterClrMapping/>
   </p:clrMapOvr>
+  <p:transition spd="med">
+    <p:fade/>
+  </p:transition>
+  <p:timing>
+    <p:tnLst>
+      <p:par>
+        <p:cTn id="1" dur="indefinite" restart="never" nodeType="tmRoot">
+          <p:childTnLst>
+            <p:seq concurrent="1" nextAc="seek">
+              <p:cTn id="2" dur="indefinite" nodeType="mainSeq">
+                <p:childTnLst>
+                  <p:par>
+                    <p:cTn id="3" fill="hold">
+                      <p:stCondLst>
+                        <p:cond delay="indefinite"/>
+                        <p:cond evt="onBegin" delay="0">
+                          <p:tn val="2"/>
+                        </p:cond>
+                      </p:stCondLst>
+                      <p:childTnLst>
+                        <p:par>
+                          <p:cTn id="4" fill="hold">
+                            <p:stCondLst>
+                              <p:cond delay="0"/>
+                            </p:stCondLst>
+                            <p:childTnLst>
+                              <p:par>
+                                <p:cTn id="5" presetID="10" presetClass="entr" presetSubtype="0" fill="hold" nodeType="afterEffect">
+                                  <p:stCondLst>
+                                    <p:cond delay="0"/>
+                                  </p:stCondLst>
+                                  <p:childTnLst>
+                                    <p:set>
+                                      <p:cBhvr>
+                                        <p:cTn id="6" dur="1" fill="hold">
+                                          <p:stCondLst>
+                                            <p:cond delay="0"/>
+                                          </p:stCondLst>
+                                        </p:cTn>
+                                        <p:tgtEl>
+                                          <p:spTgt spid="3"/>
+                                        </p:tgtEl>
+                                        <p:attrNameLst>
+                                          <p:attrName>style.visibility</p:attrName>
+                                        </p:attrNameLst>
+                                      </p:cBhvr>
+                                      <p:to>
+                                        <p:strVal val="visible"/>
+                                      </p:to>
+                                    </p:set>
+                                    <p:animEffect transition="in" filter="fade">
+                                      <p:cBhvr>
+                                        <p:cTn id="7" dur="500"/>
+                                        <p:tgtEl>
+                                          <p:spTgt spid="3"/>
+                                        </p:tgtEl>
+                                      </p:cBhvr>
+                                    </p:animEffect>
+                                  </p:childTnLst>
+                                </p:cTn>
+                              </p:par>
+                            </p:childTnLst>
+                          </p:cTn>
+                        </p:par>
+                        <p:par>
+                          <p:cTn id="8" fill="hold">
+                            <p:stCondLst>
+                              <p:cond delay="500"/>
+                            </p:stCondLst>
+                            <p:childTnLst>
+                              <p:par>
+                                <p:cTn id="9" presetID="10" presetClass="entr" presetSubtype="0" fill="hold" grpId="0" nodeType="afterEffect">
+                                  <p:stCondLst>
+                                    <p:cond delay="0"/>
+                                  </p:stCondLst>
+                                  <p:childTnLst>
+                                    <p:set>
+                                      <p:cBhvr>
+                                        <p:cTn id="10" dur="1" fill="hold">
+                                          <p:stCondLst>
+                                            <p:cond delay="0"/>
+                                          </p:stCondLst>
+                                        </p:cTn>
+                                        <p:tgtEl>
+                                          <p:spTgt spid="4"/>
+                                        </p:tgtEl>
+                                        <p:attrNameLst>
+                                          <p:attrName>style.visibility</p:attrName>
+                                        </p:attrNameLst>
+                                      </p:cBhvr>
+                                      <p:to>
+                                        <p:strVal val="visible"/>
+                                      </p:to>
+                                    </p:set>
+                                    <p:animEffect transition="in" filter="fade">
+                                      <p:cBhvr>
+                                        <p:cTn id="11" dur="500"/>
+                                        <p:tgtEl>
+                                          <p:spTgt spid="4"/>
+                                        </p:tgtEl>
+                                      </p:cBhvr>
+                                    </p:animEffect>
+                                  </p:childTnLst>
+                                </p:cTn>
+                              </p:par>
+                            </p:childTnLst>
+                          </p:cTn>
+                        </p:par>
+                        <p:par>
+                          <p:cTn id="12" fill="hold">
+                            <p:stCondLst>
+                              <p:cond delay="1000"/>
+                            </p:stCondLst>
+                            <p:childTnLst>
+                              <p:par>
+                                <p:cTn id="13" presetID="10" presetClass="entr" presetSubtype="0" fill="hold" grpId="0" nodeType="afterEffect">
+                                  <p:stCondLst>
+                                    <p:cond delay="0"/>
+                                  </p:stCondLst>
+                                  <p:childTnLst>
+                                    <p:set>
+                                      <p:cBhvr>
+                                        <p:cTn id="14" dur="1" fill="hold">
+                                          <p:stCondLst>
+                                            <p:cond delay="0"/>
+                                          </p:stCondLst>
+                                        </p:cTn>
+                                        <p:tgtEl>
+                                          <p:spTgt spid="5"/>
+                                        </p:tgtEl>
+                                        <p:attrNameLst>
+                                          <p:attrName>style.visibility</p:attrName>
+                                        </p:attrNameLst>
+                                      </p:cBhvr>
+                                      <p:to>
+                                        <p:strVal val="visible"/>
+                                      </p:to>
+                                    </p:set>
+                                    <p:animEffect transition="in" filter="fade">
+                                      <p:cBhvr>
+                                        <p:cTn id="15" dur="500"/>
+                                        <p:tgtEl>
+                                          <p:spTgt spid="5"/>
+                                        </p:tgtEl>
+                                      </p:cBhvr>
+                                    </p:animEffect>
+                                  </p:childTnLst>
+                                </p:cTn>
+                              </p:par>
+                            </p:childTnLst>
+                          </p:cTn>
+                        </p:par>
+                      </p:childTnLst>
+                    </p:cTn>
+                  </p:par>
+                </p:childTnLst>
+              </p:cTn>
+              <p:prevCondLst>
+                <p:cond evt="onPrev" delay="0">
+                  <p:tgtEl>
+                    <p:sldTgt/>
+                  </p:tgtEl>
+                </p:cond>
+              </p:prevCondLst>
+              <p:nextCondLst>
+                <p:cond evt="onNext" delay="0">
+                  <p:tgtEl>
+                    <p:sldTgt/>
+                  </p:tgtEl>
+                </p:cond>
+              </p:nextCondLst>
+            </p:seq>
+          </p:childTnLst>
+        </p:cTn>
+      </p:par>
+    </p:tnLst>
+    <p:bldLst>
+      <p:bldP spid="4" grpId="0"/>
+      <p:bldP spid="5" grpId="0"/>
+    </p:bldLst>
+  </p:timing>
 </p:sld>
 </file>
 
@@ -8036,14 +7481,14 @@
       </p:grpSpPr>
       <p:sp>
         <p:nvSpPr>
-          <p:cNvPr id="2" name="Text 0"/>
-          <p:cNvSpPr txBox="1"/>
+          <p:cNvPr id="2" name="Title"/>
+          <p:cNvSpPr/>
           <p:nvPr/>
         </p:nvSpPr>
         <p:spPr>
           <a:xfrm>
-            <a:off x="457200" y="274320"/>
-            <a:ext cx="8229600" cy="685800"/>
+            <a:off x="548640" y="320040"/>
+            <a:ext cx="8046720" cy="640080"/>
           </a:xfrm>
           <a:prstGeom prst="rect">
             <a:avLst/>
@@ -8061,11 +7506,11 @@
             <a:r>
               <a:rPr lang="en-US" sz="3000" b="1" dirty="0">
                 <a:solidFill>
-                  <a:srgbClr val="0E2340"/>
+                  <a:srgbClr val="000000"/>
                 </a:solidFill>
-                <a:latin typeface="Cambria" pitchFamily="34" charset="0"/>
-                <a:ea typeface="Cambria" pitchFamily="34" charset="-122"/>
-                <a:cs typeface="Cambria" pitchFamily="34" charset="-120"/>
+                <a:latin typeface="Calibri" pitchFamily="34" charset="0"/>
+                <a:ea typeface="Calibri" pitchFamily="34" charset="-122"/>
+                <a:cs typeface="Calibri" pitchFamily="34" charset="-120"/>
               </a:rPr>
               <a:t>Queries: a quadratic reduction</a:t>
             </a:r>
@@ -8075,13 +7520,13 @@
       </p:sp>
       <p:graphicFrame>
         <p:nvGraphicFramePr>
-          <p:cNvPr id="3" name="Chart 0" descr=""/>
+          <p:cNvPr id="3" name="anim1" descr=""/>
           <p:cNvGraphicFramePr/>
           <p:nvPr/>
         </p:nvGraphicFramePr>
         <p:xfrm>
-          <a:off x="365760" y="1097280"/>
-          <a:ext cx="5577840" cy="3657600"/>
+          <a:off x="457200" y="1097280"/>
+          <a:ext cx="5394960" cy="3566160"/>
         </p:xfrm>
         <a:graphic xmlns:a="http://schemas.openxmlformats.org/drawingml/2006/main">
           <a:graphicData uri="http://schemas.openxmlformats.org/drawingml/2006/chart">
@@ -8091,78 +7536,14 @@
       </p:graphicFrame>
       <p:sp>
         <p:nvSpPr>
-          <p:cNvPr id="4" name="Shape 1"/>
+          <p:cNvPr id="4" name="anim2"/>
           <p:cNvSpPr/>
           <p:nvPr/>
         </p:nvSpPr>
         <p:spPr>
           <a:xfrm>
-            <a:off x="6309360" y="1188720"/>
-            <a:ext cx="2377440" cy="1051560"/>
-          </a:xfrm>
-          <a:prstGeom prst="rect">
-            <a:avLst/>
-          </a:prstGeom>
-          <a:solidFill>
-            <a:srgbClr val="F4F5F7"/>
-          </a:solidFill>
-          <a:ln w="12700">
-            <a:solidFill>
-              <a:srgbClr val="F4F5F7"/>
-            </a:solidFill>
-            <a:prstDash val="solid"/>
-          </a:ln>
-        </p:spPr>
-      </p:sp>
-      <p:sp>
-        <p:nvSpPr>
-          <p:cNvPr id="5" name="Text 2"/>
-          <p:cNvSpPr txBox="1"/>
-          <p:nvPr/>
-        </p:nvSpPr>
-        <p:spPr>
-          <a:xfrm>
-            <a:off x="6492240" y="1261872"/>
-            <a:ext cx="2011680" cy="548640"/>
-          </a:xfrm>
-          <a:prstGeom prst="rect">
-            <a:avLst/>
-          </a:prstGeom>
-          <a:noFill/>
-          <a:ln/>
-        </p:spPr>
-        <p:txBody>
-          <a:bodyPr wrap="square" lIns="0" tIns="0" rIns="0" bIns="0" rtlCol="0" anchor="ctr"/>
-          <a:lstStyle/>
-          <a:p>
-            <a:pPr indent="0" marL="0">
-              <a:buNone/>
-            </a:pPr>
-            <a:r>
-              <a:rPr lang="en-US" sz="3400" b="1" dirty="0">
-                <a:solidFill>
-                  <a:srgbClr val="1D3F6E"/>
-                </a:solidFill>
-                <a:latin typeface="Cambria" pitchFamily="34" charset="0"/>
-                <a:ea typeface="Cambria" pitchFamily="34" charset="-122"/>
-                <a:cs typeface="Cambria" pitchFamily="34" charset="-120"/>
-              </a:rPr>
-              <a:t>82×</a:t>
-            </a:r>
-            <a:endParaRPr lang="en-US" sz="3400" dirty="0"/>
-          </a:p>
-        </p:txBody>
-      </p:sp>
-      <p:sp>
-        <p:nvSpPr>
-          <p:cNvPr id="6" name="Text 3"/>
-          <p:cNvSpPr txBox="1"/>
-          <p:nvPr/>
-        </p:nvSpPr>
-        <p:spPr>
-          <a:xfrm>
-            <a:off x="6492240" y="1810512"/>
-            <a:ext cx="2011680" cy="384048"/>
+            <a:off x="6217920" y="1280160"/>
+            <a:ext cx="2468880" cy="3291840"/>
           </a:xfrm>
           <a:prstGeom prst="rect">
             <a:avLst/>
@@ -8178,9 +7559,29 @@
               <a:buNone/>
             </a:pPr>
             <a:r>
-              <a:rPr lang="en-US" sz="1150" dirty="0">
+              <a:rPr lang="en-US" sz="2600" b="1" dirty="0">
                 <a:solidFill>
-                  <a:srgbClr val="5B6472"/>
+                  <a:srgbClr val="000000"/>
+                </a:solidFill>
+                <a:latin typeface="Calibri" pitchFamily="34" charset="0"/>
+                <a:ea typeface="Calibri" pitchFamily="34" charset="-122"/>
+                <a:cs typeface="Calibri" pitchFamily="34" charset="-120"/>
+              </a:rPr>
+              <a:t>82×</a:t>
+            </a:r>
+            <a:endParaRPr lang="en-US" sz="2600" dirty="0"/>
+          </a:p>
+          <a:p>
+            <a:pPr indent="0" marL="0">
+              <a:spcAft>
+                <a:spcPts val="1600"/>
+              </a:spcAft>
+              <a:buNone/>
+            </a:pPr>
+            <a:r>
+              <a:rPr lang="en-US" sz="1400" dirty="0">
+                <a:solidFill>
+                  <a:srgbClr val="000000"/>
                 </a:solidFill>
                 <a:latin typeface="Calibri" pitchFamily="34" charset="0"/>
                 <a:ea typeface="Calibri" pitchFamily="34" charset="-122"/>
@@ -8188,102 +7589,36 @@
               </a:rPr>
               <a:t>fewer queries at n = 14 (100 vs 8,199)</a:t>
             </a:r>
-            <a:endParaRPr lang="en-US" sz="1150" dirty="0"/>
-          </a:p>
-        </p:txBody>
-      </p:sp>
-      <p:sp>
-        <p:nvSpPr>
-          <p:cNvPr id="7" name="Shape 4"/>
-          <p:cNvSpPr/>
-          <p:nvPr/>
-        </p:nvSpPr>
-        <p:spPr>
-          <a:xfrm>
-            <a:off x="6309360" y="2377440"/>
-            <a:ext cx="2377440" cy="1051560"/>
-          </a:xfrm>
-          <a:prstGeom prst="rect">
-            <a:avLst/>
-          </a:prstGeom>
-          <a:solidFill>
-            <a:srgbClr val="F4F5F7"/>
-          </a:solidFill>
-          <a:ln w="12700">
-            <a:solidFill>
-              <a:srgbClr val="F4F5F7"/>
-            </a:solidFill>
-            <a:prstDash val="solid"/>
-          </a:ln>
-        </p:spPr>
-      </p:sp>
-      <p:sp>
-        <p:nvSpPr>
-          <p:cNvPr id="8" name="Text 5"/>
-          <p:cNvSpPr txBox="1"/>
-          <p:nvPr/>
-        </p:nvSpPr>
-        <p:spPr>
-          <a:xfrm>
-            <a:off x="6492240" y="2450592"/>
-            <a:ext cx="2011680" cy="548640"/>
-          </a:xfrm>
-          <a:prstGeom prst="rect">
-            <a:avLst/>
-          </a:prstGeom>
-          <a:noFill/>
-          <a:ln/>
-        </p:spPr>
-        <p:txBody>
-          <a:bodyPr wrap="square" lIns="0" tIns="0" rIns="0" bIns="0" rtlCol="0" anchor="ctr"/>
-          <a:lstStyle/>
+            <a:endParaRPr lang="en-US" sz="2600" dirty="0"/>
+          </a:p>
           <a:p>
             <a:pPr indent="0" marL="0">
               <a:buNone/>
             </a:pPr>
             <a:r>
-              <a:rPr lang="en-US" sz="3400" b="1" dirty="0">
+              <a:rPr lang="en-US" sz="2600" b="1" dirty="0">
                 <a:solidFill>
-                  <a:srgbClr val="1D3F6E"/>
+                  <a:srgbClr val="000000"/>
                 </a:solidFill>
-                <a:latin typeface="Cambria" pitchFamily="34" charset="0"/>
-                <a:ea typeface="Cambria" pitchFamily="34" charset="-122"/>
-                <a:cs typeface="Cambria" pitchFamily="34" charset="-120"/>
+                <a:latin typeface="Calibri" pitchFamily="34" charset="0"/>
+                <a:ea typeface="Calibri" pitchFamily="34" charset="-122"/>
+                <a:cs typeface="Calibri" pitchFamily="34" charset="-120"/>
               </a:rPr>
               <a:t>≈ 650×</a:t>
             </a:r>
-            <a:endParaRPr lang="en-US" sz="3400" dirty="0"/>
-          </a:p>
-        </p:txBody>
-      </p:sp>
-      <p:sp>
-        <p:nvSpPr>
-          <p:cNvPr id="9" name="Text 6"/>
-          <p:cNvSpPr txBox="1"/>
-          <p:nvPr/>
-        </p:nvSpPr>
-        <p:spPr>
-          <a:xfrm>
-            <a:off x="6492240" y="2999232"/>
-            <a:ext cx="2011680" cy="384048"/>
-          </a:xfrm>
-          <a:prstGeom prst="rect">
-            <a:avLst/>
-          </a:prstGeom>
-          <a:noFill/>
-          <a:ln/>
-        </p:spPr>
-        <p:txBody>
-          <a:bodyPr wrap="square" lIns="0" tIns="0" rIns="0" bIns="0" rtlCol="0" anchor="t"/>
-          <a:lstStyle/>
+            <a:endParaRPr lang="en-US" sz="2600" dirty="0"/>
+          </a:p>
           <a:p>
             <a:pPr indent="0" marL="0">
+              <a:spcAft>
+                <a:spcPts val="1600"/>
+              </a:spcAft>
               <a:buNone/>
             </a:pPr>
             <a:r>
-              <a:rPr lang="en-US" sz="1150" dirty="0">
+              <a:rPr lang="en-US" sz="1400" dirty="0">
                 <a:solidFill>
-                  <a:srgbClr val="5B6472"/>
+                  <a:srgbClr val="000000"/>
                 </a:solidFill>
                 <a:latin typeface="Calibri" pitchFamily="34" charset="0"/>
                 <a:ea typeface="Calibri" pitchFamily="34" charset="-122"/>
@@ -8291,102 +7626,33 @@
               </a:rPr>
               <a:t>at n = 20 (804 vs 524,288)</a:t>
             </a:r>
-            <a:endParaRPr lang="en-US" sz="1150" dirty="0"/>
-          </a:p>
-        </p:txBody>
-      </p:sp>
-      <p:sp>
-        <p:nvSpPr>
-          <p:cNvPr id="10" name="Shape 7"/>
-          <p:cNvSpPr/>
-          <p:nvPr/>
-        </p:nvSpPr>
-        <p:spPr>
-          <a:xfrm>
-            <a:off x="6309360" y="3566160"/>
-            <a:ext cx="2377440" cy="1051560"/>
-          </a:xfrm>
-          <a:prstGeom prst="rect">
-            <a:avLst/>
-          </a:prstGeom>
-          <a:solidFill>
-            <a:srgbClr val="F4F5F7"/>
-          </a:solidFill>
-          <a:ln w="12700">
-            <a:solidFill>
-              <a:srgbClr val="F4F5F7"/>
-            </a:solidFill>
-            <a:prstDash val="solid"/>
-          </a:ln>
-        </p:spPr>
-      </p:sp>
-      <p:sp>
-        <p:nvSpPr>
-          <p:cNvPr id="11" name="Text 8"/>
-          <p:cNvSpPr txBox="1"/>
-          <p:nvPr/>
-        </p:nvSpPr>
-        <p:spPr>
-          <a:xfrm>
-            <a:off x="6492240" y="3639312"/>
-            <a:ext cx="2011680" cy="548640"/>
-          </a:xfrm>
-          <a:prstGeom prst="rect">
-            <a:avLst/>
-          </a:prstGeom>
-          <a:noFill/>
-          <a:ln/>
-        </p:spPr>
-        <p:txBody>
-          <a:bodyPr wrap="square" lIns="0" tIns="0" rIns="0" bIns="0" rtlCol="0" anchor="ctr"/>
-          <a:lstStyle/>
+            <a:endParaRPr lang="en-US" sz="2600" dirty="0"/>
+          </a:p>
           <a:p>
             <a:pPr indent="0" marL="0">
               <a:buNone/>
             </a:pPr>
             <a:r>
-              <a:rPr lang="en-US" sz="3400" b="1" dirty="0">
+              <a:rPr lang="en-US" sz="2600" b="1" dirty="0">
                 <a:solidFill>
-                  <a:srgbClr val="B3261E"/>
+                  <a:srgbClr val="000000"/>
                 </a:solidFill>
-                <a:latin typeface="Cambria" pitchFamily="34" charset="0"/>
-                <a:ea typeface="Cambria" pitchFamily="34" charset="-122"/>
-                <a:cs typeface="Cambria" pitchFamily="34" charset="-120"/>
+                <a:latin typeface="Calibri" pitchFamily="34" charset="0"/>
+                <a:ea typeface="Calibri" pitchFamily="34" charset="-122"/>
+                <a:cs typeface="Calibri" pitchFamily="34" charset="-120"/>
               </a:rPr>
               <a:t>≥ 99.5%</a:t>
             </a:r>
-            <a:endParaRPr lang="en-US" sz="3400" dirty="0"/>
-          </a:p>
-        </p:txBody>
-      </p:sp>
-      <p:sp>
-        <p:nvSpPr>
-          <p:cNvPr id="12" name="Text 9"/>
-          <p:cNvSpPr txBox="1"/>
-          <p:nvPr/>
-        </p:nvSpPr>
-        <p:spPr>
-          <a:xfrm>
-            <a:off x="6492240" y="4187952"/>
-            <a:ext cx="2011680" cy="384048"/>
-          </a:xfrm>
-          <a:prstGeom prst="rect">
-            <a:avLst/>
-          </a:prstGeom>
-          <a:noFill/>
-          <a:ln/>
-        </p:spPr>
-        <p:txBody>
-          <a:bodyPr wrap="square" lIns="0" tIns="0" rIns="0" bIns="0" rtlCol="0" anchor="t"/>
-          <a:lstStyle/>
+            <a:endParaRPr lang="en-US" sz="2600" dirty="0"/>
+          </a:p>
           <a:p>
             <a:pPr indent="0" marL="0">
               <a:buNone/>
             </a:pPr>
             <a:r>
-              <a:rPr lang="en-US" sz="1150" dirty="0">
+              <a:rPr lang="en-US" sz="1400" dirty="0">
                 <a:solidFill>
-                  <a:srgbClr val="5B6472"/>
+                  <a:srgbClr val="000000"/>
                 </a:solidFill>
                 <a:latin typeface="Calibri" pitchFamily="34" charset="0"/>
                 <a:ea typeface="Calibri" pitchFamily="34" charset="-122"/>
@@ -8394,7 +7660,55 @@
               </a:rPr>
               <a:t>success probability for every n ≥ 5</a:t>
             </a:r>
-            <a:endParaRPr lang="en-US" sz="1150" dirty="0"/>
+            <a:endParaRPr lang="en-US" sz="2600" dirty="0"/>
+          </a:p>
+        </p:txBody>
+      </p:sp>
+      <p:sp>
+        <p:nvSpPr>
+          <p:cNvPr id="25" name="Slide Number Placeholder 0"/>
+          <p:cNvSpPr>
+            <a:spLocks noGrp="1"/>
+          </p:cNvSpPr>
+          <p:nvPr>
+            <p:ph type="sldNum" sz="quarter" idx="4294967295"/>
+          </p:nvPr>
+        </p:nvSpPr>
+        <p:spPr>
+          <a:xfrm>
+            <a:off x="8229600" y="4709160"/>
+            <a:ext cx="457200" cy="274320"/>
+          </a:xfrm>
+          <a:prstGeom prst="rect">
+            <a:avLst/>
+          </a:prstGeom>
+          <a:extLst>
+            <a:ext uri="{C572A759-6A51-4108-AA02-DFA0A04FC94B}">
+              <ma14:wrappingTextBoxFlag xmlns:ma14="http://schemas.microsoft.com/office/mac/drawingml/2011/main" val="0"/>
+            </a:ext>
+          </a:extLst>
+        </p:spPr>
+        <p:txBody>
+          <a:bodyPr/>
+          <a:lstStyle>
+            <a:lvl1pPr>
+              <a:defRPr sz="1000">
+                <a:solidFill>
+                  <a:srgbClr val="000000"/>
+                </a:solidFill>
+                <a:latin typeface="Calibri"/>
+                <a:ea typeface="Calibri"/>
+                <a:cs typeface="Calibri"/>
+              </a:defRPr>
+            </a:lvl1pPr>
+          </a:lstStyle>
+          <a:p>
+            <a:pPr algn="r"/>
+            <a:fld id="{F7021451-1387-4CA6-816F-3879F97B5CBC}" type="slidenum">
+              <a:rPr b="0" lang="en-US"/>
+              <a:t>7</a:t>
+            </a:fld>
+            <a:endParaRPr lang="en-US"/>
           </a:p>
         </p:txBody>
       </p:sp>
@@ -8403,6 +7717,142 @@
   <p:clrMapOvr>
     <a:masterClrMapping/>
   </p:clrMapOvr>
+  <p:transition spd="med">
+    <p:fade/>
+  </p:transition>
+  <p:timing>
+    <p:tnLst>
+      <p:par>
+        <p:cTn id="1" dur="indefinite" restart="never" nodeType="tmRoot">
+          <p:childTnLst>
+            <p:seq concurrent="1" nextAc="seek">
+              <p:cTn id="2" dur="indefinite" nodeType="mainSeq">
+                <p:childTnLst>
+                  <p:par>
+                    <p:cTn id="3" fill="hold">
+                      <p:stCondLst>
+                        <p:cond delay="indefinite"/>
+                        <p:cond evt="onBegin" delay="0">
+                          <p:tn val="2"/>
+                        </p:cond>
+                      </p:stCondLst>
+                      <p:childTnLst>
+                        <p:par>
+                          <p:cTn id="4" fill="hold">
+                            <p:stCondLst>
+                              <p:cond delay="0"/>
+                            </p:stCondLst>
+                            <p:childTnLst>
+                              <p:par>
+                                <p:cTn id="5" presetID="10" presetClass="entr" presetSubtype="0" fill="hold" nodeType="afterEffect">
+                                  <p:stCondLst>
+                                    <p:cond delay="0"/>
+                                  </p:stCondLst>
+                                  <p:childTnLst>
+                                    <p:set>
+                                      <p:cBhvr>
+                                        <p:cTn id="6" dur="1" fill="hold">
+                                          <p:stCondLst>
+                                            <p:cond delay="0"/>
+                                          </p:stCondLst>
+                                        </p:cTn>
+                                        <p:tgtEl>
+                                          <p:spTgt spid="3"/>
+                                        </p:tgtEl>
+                                        <p:attrNameLst>
+                                          <p:attrName>style.visibility</p:attrName>
+                                        </p:attrNameLst>
+                                      </p:cBhvr>
+                                      <p:to>
+                                        <p:strVal val="visible"/>
+                                      </p:to>
+                                    </p:set>
+                                    <p:animEffect transition="in" filter="fade">
+                                      <p:cBhvr>
+                                        <p:cTn id="7" dur="500"/>
+                                        <p:tgtEl>
+                                          <p:spTgt spid="3"/>
+                                        </p:tgtEl>
+                                      </p:cBhvr>
+                                    </p:animEffect>
+                                  </p:childTnLst>
+                                </p:cTn>
+                              </p:par>
+                            </p:childTnLst>
+                          </p:cTn>
+                        </p:par>
+                        <p:par>
+                          <p:cTn id="8" fill="hold">
+                            <p:stCondLst>
+                              <p:cond delay="500"/>
+                            </p:stCondLst>
+                            <p:childTnLst>
+                              <p:par>
+                                <p:cTn id="9" presetID="10" presetClass="entr" presetSubtype="0" fill="hold" grpId="0" nodeType="afterEffect">
+                                  <p:stCondLst>
+                                    <p:cond delay="0"/>
+                                  </p:stCondLst>
+                                  <p:childTnLst>
+                                    <p:set>
+                                      <p:cBhvr>
+                                        <p:cTn id="10" dur="1" fill="hold">
+                                          <p:stCondLst>
+                                            <p:cond delay="0"/>
+                                          </p:stCondLst>
+                                        </p:cTn>
+                                        <p:tgtEl>
+                                          <p:spTgt spid="4"/>
+                                        </p:tgtEl>
+                                        <p:attrNameLst>
+                                          <p:attrName>style.visibility</p:attrName>
+                                        </p:attrNameLst>
+                                      </p:cBhvr>
+                                      <p:to>
+                                        <p:strVal val="visible"/>
+                                      </p:to>
+                                    </p:set>
+                                    <p:animEffect transition="in" filter="fade">
+                                      <p:cBhvr>
+                                        <p:cTn id="11" dur="500"/>
+                                        <p:tgtEl>
+                                          <p:spTgt spid="4"/>
+                                        </p:tgtEl>
+                                      </p:cBhvr>
+                                    </p:animEffect>
+                                  </p:childTnLst>
+                                </p:cTn>
+                              </p:par>
+                            </p:childTnLst>
+                          </p:cTn>
+                        </p:par>
+                      </p:childTnLst>
+                    </p:cTn>
+                  </p:par>
+                </p:childTnLst>
+              </p:cTn>
+              <p:prevCondLst>
+                <p:cond evt="onPrev" delay="0">
+                  <p:tgtEl>
+                    <p:sldTgt/>
+                  </p:tgtEl>
+                </p:cond>
+              </p:prevCondLst>
+              <p:nextCondLst>
+                <p:cond evt="onNext" delay="0">
+                  <p:tgtEl>
+                    <p:sldTgt/>
+                  </p:tgtEl>
+                </p:cond>
+              </p:nextCondLst>
+            </p:seq>
+          </p:childTnLst>
+        </p:cTn>
+      </p:par>
+    </p:tnLst>
+    <p:bldLst>
+      <p:bldP spid="4" grpId="0"/>
+    </p:bldLst>
+  </p:timing>
 </p:sld>
 </file>
 
@@ -8432,14 +7882,14 @@
       </p:grpSpPr>
       <p:sp>
         <p:nvSpPr>
-          <p:cNvPr id="2" name="Text 0"/>
-          <p:cNvSpPr txBox="1"/>
+          <p:cNvPr id="2" name="Title"/>
+          <p:cNvSpPr/>
           <p:nvPr/>
         </p:nvSpPr>
         <p:spPr>
           <a:xfrm>
-            <a:off x="457200" y="274320"/>
-            <a:ext cx="8229600" cy="685800"/>
+            <a:off x="548640" y="320040"/>
+            <a:ext cx="8046720" cy="640080"/>
           </a:xfrm>
           <a:prstGeom prst="rect">
             <a:avLst/>
@@ -8457,11 +7907,11 @@
             <a:r>
               <a:rPr lang="en-US" sz="3000" b="1" dirty="0">
                 <a:solidFill>
-                  <a:srgbClr val="0E2340"/>
+                  <a:srgbClr val="000000"/>
                 </a:solidFill>
-                <a:latin typeface="Cambria" pitchFamily="34" charset="0"/>
-                <a:ea typeface="Cambria" pitchFamily="34" charset="-122"/>
-                <a:cs typeface="Cambria" pitchFamily="34" charset="-120"/>
+                <a:latin typeface="Calibri" pitchFamily="34" charset="0"/>
+                <a:ea typeface="Calibri" pitchFamily="34" charset="-122"/>
+                <a:cs typeface="Calibri" pitchFamily="34" charset="-120"/>
               </a:rPr>
               <a:t>A simulator cannot show the speed-up</a:t>
             </a:r>
@@ -8471,7 +7921,7 @@
       </p:sp>
       <p:pic>
         <p:nvPicPr>
-          <p:cNvPr id="3" name="Image 0" descr="fig_time.png">    </p:cNvPr>
+          <p:cNvPr id="3" name="anim1" descr="fig_time.png">    </p:cNvPr>
           <p:cNvPicPr>
             <a:picLocks noChangeAspect="1"/>
           </p:cNvPicPr>
@@ -8485,8 +7935,8 @@
         </p:blipFill>
         <p:spPr>
           <a:xfrm>
-            <a:off x="457200" y="1280160"/>
-            <a:ext cx="5120640" cy="3014749"/>
+            <a:off x="548640" y="1280160"/>
+            <a:ext cx="5029200" cy="2960914"/>
           </a:xfrm>
           <a:prstGeom prst="rect">
             <a:avLst/>
@@ -8495,117 +7945,14 @@
       </p:pic>
       <p:sp>
         <p:nvSpPr>
-          <p:cNvPr id="4" name="Text 1"/>
-          <p:cNvSpPr txBox="1"/>
-          <p:nvPr/>
-        </p:nvSpPr>
-        <p:spPr>
-          <a:xfrm>
-            <a:off x="457200" y="4386349"/>
-            <a:ext cx="5120640" cy="274320"/>
-          </a:xfrm>
-          <a:prstGeom prst="rect">
-            <a:avLst/>
-          </a:prstGeom>
-          <a:noFill/>
-          <a:ln/>
-        </p:spPr>
-        <p:txBody>
-          <a:bodyPr wrap="square" lIns="0" tIns="0" rIns="0" bIns="0" rtlCol="0" anchor="ctr"/>
-          <a:lstStyle/>
-          <a:p>
-            <a:pPr indent="0" marL="0">
-              <a:buNone/>
-            </a:pPr>
-            <a:r>
-              <a:rPr lang="en-US" sz="1150" dirty="0">
-                <a:solidFill>
-                  <a:srgbClr val="5B6472"/>
-                </a:solidFill>
-                <a:latin typeface="Calibri" pitchFamily="34" charset="0"/>
-                <a:ea typeface="Calibri" pitchFamily="34" charset="-122"/>
-                <a:cs typeface="Calibri" pitchFamily="34" charset="-120"/>
-              </a:rPr>
-              <a:t>Wall-clock time on the same CPU, log scale.</a:t>
-            </a:r>
-            <a:endParaRPr lang="en-US" sz="1150" dirty="0"/>
-          </a:p>
-        </p:txBody>
-      </p:sp>
-      <p:sp>
-        <p:nvSpPr>
-          <p:cNvPr id="5" name="Shape 2"/>
+          <p:cNvPr id="4" name="anim1"/>
           <p:cNvSpPr/>
           <p:nvPr/>
         </p:nvSpPr>
         <p:spPr>
           <a:xfrm>
-            <a:off x="5943600" y="1280160"/>
-            <a:ext cx="2743200" cy="1463040"/>
-          </a:xfrm>
-          <a:prstGeom prst="rect">
-            <a:avLst/>
-          </a:prstGeom>
-          <a:solidFill>
-            <a:srgbClr val="F4F5F7"/>
-          </a:solidFill>
-          <a:ln w="12700">
-            <a:solidFill>
-              <a:srgbClr val="F4F5F7"/>
-            </a:solidFill>
-            <a:prstDash val="solid"/>
-          </a:ln>
-        </p:spPr>
-      </p:sp>
-      <p:sp>
-        <p:nvSpPr>
-          <p:cNvPr id="6" name="Text 3"/>
-          <p:cNvSpPr txBox="1"/>
-          <p:nvPr/>
-        </p:nvSpPr>
-        <p:spPr>
-          <a:xfrm>
-            <a:off x="6126480" y="1353312"/>
-            <a:ext cx="2377440" cy="548640"/>
-          </a:xfrm>
-          <a:prstGeom prst="rect">
-            <a:avLst/>
-          </a:prstGeom>
-          <a:noFill/>
-          <a:ln/>
-        </p:spPr>
-        <p:txBody>
-          <a:bodyPr wrap="square" lIns="0" tIns="0" rIns="0" bIns="0" rtlCol="0" anchor="ctr"/>
-          <a:lstStyle/>
-          <a:p>
-            <a:pPr indent="0" marL="0">
-              <a:buNone/>
-            </a:pPr>
-            <a:r>
-              <a:rPr lang="en-US" sz="3400" b="1" dirty="0">
-                <a:solidFill>
-                  <a:srgbClr val="B3261E"/>
-                </a:solidFill>
-                <a:latin typeface="Cambria" pitchFamily="34" charset="0"/>
-                <a:ea typeface="Cambria" pitchFamily="34" charset="-122"/>
-                <a:cs typeface="Cambria" pitchFamily="34" charset="-120"/>
-              </a:rPr>
-              <a:t>3,297×</a:t>
-            </a:r>
-            <a:endParaRPr lang="en-US" sz="3400" dirty="0"/>
-          </a:p>
-        </p:txBody>
-      </p:sp>
-      <p:sp>
-        <p:nvSpPr>
-          <p:cNvPr id="7" name="Text 4"/>
-          <p:cNvSpPr txBox="1"/>
-          <p:nvPr/>
-        </p:nvSpPr>
-        <p:spPr>
-          <a:xfrm>
-            <a:off x="6126480" y="1901952"/>
-            <a:ext cx="2377440" cy="795528"/>
+            <a:off x="548640" y="4332514"/>
+            <a:ext cx="5029200" cy="274320"/>
           </a:xfrm>
           <a:prstGeom prst="rect">
             <a:avLst/>
@@ -8621,30 +7968,30 @@
               <a:buNone/>
             </a:pPr>
             <a:r>
-              <a:rPr lang="en-US" sz="1150" dirty="0">
+              <a:rPr lang="en-US" sz="1200" dirty="0">
                 <a:solidFill>
-                  <a:srgbClr val="5B6472"/>
+                  <a:srgbClr val="000000"/>
                 </a:solidFill>
                 <a:latin typeface="Calibri" pitchFamily="34" charset="0"/>
                 <a:ea typeface="Calibri" pitchFamily="34" charset="-122"/>
                 <a:cs typeface="Calibri" pitchFamily="34" charset="-120"/>
               </a:rPr>
-              <a:t>slower to simulate than to search classically at n = 14 (139 ms vs 0.042 ms)</a:t>
+              <a:t>Wall-clock time on the same CPU (log scale)</a:t>
             </a:r>
-            <a:endParaRPr lang="en-US" sz="1150" dirty="0"/>
+            <a:endParaRPr lang="en-US" sz="1200" dirty="0"/>
           </a:p>
         </p:txBody>
       </p:sp>
       <p:sp>
         <p:nvSpPr>
-          <p:cNvPr id="8" name="Text 5"/>
-          <p:cNvSpPr txBox="1"/>
+          <p:cNvPr id="5" name="anim2"/>
+          <p:cNvSpPr/>
           <p:nvPr/>
         </p:nvSpPr>
         <p:spPr>
           <a:xfrm>
-            <a:off x="5943600" y="2926080"/>
-            <a:ext cx="2743200" cy="1737360"/>
+            <a:off x="5943600" y="1371600"/>
+            <a:ext cx="2743200" cy="3108960"/>
           </a:xfrm>
           <a:prstGeom prst="rect">
             <a:avLst/>
@@ -8656,67 +8003,112 @@
           <a:bodyPr wrap="square" lIns="0" tIns="0" rIns="0" bIns="0" rtlCol="0" anchor="t"/>
           <a:lstStyle/>
           <a:p>
-            <a:pPr marL="342900" indent="-342900">
+            <a:pPr marL="228600" indent="-228600">
               <a:spcAft>
-                <a:spcPts val="600"/>
+                <a:spcPts val="1200"/>
               </a:spcAft>
               <a:buSzPct val="100000"/>
               <a:buChar char="•"/>
             </a:pPr>
             <a:r>
-              <a:rPr lang="en-US" sz="1300" dirty="0">
+              <a:rPr lang="en-US" sz="1600" dirty="0">
                 <a:solidFill>
-                  <a:srgbClr val="14181F"/>
+                  <a:srgbClr val="000000"/>
                 </a:solidFill>
                 <a:latin typeface="Calibri" pitchFamily="34" charset="0"/>
                 <a:ea typeface="Calibri" pitchFamily="34" charset="-122"/>
                 <a:cs typeface="Calibri" pitchFamily="34" charset="-120"/>
               </a:rPr>
-              <a:t>The simulator does 2ⁿ operations for every gate.</a:t>
+              <a:t>Simulating Grover is more than 3,000× slower than classical search at n = 14</a:t>
             </a:r>
-            <a:endParaRPr lang="en-US" sz="1300" dirty="0"/>
-          </a:p>
-          <a:p>
-            <a:pPr marL="342900" indent="-342900">
+            <a:endParaRPr lang="en-US" sz="1600" dirty="0"/>
+          </a:p>
+          <a:p>
+            <a:pPr marL="228600" indent="-228600">
               <a:spcAft>
-                <a:spcPts val="600"/>
+                <a:spcPts val="1200"/>
               </a:spcAft>
               <a:buSzPct val="100000"/>
               <a:buChar char="•"/>
             </a:pPr>
             <a:r>
-              <a:rPr lang="en-US" sz="1300" dirty="0">
+              <a:rPr lang="en-US" sz="1600" dirty="0">
                 <a:solidFill>
-                  <a:srgbClr val="14181F"/>
+                  <a:srgbClr val="000000"/>
                 </a:solidFill>
                 <a:latin typeface="Calibri" pitchFamily="34" charset="0"/>
                 <a:ea typeface="Calibri" pitchFamily="34" charset="-122"/>
                 <a:cs typeface="Calibri" pitchFamily="34" charset="-120"/>
               </a:rPr>
-              <a:t>Simulation cost grows much faster with n than classical search does.</a:t>
+              <a:t>A simulator does 2ⁿ operations for every gate</a:t>
             </a:r>
-            <a:endParaRPr lang="en-US" sz="1300" dirty="0"/>
-          </a:p>
-          <a:p>
-            <a:pPr marL="342900" indent="-342900">
-              <a:spcAft>
-                <a:spcPts val="600"/>
-              </a:spcAft>
+            <a:endParaRPr lang="en-US" sz="1600" dirty="0"/>
+          </a:p>
+          <a:p>
+            <a:pPr marL="228600" indent="-228600">
               <a:buSzPct val="100000"/>
               <a:buChar char="•"/>
             </a:pPr>
             <a:r>
-              <a:rPr lang="en-US" sz="1300" dirty="0">
+              <a:rPr lang="en-US" sz="1600" dirty="0">
                 <a:solidFill>
-                  <a:srgbClr val="14181F"/>
+                  <a:srgbClr val="000000"/>
                 </a:solidFill>
                 <a:latin typeface="Calibri" pitchFamily="34" charset="0"/>
                 <a:ea typeface="Calibri" pitchFamily="34" charset="-122"/>
                 <a:cs typeface="Calibri" pitchFamily="34" charset="-120"/>
               </a:rPr>
-              <a:t>Only real quantum hardware can turn fewer queries into less time.</a:t>
+              <a:t>Only quantum hardware can turn fewer queries into less time</a:t>
             </a:r>
-            <a:endParaRPr lang="en-US" sz="1300" dirty="0"/>
+            <a:endParaRPr lang="en-US" sz="1600" dirty="0"/>
+          </a:p>
+        </p:txBody>
+      </p:sp>
+      <p:sp>
+        <p:nvSpPr>
+          <p:cNvPr id="25" name="Slide Number Placeholder 0"/>
+          <p:cNvSpPr>
+            <a:spLocks noGrp="1"/>
+          </p:cNvSpPr>
+          <p:nvPr>
+            <p:ph type="sldNum" sz="quarter" idx="4294967295"/>
+          </p:nvPr>
+        </p:nvSpPr>
+        <p:spPr>
+          <a:xfrm>
+            <a:off x="8229600" y="4709160"/>
+            <a:ext cx="457200" cy="274320"/>
+          </a:xfrm>
+          <a:prstGeom prst="rect">
+            <a:avLst/>
+          </a:prstGeom>
+          <a:extLst>
+            <a:ext uri="{C572A759-6A51-4108-AA02-DFA0A04FC94B}">
+              <ma14:wrappingTextBoxFlag xmlns:ma14="http://schemas.microsoft.com/office/mac/drawingml/2011/main" val="0"/>
+            </a:ext>
+          </a:extLst>
+        </p:spPr>
+        <p:txBody>
+          <a:bodyPr/>
+          <a:lstStyle>
+            <a:lvl1pPr>
+              <a:defRPr sz="1000">
+                <a:solidFill>
+                  <a:srgbClr val="000000"/>
+                </a:solidFill>
+                <a:latin typeface="Calibri"/>
+                <a:ea typeface="Calibri"/>
+                <a:cs typeface="Calibri"/>
+              </a:defRPr>
+            </a:lvl1pPr>
+          </a:lstStyle>
+          <a:p>
+            <a:pPr algn="r"/>
+            <a:fld id="{F7021451-1387-4CA6-816F-3879F97B5CBC}" type="slidenum">
+              <a:rPr b="0" lang="en-US"/>
+              <a:t>8</a:t>
+            </a:fld>
+            <a:endParaRPr lang="en-US"/>
           </a:p>
         </p:txBody>
       </p:sp>
@@ -8725,6 +8117,178 @@
   <p:clrMapOvr>
     <a:masterClrMapping/>
   </p:clrMapOvr>
+  <p:transition spd="med">
+    <p:fade/>
+  </p:transition>
+  <p:timing>
+    <p:tnLst>
+      <p:par>
+        <p:cTn id="1" dur="indefinite" restart="never" nodeType="tmRoot">
+          <p:childTnLst>
+            <p:seq concurrent="1" nextAc="seek">
+              <p:cTn id="2" dur="indefinite" nodeType="mainSeq">
+                <p:childTnLst>
+                  <p:par>
+                    <p:cTn id="3" fill="hold">
+                      <p:stCondLst>
+                        <p:cond delay="indefinite"/>
+                        <p:cond evt="onBegin" delay="0">
+                          <p:tn val="2"/>
+                        </p:cond>
+                      </p:stCondLst>
+                      <p:childTnLst>
+                        <p:par>
+                          <p:cTn id="4" fill="hold">
+                            <p:stCondLst>
+                              <p:cond delay="0"/>
+                            </p:stCondLst>
+                            <p:childTnLst>
+                              <p:par>
+                                <p:cTn id="5" presetID="10" presetClass="entr" presetSubtype="0" fill="hold" nodeType="afterEffect">
+                                  <p:stCondLst>
+                                    <p:cond delay="0"/>
+                                  </p:stCondLst>
+                                  <p:childTnLst>
+                                    <p:set>
+                                      <p:cBhvr>
+                                        <p:cTn id="6" dur="1" fill="hold">
+                                          <p:stCondLst>
+                                            <p:cond delay="0"/>
+                                          </p:stCondLst>
+                                        </p:cTn>
+                                        <p:tgtEl>
+                                          <p:spTgt spid="3"/>
+                                        </p:tgtEl>
+                                        <p:attrNameLst>
+                                          <p:attrName>style.visibility</p:attrName>
+                                        </p:attrNameLst>
+                                      </p:cBhvr>
+                                      <p:to>
+                                        <p:strVal val="visible"/>
+                                      </p:to>
+                                    </p:set>
+                                    <p:animEffect transition="in" filter="fade">
+                                      <p:cBhvr>
+                                        <p:cTn id="7" dur="500"/>
+                                        <p:tgtEl>
+                                          <p:spTgt spid="3"/>
+                                        </p:tgtEl>
+                                      </p:cBhvr>
+                                    </p:animEffect>
+                                  </p:childTnLst>
+                                </p:cTn>
+                              </p:par>
+                              <p:par>
+                                <p:cTn id="8" presetID="10" presetClass="entr" presetSubtype="0" fill="hold" grpId="0" nodeType="withEffect">
+                                  <p:stCondLst>
+                                    <p:cond delay="0"/>
+                                  </p:stCondLst>
+                                  <p:childTnLst>
+                                    <p:set>
+                                      <p:cBhvr>
+                                        <p:cTn id="9" dur="1" fill="hold">
+                                          <p:stCondLst>
+                                            <p:cond delay="0"/>
+                                          </p:stCondLst>
+                                        </p:cTn>
+                                        <p:tgtEl>
+                                          <p:spTgt spid="4"/>
+                                        </p:tgtEl>
+                                        <p:attrNameLst>
+                                          <p:attrName>style.visibility</p:attrName>
+                                        </p:attrNameLst>
+                                      </p:cBhvr>
+                                      <p:to>
+                                        <p:strVal val="visible"/>
+                                      </p:to>
+                                    </p:set>
+                                    <p:animEffect transition="in" filter="fade">
+                                      <p:cBhvr>
+                                        <p:cTn id="10" dur="500"/>
+                                        <p:tgtEl>
+                                          <p:spTgt spid="4"/>
+                                        </p:tgtEl>
+                                      </p:cBhvr>
+                                    </p:animEffect>
+                                  </p:childTnLst>
+                                </p:cTn>
+                              </p:par>
+                            </p:childTnLst>
+                          </p:cTn>
+                        </p:par>
+                        <p:par>
+                          <p:cTn id="11" fill="hold">
+                            <p:stCondLst>
+                              <p:cond delay="500"/>
+                            </p:stCondLst>
+                            <p:childTnLst>
+                              <p:par>
+                                <p:cTn id="12" presetID="10" presetClass="entr" presetSubtype="0" fill="hold" grpId="0" nodeType="afterEffect">
+                                  <p:stCondLst>
+                                    <p:cond delay="0"/>
+                                  </p:stCondLst>
+                                  <p:childTnLst>
+                                    <p:set>
+                                      <p:cBhvr>
+                                        <p:cTn id="13" dur="1" fill="hold">
+                                          <p:stCondLst>
+                                            <p:cond delay="0"/>
+                                          </p:stCondLst>
+                                        </p:cTn>
+                                        <p:tgtEl>
+                                          <p:spTgt spid="5"/>
+                                        </p:tgtEl>
+                                        <p:attrNameLst>
+                                          <p:attrName>style.visibility</p:attrName>
+                                        </p:attrNameLst>
+                                      </p:cBhvr>
+                                      <p:to>
+                                        <p:strVal val="visible"/>
+                                      </p:to>
+                                    </p:set>
+                                    <p:animEffect transition="in" filter="fade">
+                                      <p:cBhvr>
+                                        <p:cTn id="14" dur="500"/>
+                                        <p:tgtEl>
+                                          <p:spTgt spid="5"/>
+                                        </p:tgtEl>
+                                      </p:cBhvr>
+                                    </p:animEffect>
+                                  </p:childTnLst>
+                                </p:cTn>
+                              </p:par>
+                            </p:childTnLst>
+                          </p:cTn>
+                        </p:par>
+                      </p:childTnLst>
+                    </p:cTn>
+                  </p:par>
+                </p:childTnLst>
+              </p:cTn>
+              <p:prevCondLst>
+                <p:cond evt="onPrev" delay="0">
+                  <p:tgtEl>
+                    <p:sldTgt/>
+                  </p:tgtEl>
+                </p:cond>
+              </p:prevCondLst>
+              <p:nextCondLst>
+                <p:cond evt="onNext" delay="0">
+                  <p:tgtEl>
+                    <p:sldTgt/>
+                  </p:tgtEl>
+                </p:cond>
+              </p:nextCondLst>
+            </p:seq>
+          </p:childTnLst>
+        </p:cTn>
+      </p:par>
+    </p:tnLst>
+    <p:bldLst>
+      <p:bldP spid="4" grpId="0"/>
+      <p:bldP spid="5" grpId="0"/>
+    </p:bldLst>
+  </p:timing>
 </p:sld>
 </file>
 
@@ -8754,14 +8318,14 @@
       </p:grpSpPr>
       <p:sp>
         <p:nvSpPr>
-          <p:cNvPr id="2" name="Text 0"/>
-          <p:cNvSpPr txBox="1"/>
+          <p:cNvPr id="2" name="Title"/>
+          <p:cNvSpPr/>
           <p:nvPr/>
         </p:nvSpPr>
         <p:spPr>
           <a:xfrm>
-            <a:off x="457200" y="274320"/>
-            <a:ext cx="8229600" cy="685800"/>
+            <a:off x="548640" y="320040"/>
+            <a:ext cx="8046720" cy="640080"/>
           </a:xfrm>
           <a:prstGeom prst="rect">
             <a:avLst/>
@@ -8779,11 +8343,11 @@
             <a:r>
               <a:rPr lang="en-US" sz="3000" b="1" dirty="0">
                 <a:solidFill>
-                  <a:srgbClr val="0E2340"/>
+                  <a:srgbClr val="000000"/>
                 </a:solidFill>
-                <a:latin typeface="Cambria" pitchFamily="34" charset="0"/>
-                <a:ea typeface="Cambria" pitchFamily="34" charset="-122"/>
-                <a:cs typeface="Cambria" pitchFamily="34" charset="-120"/>
+                <a:latin typeface="Calibri" pitchFamily="34" charset="0"/>
+                <a:ea typeface="Calibri" pitchFamily="34" charset="-122"/>
+                <a:cs typeface="Calibri" pitchFamily="34" charset="-120"/>
               </a:rPr>
               <a:t>Reality check: noise and circuit depth</a:t>
             </a:r>
@@ -8793,7 +8357,7 @@
       </p:sp>
       <p:pic>
         <p:nvPicPr>
-          <p:cNvPr id="3" name="Image 0" descr="fig_noise.png">    </p:cNvPr>
+          <p:cNvPr id="3" name="anim1" descr="fig_noise.png">    </p:cNvPr>
           <p:cNvPicPr>
             <a:picLocks noChangeAspect="1"/>
           </p:cNvPicPr>
@@ -8807,7 +8371,7 @@
         </p:blipFill>
         <p:spPr>
           <a:xfrm>
-            <a:off x="457200" y="1234440"/>
+            <a:off x="548640" y="1280160"/>
             <a:ext cx="4937760" cy="2492637"/>
           </a:xfrm>
           <a:prstGeom prst="rect">
@@ -8817,53 +8381,14 @@
       </p:pic>
       <p:sp>
         <p:nvSpPr>
-          <p:cNvPr id="4" name="Text 1"/>
-          <p:cNvSpPr txBox="1"/>
+          <p:cNvPr id="4" name="anim1"/>
+          <p:cNvSpPr/>
           <p:nvPr/>
         </p:nvSpPr>
         <p:spPr>
           <a:xfrm>
-            <a:off x="457200" y="3818517"/>
+            <a:off x="548640" y="3864237"/>
             <a:ext cx="4937760" cy="274320"/>
-          </a:xfrm>
-          <a:prstGeom prst="rect">
-            <a:avLst/>
-          </a:prstGeom>
-          <a:noFill/>
-          <a:ln/>
-        </p:spPr>
-        <p:txBody>
-          <a:bodyPr wrap="square" lIns="0" tIns="0" rIns="0" bIns="0" rtlCol="0" anchor="ctr"/>
-          <a:lstStyle/>
-          <a:p>
-            <a:pPr indent="0" marL="0">
-              <a:buNone/>
-            </a:pPr>
-            <a:r>
-              <a:rPr lang="en-US" sz="1150" dirty="0">
-                <a:solidFill>
-                  <a:srgbClr val="5B6472"/>
-                </a:solidFill>
-                <a:latin typeface="Calibri" pitchFamily="34" charset="0"/>
-                <a:ea typeface="Calibri" pitchFamily="34" charset="-122"/>
-                <a:cs typeface="Calibri" pitchFamily="34" charset="-120"/>
-              </a:rPr>
-              <a:t>Success probability against two-qubit gate error rate, for n = 8 to 20.</a:t>
-            </a:r>
-            <a:endParaRPr lang="en-US" sz="1150" dirty="0"/>
-          </a:p>
-        </p:txBody>
-      </p:sp>
-      <p:sp>
-        <p:nvSpPr>
-          <p:cNvPr id="5" name="Text 2"/>
-          <p:cNvSpPr txBox="1"/>
-          <p:nvPr/>
-        </p:nvSpPr>
-        <p:spPr>
-          <a:xfrm>
-            <a:off x="5760720" y="1280160"/>
-            <a:ext cx="2926080" cy="3200400"/>
           </a:xfrm>
           <a:prstGeom prst="rect">
             <a:avLst/>
@@ -8875,109 +8400,172 @@
           <a:bodyPr wrap="square" lIns="0" tIns="0" rIns="0" bIns="0" rtlCol="0" anchor="t"/>
           <a:lstStyle/>
           <a:p>
-            <a:pPr marL="342900" indent="-342900">
+            <a:pPr indent="0" marL="0">
+              <a:buNone/>
+            </a:pPr>
+            <a:r>
+              <a:rPr lang="en-US" sz="1200" dirty="0">
+                <a:solidFill>
+                  <a:srgbClr val="000000"/>
+                </a:solidFill>
+                <a:latin typeface="Calibri" pitchFamily="34" charset="0"/>
+                <a:ea typeface="Calibri" pitchFamily="34" charset="-122"/>
+                <a:cs typeface="Calibri" pitchFamily="34" charset="-120"/>
+              </a:rPr>
+              <a:t>Success probability against gate error rate, n = 8 to 20</a:t>
+            </a:r>
+            <a:endParaRPr lang="en-US" sz="1200" dirty="0"/>
+          </a:p>
+        </p:txBody>
+      </p:sp>
+      <p:sp>
+        <p:nvSpPr>
+          <p:cNvPr id="5" name="anim2"/>
+          <p:cNvSpPr/>
+          <p:nvPr/>
+        </p:nvSpPr>
+        <p:spPr>
+          <a:xfrm>
+            <a:off x="5852160" y="1371600"/>
+            <a:ext cx="2834640" cy="3200400"/>
+          </a:xfrm>
+          <a:prstGeom prst="rect">
+            <a:avLst/>
+          </a:prstGeom>
+          <a:noFill/>
+          <a:ln/>
+        </p:spPr>
+        <p:txBody>
+          <a:bodyPr wrap="square" lIns="0" tIns="0" rIns="0" bIns="0" rtlCol="0" anchor="t"/>
+          <a:lstStyle/>
+          <a:p>
+            <a:pPr marL="228600" indent="-228600">
               <a:spcAft>
-                <a:spcPts val="800"/>
+                <a:spcPts val="1000"/>
               </a:spcAft>
               <a:buSzPct val="100000"/>
               <a:buChar char="•"/>
             </a:pPr>
             <a:r>
-              <a:rPr lang="en-US" sz="1300" dirty="0">
+              <a:rPr lang="en-US" sz="1500" dirty="0">
                 <a:solidFill>
-                  <a:srgbClr val="14181F"/>
+                  <a:srgbClr val="000000"/>
                 </a:solidFill>
                 <a:latin typeface="Calibri" pitchFamily="34" charset="0"/>
                 <a:ea typeface="Calibri" pitchFamily="34" charset="-122"/>
                 <a:cs typeface="Calibri" pitchFamily="34" charset="-120"/>
               </a:rPr>
-              <a:t>n = 14 needs 26 logical qubits and about 30,000 two-qubit gates.</a:t>
+              <a:t>n = 14 needs 26 logical qubits and about 30,000 two-qubit gates</a:t>
             </a:r>
-            <a:endParaRPr lang="en-US" sz="1300" dirty="0"/>
-          </a:p>
-          <a:p>
-            <a:pPr marL="342900" indent="-342900">
+            <a:endParaRPr lang="en-US" sz="1500" dirty="0"/>
+          </a:p>
+          <a:p>
+            <a:pPr marL="228600" indent="-228600">
               <a:spcAft>
-                <a:spcPts val="800"/>
+                <a:spcPts val="1000"/>
               </a:spcAft>
               <a:buSzPct val="100000"/>
               <a:buChar char="•"/>
             </a:pPr>
             <a:r>
-              <a:rPr lang="en-US" sz="1300" dirty="0">
+              <a:rPr lang="en-US" sz="1500" dirty="0">
                 <a:solidFill>
-                  <a:srgbClr val="14181F"/>
+                  <a:srgbClr val="000000"/>
                 </a:solidFill>
                 <a:latin typeface="Calibri" pitchFamily="34" charset="0"/>
                 <a:ea typeface="Calibri" pitchFamily="34" charset="-122"/>
                 <a:cs typeface="Calibri" pitchFamily="34" charset="-120"/>
               </a:rPr>
-              <a:t>At 10⁻³ error per gate, the run almost never succeeds.</a:t>
+              <a:t>At 10⁻³ error per gate the run almost never succeeds</a:t>
             </a:r>
-            <a:endParaRPr lang="en-US" sz="1300" dirty="0"/>
-          </a:p>
-          <a:p>
-            <a:pPr marL="342900" indent="-342900">
+            <a:endParaRPr lang="en-US" sz="1500" dirty="0"/>
+          </a:p>
+          <a:p>
+            <a:pPr marL="228600" indent="-228600">
               <a:spcAft>
-                <a:spcPts val="800"/>
+                <a:spcPts val="1000"/>
               </a:spcAft>
               <a:buSzPct val="100000"/>
               <a:buChar char="•"/>
             </a:pPr>
             <a:r>
-              <a:rPr lang="en-US" sz="1300" dirty="0">
+              <a:rPr lang="en-US" sz="1500" dirty="0">
                 <a:solidFill>
-                  <a:srgbClr val="14181F"/>
+                  <a:srgbClr val="000000"/>
                 </a:solidFill>
                 <a:latin typeface="Calibri" pitchFamily="34" charset="0"/>
                 <a:ea typeface="Calibri" pitchFamily="34" charset="-122"/>
                 <a:cs typeface="Calibri" pitchFamily="34" charset="-120"/>
               </a:rPr>
-              <a:t>At 10⁻⁶ it succeeds 96.5% of the time.</a:t>
+              <a:t>At 10⁻⁶ it succeeds 96.5% of the time</a:t>
             </a:r>
-            <a:endParaRPr lang="en-US" sz="1300" dirty="0"/>
-          </a:p>
-          <a:p>
-            <a:pPr marL="342900" indent="-342900">
-              <a:spcAft>
-                <a:spcPts val="800"/>
-              </a:spcAft>
+            <a:endParaRPr lang="en-US" sz="1500" dirty="0"/>
+          </a:p>
+          <a:p>
+            <a:pPr marL="228600" indent="-228600">
               <a:buSzPct val="100000"/>
               <a:buChar char="•"/>
             </a:pPr>
             <a:r>
-              <a:rPr lang="en-US" sz="1300" dirty="0">
+              <a:rPr lang="en-US" sz="1500" dirty="0">
                 <a:solidFill>
-                  <a:srgbClr val="14181F"/>
+                  <a:srgbClr val="000000"/>
                 </a:solidFill>
                 <a:latin typeface="Calibri" pitchFamily="34" charset="0"/>
                 <a:ea typeface="Calibri" pitchFamily="34" charset="-122"/>
                 <a:cs typeface="Calibri" pitchFamily="34" charset="-120"/>
               </a:rPr>
-              <a:t>Faster and reliable only for n = 14–21, at 10⁻⁶ error and a simple oracle.</a:t>
+              <a:t>A realistic, hash-like oracle removes any usable advantage in the model</a:t>
             </a:r>
-            <a:endParaRPr lang="en-US" sz="1300" dirty="0"/>
-          </a:p>
-          <a:p>
-            <a:pPr marL="342900" indent="-342900">
-              <a:spcAft>
-                <a:spcPts val="800"/>
-              </a:spcAft>
-              <a:buSzPct val="100000"/>
-              <a:buChar char="•"/>
-            </a:pPr>
-            <a:r>
-              <a:rPr lang="en-US" sz="1300" dirty="0">
+            <a:endParaRPr lang="en-US" sz="1500" dirty="0"/>
+          </a:p>
+        </p:txBody>
+      </p:sp>
+      <p:sp>
+        <p:nvSpPr>
+          <p:cNvPr id="25" name="Slide Number Placeholder 0"/>
+          <p:cNvSpPr>
+            <a:spLocks noGrp="1"/>
+          </p:cNvSpPr>
+          <p:nvPr>
+            <p:ph type="sldNum" sz="quarter" idx="4294967295"/>
+          </p:nvPr>
+        </p:nvSpPr>
+        <p:spPr>
+          <a:xfrm>
+            <a:off x="8229600" y="4709160"/>
+            <a:ext cx="457200" cy="274320"/>
+          </a:xfrm>
+          <a:prstGeom prst="rect">
+            <a:avLst/>
+          </a:prstGeom>
+          <a:extLst>
+            <a:ext uri="{C572A759-6A51-4108-AA02-DFA0A04FC94B}">
+              <ma14:wrappingTextBoxFlag xmlns:ma14="http://schemas.microsoft.com/office/mac/drawingml/2011/main" val="0"/>
+            </a:ext>
+          </a:extLst>
+        </p:spPr>
+        <p:txBody>
+          <a:bodyPr/>
+          <a:lstStyle>
+            <a:lvl1pPr>
+              <a:defRPr sz="1000">
                 <a:solidFill>
-                  <a:srgbClr val="14181F"/>
+                  <a:srgbClr val="000000"/>
                 </a:solidFill>
-                <a:latin typeface="Calibri" pitchFamily="34" charset="0"/>
-                <a:ea typeface="Calibri" pitchFamily="34" charset="-122"/>
-                <a:cs typeface="Calibri" pitchFamily="34" charset="-120"/>
-              </a:rPr>
-              <a:t>A 5,000-Toffoli oracle (hash-like) removes the window entirely.</a:t>
-            </a:r>
-            <a:endParaRPr lang="en-US" sz="1300" dirty="0"/>
+                <a:latin typeface="Calibri"/>
+                <a:ea typeface="Calibri"/>
+                <a:cs typeface="Calibri"/>
+              </a:defRPr>
+            </a:lvl1pPr>
+          </a:lstStyle>
+          <a:p>
+            <a:pPr algn="r"/>
+            <a:fld id="{F7021451-1387-4CA6-816F-3879F97B5CBC}" type="slidenum">
+              <a:rPr b="0" lang="en-US"/>
+              <a:t>9</a:t>
+            </a:fld>
+            <a:endParaRPr lang="en-US"/>
           </a:p>
         </p:txBody>
       </p:sp>
@@ -8986,6 +8574,178 @@
   <p:clrMapOvr>
     <a:masterClrMapping/>
   </p:clrMapOvr>
+  <p:transition spd="med">
+    <p:fade/>
+  </p:transition>
+  <p:timing>
+    <p:tnLst>
+      <p:par>
+        <p:cTn id="1" dur="indefinite" restart="never" nodeType="tmRoot">
+          <p:childTnLst>
+            <p:seq concurrent="1" nextAc="seek">
+              <p:cTn id="2" dur="indefinite" nodeType="mainSeq">
+                <p:childTnLst>
+                  <p:par>
+                    <p:cTn id="3" fill="hold">
+                      <p:stCondLst>
+                        <p:cond delay="indefinite"/>
+                        <p:cond evt="onBegin" delay="0">
+                          <p:tn val="2"/>
+                        </p:cond>
+                      </p:stCondLst>
+                      <p:childTnLst>
+                        <p:par>
+                          <p:cTn id="4" fill="hold">
+                            <p:stCondLst>
+                              <p:cond delay="0"/>
+                            </p:stCondLst>
+                            <p:childTnLst>
+                              <p:par>
+                                <p:cTn id="5" presetID="10" presetClass="entr" presetSubtype="0" fill="hold" nodeType="afterEffect">
+                                  <p:stCondLst>
+                                    <p:cond delay="0"/>
+                                  </p:stCondLst>
+                                  <p:childTnLst>
+                                    <p:set>
+                                      <p:cBhvr>
+                                        <p:cTn id="6" dur="1" fill="hold">
+                                          <p:stCondLst>
+                                            <p:cond delay="0"/>
+                                          </p:stCondLst>
+                                        </p:cTn>
+                                        <p:tgtEl>
+                                          <p:spTgt spid="3"/>
+                                        </p:tgtEl>
+                                        <p:attrNameLst>
+                                          <p:attrName>style.visibility</p:attrName>
+                                        </p:attrNameLst>
+                                      </p:cBhvr>
+                                      <p:to>
+                                        <p:strVal val="visible"/>
+                                      </p:to>
+                                    </p:set>
+                                    <p:animEffect transition="in" filter="fade">
+                                      <p:cBhvr>
+                                        <p:cTn id="7" dur="500"/>
+                                        <p:tgtEl>
+                                          <p:spTgt spid="3"/>
+                                        </p:tgtEl>
+                                      </p:cBhvr>
+                                    </p:animEffect>
+                                  </p:childTnLst>
+                                </p:cTn>
+                              </p:par>
+                              <p:par>
+                                <p:cTn id="8" presetID="10" presetClass="entr" presetSubtype="0" fill="hold" grpId="0" nodeType="withEffect">
+                                  <p:stCondLst>
+                                    <p:cond delay="0"/>
+                                  </p:stCondLst>
+                                  <p:childTnLst>
+                                    <p:set>
+                                      <p:cBhvr>
+                                        <p:cTn id="9" dur="1" fill="hold">
+                                          <p:stCondLst>
+                                            <p:cond delay="0"/>
+                                          </p:stCondLst>
+                                        </p:cTn>
+                                        <p:tgtEl>
+                                          <p:spTgt spid="4"/>
+                                        </p:tgtEl>
+                                        <p:attrNameLst>
+                                          <p:attrName>style.visibility</p:attrName>
+                                        </p:attrNameLst>
+                                      </p:cBhvr>
+                                      <p:to>
+                                        <p:strVal val="visible"/>
+                                      </p:to>
+                                    </p:set>
+                                    <p:animEffect transition="in" filter="fade">
+                                      <p:cBhvr>
+                                        <p:cTn id="10" dur="500"/>
+                                        <p:tgtEl>
+                                          <p:spTgt spid="4"/>
+                                        </p:tgtEl>
+                                      </p:cBhvr>
+                                    </p:animEffect>
+                                  </p:childTnLst>
+                                </p:cTn>
+                              </p:par>
+                            </p:childTnLst>
+                          </p:cTn>
+                        </p:par>
+                        <p:par>
+                          <p:cTn id="11" fill="hold">
+                            <p:stCondLst>
+                              <p:cond delay="500"/>
+                            </p:stCondLst>
+                            <p:childTnLst>
+                              <p:par>
+                                <p:cTn id="12" presetID="10" presetClass="entr" presetSubtype="0" fill="hold" grpId="0" nodeType="afterEffect">
+                                  <p:stCondLst>
+                                    <p:cond delay="0"/>
+                                  </p:stCondLst>
+                                  <p:childTnLst>
+                                    <p:set>
+                                      <p:cBhvr>
+                                        <p:cTn id="13" dur="1" fill="hold">
+                                          <p:stCondLst>
+                                            <p:cond delay="0"/>
+                                          </p:stCondLst>
+                                        </p:cTn>
+                                        <p:tgtEl>
+                                          <p:spTgt spid="5"/>
+                                        </p:tgtEl>
+                                        <p:attrNameLst>
+                                          <p:attrName>style.visibility</p:attrName>
+                                        </p:attrNameLst>
+                                      </p:cBhvr>
+                                      <p:to>
+                                        <p:strVal val="visible"/>
+                                      </p:to>
+                                    </p:set>
+                                    <p:animEffect transition="in" filter="fade">
+                                      <p:cBhvr>
+                                        <p:cTn id="14" dur="500"/>
+                                        <p:tgtEl>
+                                          <p:spTgt spid="5"/>
+                                        </p:tgtEl>
+                                      </p:cBhvr>
+                                    </p:animEffect>
+                                  </p:childTnLst>
+                                </p:cTn>
+                              </p:par>
+                            </p:childTnLst>
+                          </p:cTn>
+                        </p:par>
+                      </p:childTnLst>
+                    </p:cTn>
+                  </p:par>
+                </p:childTnLst>
+              </p:cTn>
+              <p:prevCondLst>
+                <p:cond evt="onPrev" delay="0">
+                  <p:tgtEl>
+                    <p:sldTgt/>
+                  </p:tgtEl>
+                </p:cond>
+              </p:prevCondLst>
+              <p:nextCondLst>
+                <p:cond evt="onNext" delay="0">
+                  <p:tgtEl>
+                    <p:sldTgt/>
+                  </p:tgtEl>
+                </p:cond>
+              </p:nextCondLst>
+            </p:seq>
+          </p:childTnLst>
+        </p:cTn>
+      </p:par>
+    </p:tnLst>
+    <p:bldLst>
+      <p:bldP spid="4" grpId="0"/>
+      <p:bldP spid="5" grpId="0"/>
+    </p:bldLst>
+  </p:timing>
 </p:sld>
 </file>
 
